--- a/q5_video/Q5_handover_deck.pptx
+++ b/q5_video/Q5_handover_deck.pptx
@@ -514,7 +514,7 @@
           <a:p/>
           <a:p>
             <a:r>
-              <a:t>Hello. I'm handing over the analysis behind the IR team's estimates of how the market will react to our three upcoming readouts. My position: it's fit to inform those estimates, but not to produce a headline number, and it's far stronger on the downside than the upside. I'll cover what it supports, where it shouldn't be relied on, how it was produced, and how I checked it.</a:t>
+              <a:t>Hello. I'm handing over the analysis behind the IR team's estimates of how the market will react to our three upcoming readouts. My position: it's fit to inform those estimates, but not to produce a headline number, and it's far stronger on the downside than the upside. I'll cover what it supports, where it shouldn't be, how it was produced, and how I checked it.</a:t>
             </a:r>
           </a:p>
         </p:txBody>
@@ -666,19 +666,19 @@
           <a:p/>
           <a:p>
             <a:r>
-              <a:t>First, the ordering. For all three assets a negative readout is materially worse than a positive one, by fifteen to twenty-five points of central estimate, and that survives every seed I ran.</a:t>
+              <a:t>First, the ordering. For all three assets a negative readout is materially worse than a positive one, by sixteen to twenty-seven points of central estimate, and that survives every seed I ran.</a:t>
             </a:r>
           </a:p>
           <a:p/>
           <a:p>
             <a:r>
-              <a:t>Second, the downside for ASC-204. It sits in a cluster of 274 cardiovascular and renal outcome trials, 247 in the same therapeutic area, with 39 negative readouts behind the distribution. That's the estimate I'd let the funding decision rest on.</a:t>
+              <a:t>Second, the downside for ASC-204. It sits in a cluster of 266 cardiovascular and renal outcome trials, 246 in the same therapeutic area, with 34 negative readouts behind the distribution. That's the estimate I'd let the funding decision rest on.</a:t>
             </a:r>
           </a:p>
           <a:p/>
           <a:p>
             <a:r>
-              <a:t>[CUT IF LONG] Third, ranking severity. Of the announcements the model puts in its worst decile, 60 per cent fell more than ten per cent and 43 per cent fell more than twenty-five. It sorts readouts into 'could be severe' and 'probably won't be'. It won't tell you a stock moves fourteen per cent.</a:t>
+              <a:t>[CUT IF LONG] Third, ranking severity. Of the announcements the model puts in its worst decile, 61 per cent fell more than ten per cent and 43 per cent fell more than twenty-five. It sorts readouts into 'could be severe' and 'probably won't be' — not into a number.</a:t>
             </a:r>
           </a:p>
         </p:txBody>
@@ -766,13 +766,13 @@
           <a:p/>
           <a:p>
             <a:r>
-              <a:t>The upside is close to unmodelled. Within positive readouts the model explains about five per cent of the spread, and effectively nothing once I'm limited to what Asclepius can supply. For an upside case, quote the historical range, not a model output.</a:t>
+              <a:t>The upside is close to unmodelled. Within positive readouts the model explains about three per cent of the spread, and effectively nothing once I'm limited to what Asclepius can supply. For an upside case, quote the historical range, not a model output.</a:t>
             </a:r>
           </a:p>
           <a:p/>
           <a:p>
             <a:r>
-              <a:t>And Asclepius has no price history in this database. Volatility is most of what let the model size a bad outcome, so the bands are wide — about 68 points. That width is correct, not a gap more modelling closes.</a:t>
+              <a:t>And the dataset supplies no price series for Asclepius — a gap in the data, not a fact about the company. Volatility is most of what let the model size a bad outcome, so the bands are about 69 points wide. That width is correct, not something more modelling closes.</a:t>
             </a:r>
           </a:p>
         </p:txBody>
@@ -948,19 +948,19 @@
           <a:p/>
           <a:p>
             <a:r>
-              <a:t>I ran a leakage audit before fitting anything. With the nine excluded columns put back, R-squared goes from 0.21 to 0.96. The one that mattered was my own data-quality index — it lifted R-squared by 0.086, until I traced it to one signal built from the realised return. That's the leakage that survives review: it looks legitimate, and the name gives nothing away.</a:t>
+              <a:t>I ran a leakage audit before fitting anything. With the nine excluded columns put back, R-squared goes from 0.20 to 0.96. The one that mattered was my own data-quality index — it lifted R-squared by 0.14, until I traced it to one signal built from the realised return. That's the leakage that survives review — the name gives nothing away.</a:t>
             </a:r>
           </a:p>
           <a:p/>
           <a:p>
             <a:r>
-              <a:t>[CUT IF LONG] I validated against honest nulls — permuted features for the clustering, bootstrap by filing rather than by row, and forward chaining, which drops R-squared from 0.20 to 0.16. That's what the pipeline can deliver.</a:t>
+              <a:t>[CUT IF LONG] I validated against honest nulls — permuted features for the clustering, bootstrap by filing rather than by row, and forward chaining, which drops R-squared from 0.20 to 0.17. That's what the pipeline can deliver.</a:t>
             </a:r>
           </a:p>
           <a:p/>
           <a:p>
             <a:r>
-              <a:t>And I corrected my own claims: I'd told the team the range width was mainly not knowing the result. It's about a quarter.</a:t>
+              <a:t>And I corrected my own claims: I'd told the team the range width was mainly the unknown result. It's about a quarter.</a:t>
             </a:r>
           </a:p>
         </p:txBody>
@@ -4636,7 +4636,7 @@
                 </a:solidFill>
                 <a:latin typeface="Calibri"/>
               </a:rPr>
-              <a:t>R² = 0.05 within positive readouts — use history, not the model</a:t>
+              <a:t>R² = 0.03 within positive readouts — use history, not the model</a:t>
             </a:r>
           </a:p>
           <a:p>
@@ -4994,7 +4994,7 @@
                 </a:solidFill>
                 <a:latin typeface="Calibri"/>
               </a:rPr>
-              <a:t>Negative vs positive separated by 15–25 points of central estimate, for all three assets, and it survives every seed.</a:t>
+              <a:t>Negative vs positive separated by 16–27 points of central estimate, for all three assets, and it survives every seed.</a:t>
             </a:r>
           </a:p>
           <a:p>
@@ -5038,7 +5038,7 @@
                 </a:solidFill>
                 <a:latin typeface="Calibri"/>
               </a:rPr>
-              <a:t>274-trial cardiovascular and renal cluster · 247 in the same therapeutic area · 39 negative readouts behind the distribution.</a:t>
+              <a:t>266-trial cardiovascular and renal cluster · 246 in the same therapeutic area · 34 negative readouts behind the distribution.</a:t>
             </a:r>
           </a:p>
           <a:p>
@@ -5082,7 +5082,7 @@
                 </a:solidFill>
                 <a:latin typeface="Calibri"/>
               </a:rPr>
-              <a:t>Worst-ranked decile: 60% fell more than 10%, 43% more than 25%. AUC 0.77 for a fall beyond 25%.</a:t>
+              <a:t>Worst-ranked decile: 61% fell more than 10%, 43% more than 25%. AUC 0.78 for a fall beyond 25%.</a:t>
             </a:r>
           </a:p>
         </p:txBody>
@@ -5440,7 +5440,7 @@
                 </a:solidFill>
                 <a:latin typeface="Calibri"/>
               </a:rPr>
-              <a:t>R² ≈ 0.05 within positives, ~0 with the features Asclepius can supply. Quote the comparable-set range instead.</a:t>
+              <a:t>R² ≈ 0.03 within positives, ~0 with the features Asclepius can supply. Quote the comparable-set range instead.</a:t>
             </a:r>
           </a:p>
           <a:p>
@@ -5462,7 +5462,7 @@
                 </a:solidFill>
                 <a:latin typeface="Calibri"/>
               </a:rPr>
-              <a:t>Asclepius has no price history here.</a:t>
+              <a:t>The dataset supplies no price series for ASCL.</a:t>
             </a:r>
           </a:p>
           <a:p>
@@ -5484,7 +5484,7 @@
                 </a:solidFill>
                 <a:latin typeface="Calibri"/>
               </a:rPr>
-              <a:t>Volatility did most of the work in sizing a bad outcome. Bands are ~68 points wide — correctly wide, not a gap more modelling closes.</a:t>
+              <a:t>A gap in the data, not a fact about the company. Volatility did most of the work in sizing a bad outcome, so bands are ~69 points wide — correctly wide.</a:t>
             </a:r>
           </a:p>
         </p:txBody>
@@ -6200,7 +6200,7 @@
                 </a:solidFill>
                 <a:latin typeface="Calibri"/>
               </a:rPr>
-              <a:t>R² 0.21 → 0.96 with the nine excluded columns put back.</a:t>
+              <a:t>R² 0.20 → 0.96 with the nine excluded columns put back.</a:t>
             </a:r>
           </a:p>
           <a:p>
@@ -6244,7 +6244,7 @@
                 </a:solidFill>
                 <a:latin typeface="Calibri"/>
               </a:rPr>
-              <a:t>+0.086 R², traced to one signal built from the realised return — the leakage that survives review, because the name gives nothing away.</a:t>
+              <a:t>+0.14 R², traced to one signal built from the realised return — the leakage that survives review, because the name gives nothing away.</a:t>
             </a:r>
           </a:p>
           <a:p>
@@ -6288,7 +6288,7 @@
                 </a:solidFill>
                 <a:latin typeface="Calibri"/>
               </a:rPr>
-              <a:t>Permuted features · bootstrap by filing, not by row · forward chaining takes R² from 0.20 to 0.16 — what the pipeline can deliver.</a:t>
+              <a:t>Permuted features · bootstrap by filing, not by row · forward chaining takes R² from 0.20 to 0.17 — what the pipeline can deliver.</a:t>
             </a:r>
           </a:p>
           <a:p>

--- a/q5_video/Q5_handover_deck.pptx
+++ b/q5_video/Q5_handover_deck.pptx
@@ -12,6 +12,7 @@
     <p:sldId id="260" r:id="rId12"/>
     <p:sldId id="261" r:id="rId13"/>
     <p:sldId id="262" r:id="rId14"/>
+    <p:sldId id="263" r:id="rId15"/>
   </p:sldIdLst>
   <p:sldSz cx="12191695" cy="6858000" type="screen4x3"/>
   <p:notesSz cx="6858000" cy="9144000"/>
@@ -508,13 +509,13 @@
           <a:lstStyle/>
           <a:p>
             <a:r>
-              <a:t>[0:00 — ~28s]</a:t>
+              <a:t>[0:00 — ~19s]</a:t>
             </a:r>
           </a:p>
           <a:p/>
           <a:p>
             <a:r>
-              <a:t>Hello. I'm handing over the analysis behind the IR team's estimates of how the market will react to our three upcoming readouts. My position: it's fit to inform those estimates, but not to produce a headline number, and it's far stronger on the downside than the upside. I'll cover what it supports, where it shouldn't be, how it was produced, and how I checked it.</a:t>
+              <a:t>Hello. I'm handing over the analysis behind the IR team's estimates of how the market will react to our three upcoming readouts. My position: it's fit to inform those estimates, but not to produce a headline number, and it's far stronger on the downside than the upside.</a:t>
             </a:r>
           </a:p>
         </p:txBody>
@@ -584,7 +585,37 @@
           <a:lstStyle/>
           <a:p>
             <a:r>
-              <a:t>Hold this slide through the opening if you prefer a single frame while you set up the argument. Otherwise move here on 'far stronger on the downside than the upside'.</a:t>
+              <a:t>[0:19 — ~43s]</a:t>
+            </a:r>
+          </a:p>
+          <a:p/>
+          <a:p>
+            <a:r>
+              <a:t>Four stages.</a:t>
+            </a:r>
+          </a:p>
+          <a:p/>
+          <a:p>
+            <a:r>
+              <a:t>I validated the LLM's outcome labels — thirty filings read by hand against the original 8-Ks, then all 2,392 directional labels checked against the price move that followed. That gave a screen scoring all 4,539 classifications, which flags forty per cent, mostly for timing rather than a wrong label.</a:t>
+            </a:r>
+          </a:p>
+          <a:p/>
+          <a:p>
+            <a:r>
+              <a:t>I grouped 1,975 historical readouts into eight families, on disease, design, stage and sponsor, to find comparables.</a:t>
+            </a:r>
+          </a:p>
+          <a:p/>
+          <a:p>
+            <a:r>
+              <a:t>I modelled the three-day abnormal return from trial, text and company features; it explains twenty per cent of the variation.</a:t>
+            </a:r>
+          </a:p>
+          <a:p/>
+          <a:p>
+            <a:r>
+              <a:t>Then I applied that to our three readouts, three scenarios each, with a monitoring plan.</a:t>
             </a:r>
           </a:p>
         </p:txBody>
@@ -654,31 +685,7 @@
           <a:lstStyle/>
           <a:p>
             <a:r>
-              <a:t>[0:28 — ~53s]</a:t>
-            </a:r>
-          </a:p>
-          <a:p/>
-          <a:p>
-            <a:r>
-              <a:t>Three things I'd stand behind.</a:t>
-            </a:r>
-          </a:p>
-          <a:p/>
-          <a:p>
-            <a:r>
-              <a:t>First, the ordering. For all three assets a negative readout is materially worse than a positive one, by sixteen to twenty-seven points of central estimate, and that survives every seed I ran.</a:t>
-            </a:r>
-          </a:p>
-          <a:p/>
-          <a:p>
-            <a:r>
-              <a:t>Second, the downside for ASC-204. It sits in a cluster of 266 cardiovascular and renal outcome trials, 246 in the same therapeutic area, with 34 negative readouts behind the distribution. That's the estimate I'd let the funding decision rest on.</a:t>
-            </a:r>
-          </a:p>
-          <a:p/>
-          <a:p>
-            <a:r>
-              <a:t>[CUT IF LONG] Third, ranking severity. Of the announcements the model puts in its worst decile, 61 per cent fell more than ten per cent and 43 per cent fell more than twenty-five. It sorts readouts into 'could be severe' and 'probably won't be' — not into a number.</a:t>
+              <a:t>No script of its own — this frame carries the verdict while you move from what you built into the evidence for it. Land on it as you say 'so, three things I'd stand behind', then advance.</a:t>
             </a:r>
           </a:p>
         </p:txBody>
@@ -748,31 +755,31 @@
           <a:lstStyle/>
           <a:p>
             <a:r>
-              <a:t>[1:21 — ~57s]</a:t>
+              <a:t>[1:02 — ~45s]</a:t>
             </a:r>
           </a:p>
           <a:p/>
           <a:p>
             <a:r>
-              <a:t>Now the limits, and they're real.</a:t>
+              <a:t>So, three things I'd stand behind.</a:t>
             </a:r>
           </a:p>
           <a:p/>
           <a:p>
             <a:r>
-              <a:t>ASC-101 has effectively no comparables. The dataset holds seven hereditary angioedema readouts in total, so my method matched it on design, to vaccine trials, because it couldn't match on disease. That number is a Phase 3 base rate wearing a comparable set's clothes, and should be presented that way.</a:t>
+              <a:t>The ordering. For all three assets a negative readout is materially worse than a positive one, by sixteen to twenty-seven points of central estimate, and that survives every seed.</a:t>
             </a:r>
           </a:p>
           <a:p/>
           <a:p>
             <a:r>
-              <a:t>The upside is close to unmodelled. Within positive readouts the model explains about three per cent of the spread, and effectively nothing once I'm limited to what Asclepius can supply. For an upside case, quote the historical range, not a model output.</a:t>
+              <a:t>The downside for ASC-204. It sits in a cluster of 266 cardiovascular and renal outcome trials, 246 in the same therapeutic area, with 34 negative readouts behind it. That's the estimate I'd let the funding decision rest on.</a:t>
             </a:r>
           </a:p>
           <a:p/>
           <a:p>
             <a:r>
-              <a:t>And the dataset supplies no price series for Asclepius — a gap in the data, not a fact about the company. Volatility is most of what let the model size a bad outcome, so the bands are about 69 points wide. That width is correct, not something more modelling closes.</a:t>
+              <a:t>[CUT IF LONG] And severity ranking: 61 per cent of the announcements in the model's worst decile fell more than ten per cent. It sorts readouts into 'could be severe' and 'probably won't be', not into a number.</a:t>
             </a:r>
           </a:p>
         </p:txBody>
@@ -842,31 +849,31 @@
           <a:lstStyle/>
           <a:p>
             <a:r>
-              <a:t>[2:18 — ~52s]</a:t>
+              <a:t>[1:47 — ~52s]</a:t>
             </a:r>
           </a:p>
           <a:p/>
           <a:p>
             <a:r>
-              <a:t>I used Claude, through Claude Code, heavily and throughout — to write and debug the code, to pull result sentences out of the filings so I could read them, and to draft commentary I then rewrote. The full conversations are in the submitted log.</a:t>
+              <a:t>Now the limits, and they're real.</a:t>
             </a:r>
           </a:p>
           <a:p/>
           <a:p>
             <a:r>
-              <a:t>What I didn't delegate was the judgement. I set the constraints: no feature that wasn't observable before the event, and the illustrative announcement drafts excluded entirely, because they were written to express the assumed outcome. The thirty filings I read against the original 8-Ks are my reading, not its summary.</a:t>
+              <a:t>ASC-101 has effectively no comparables. The dataset holds seven hereditary angioedema readouts in total, so my method matched it to vaccine trials on design, having nothing to match on disease. That number is a Phase 3 base rate wearing a comparable set's clothes.</a:t>
             </a:r>
           </a:p>
           <a:p/>
           <a:p>
             <a:r>
-              <a:t>And I corrected it. It mapped all three mixed scenarios to mixed-positive; I read the ASC-204 draft, saw a missed primary endpoint rescued by a subgroup, and moved it to mixed-negative.</a:t>
+              <a:t>The upside is close to unmodelled — three per cent of the spread within positive readouts, and effectively nothing with the features Asclepius can supply. For an upside case, quote the historical range.</a:t>
             </a:r>
           </a:p>
           <a:p/>
           <a:p>
             <a:r>
-              <a:t>(If asked for more: it hard-coded a cluster by number, which breaks because k-means relabels on refit; and its first ablation conflated losing the text with losing the price history, so I had it split the comparison.)</a:t>
+              <a:t>And the dataset supplies no price series for Asclepius — a gap in the data, not a fact about the company. Volatility is most of what let the model size a bad outcome, so the bands are about 69 points wide, and correctly so.</a:t>
             </a:r>
           </a:p>
         </p:txBody>
@@ -936,31 +943,31 @@
           <a:lstStyle/>
           <a:p>
             <a:r>
-              <a:t>[3:10 — ~53s]</a:t>
+              <a:t>[2:39 — ~47s]</a:t>
             </a:r>
           </a:p>
           <a:p/>
           <a:p>
             <a:r>
-              <a:t>On checking, three things I'd point you at.</a:t>
+              <a:t>I used Claude, through Claude Code, heavily and throughout — to write and debug the code, to surface result sentences from the filings for me to read, and to draft commentary I rewrote. The full conversations are in the submitted log.</a:t>
             </a:r>
           </a:p>
           <a:p/>
           <a:p>
             <a:r>
-              <a:t>I ran a leakage audit before fitting anything. With the nine excluded columns put back, R-squared goes from 0.20 to 0.96. The one that mattered was my own data-quality index — it lifted R-squared by 0.14, until I traced it to one signal built from the realised return. That's the leakage that survives review — the name gives nothing away.</a:t>
+              <a:t>What I didn't delegate was the judgement. I set the constraints: no feature unobservable before the event, and the announcement drafts excluded entirely, because they were written to express the assumed outcome. The thirty filings are my reading, not its summary.</a:t>
             </a:r>
           </a:p>
           <a:p/>
           <a:p>
             <a:r>
-              <a:t>[CUT IF LONG] I validated against honest nulls — permuted features for the clustering, bootstrap by filing rather than by row, and forward chaining, which drops R-squared from 0.20 to 0.17. That's what the pipeline can deliver.</a:t>
+              <a:t>And I corrected it. It mapped all three mixed scenarios to mixed-positive; I read the ASC-204 draft, saw a missed primary endpoint rescued by a subgroup, and moved it to mixed-negative.</a:t>
             </a:r>
           </a:p>
           <a:p/>
           <a:p>
             <a:r>
-              <a:t>And I corrected my own claims: I'd told the team the range width was mainly the unknown result. It's about a quarter.</a:t>
+              <a:t>(If asked for more: it hard-coded a cluster by number, which breaks because k-means relabels on refit; and its first ablation conflated losing the text with losing the price history, so I had it split the comparison.)</a:t>
             </a:r>
           </a:p>
         </p:txBody>
@@ -1030,25 +1037,113 @@
           <a:lstStyle/>
           <a:p>
             <a:r>
-              <a:t>[4:03 — ~31s]</a:t>
+              <a:t>[3:26 — ~45s]</a:t>
             </a:r>
           </a:p>
           <a:p/>
           <a:p>
             <a:r>
-              <a:t>Under PG1 I'm responsible for the judgements here regardless of what produced the first draft of them — which means understanding the model before relying on it, and judging whether its assumptions suit the purpose. That's what I've tried to do.</a:t>
+              <a:t>On checking. I ran a leakage audit before fitting anything: with the nine excluded columns put back, R-squared goes from 0.20 to 0.96. The one that mattered was my own data-quality index — worth 0.14, until I traced it to one signal built from the realised return. That's the leakage that survives review; the name gives nothing away.</a:t>
             </a:r>
           </a:p>
           <a:p/>
           <a:p>
             <a:r>
+              <a:t>[CUT IF LONG] I validated against honest nulls — permuted features, bootstrap by filing rather than by row, and forward chaining, which drops R-squared to 0.17. That's what the pipeline can deliver.</a:t>
+            </a:r>
+          </a:p>
+          <a:p/>
+          <a:p>
+            <a:r>
+              <a:t>And I corrected my own claims: I'd told the team the range width was mainly the unknown result. It's about a quarter.</a:t>
+            </a:r>
+          </a:p>
+        </p:txBody>
+      </p:sp>
+      <p:sp>
+        <p:nvSpPr>
+          <p:cNvPr id="4" name="Slide Number Placeholder 3"/>
+          <p:cNvSpPr>
+            <a:spLocks noGrp="1"/>
+          </p:cNvSpPr>
+          <p:nvPr>
+            <p:ph type="sldNum" idx="5" sz="quarter"/>
+          </p:nvPr>
+        </p:nvSpPr>
+        <p:spPr/>
+      </p:sp>
+    </p:spTree>
+  </p:cSld>
+  <p:clrMapOvr>
+    <a:masterClrMapping/>
+  </p:clrMapOvr>
+</p:notes>
+</file>
+
+<file path=ppt/notesSlides/notesSlide8.xml><?xml version="1.0" encoding="utf-8"?>
+<p:notes xmlns:a="http://schemas.openxmlformats.org/drawingml/2006/main" xmlns:p="http://schemas.openxmlformats.org/presentationml/2006/main" xmlns:r="http://schemas.openxmlformats.org/officeDocument/2006/relationships">
+  <p:cSld>
+    <p:spTree>
+      <p:nvGrpSpPr>
+        <p:cNvPr id="1" name=""/>
+        <p:cNvGrpSpPr/>
+        <p:nvPr/>
+      </p:nvGrpSpPr>
+      <p:grpSpPr>
+        <a:xfrm>
+          <a:off x="0" y="0"/>
+          <a:ext cx="0" cy="0"/>
+          <a:chOff x="0" y="0"/>
+          <a:chExt cx="0" cy="0"/>
+        </a:xfrm>
+      </p:grpSpPr>
+      <p:sp>
+        <p:nvSpPr>
+          <p:cNvPr id="2" name="Slide Image Placeholder 1"/>
+          <p:cNvSpPr>
+            <a:spLocks noGrp="1"/>
+          </p:cNvSpPr>
+          <p:nvPr>
+            <p:ph type="sldImg" idx="2"/>
+          </p:nvPr>
+        </p:nvSpPr>
+        <p:spPr/>
+      </p:sp>
+      <p:sp>
+        <p:nvSpPr>
+          <p:cNvPr id="3" name="Notes Placeholder 2"/>
+          <p:cNvSpPr>
+            <a:spLocks noGrp="1"/>
+          </p:cNvSpPr>
+          <p:nvPr>
+            <p:ph type="body" idx="3" sz="quarter"/>
+          </p:nvPr>
+        </p:nvSpPr>
+        <p:spPr/>
+        <p:txBody>
+          <a:bodyPr/>
+          <a:lstStyle/>
+          <a:p>
+            <a:r>
+              <a:t>[4:11 — ~29s]</a:t>
+            </a:r>
+          </a:p>
+          <a:p/>
+          <a:p>
+            <a:r>
+              <a:t>Under PG1 I'm responsible for the judgements here regardless of what produced the first draft of them — which means understanding the model before relying on it, and judging whether its assumptions suit the purpose.</a:t>
+            </a:r>
+          </a:p>
+          <a:p/>
+          <a:p>
+            <a:r>
               <a:t>If your time is limited, I'd put it on two things: my decision to exclude the announcement drafts, and whether the ASC-101 estimate should go in front of the board at all. Thank you.</a:t>
             </a:r>
           </a:p>
           <a:p/>
           <a:p>
             <a:r>
-              <a:t>END — target 4:30, limit 5:00.</a:t>
+              <a:t>END — target 4:40, limit 5:00.</a:t>
             </a:r>
           </a:p>
         </p:txBody>
@@ -4458,7 +4553,7 @@
                 </a:solidFill>
                 <a:latin typeface="Calibri"/>
               </a:rPr>
-              <a:t>MY OPINION</a:t>
+              <a:t>WHAT I BUILT</a:t>
             </a:r>
           </a:p>
           <a:p>
@@ -4480,8 +4575,7 @@
                 </a:solidFill>
                 <a:latin typeface="Calibri"/>
               </a:rPr>
-              <a:t>Rely on it to inform —
-not to produce a number</a:t>
+              <a:t>Four stages</a:t>
             </a:r>
           </a:p>
         </p:txBody>
@@ -4494,7 +4588,7 @@
         </p:nvSpPr>
         <p:spPr>
           <a:xfrm>
-            <a:off x="5532120" y="2121408"/>
+            <a:off x="5532120" y="1847088"/>
             <a:ext cx="1371600" cy="38100"/>
           </a:xfrm>
           <a:prstGeom prst="rect">
@@ -4538,8 +4632,8 @@
         </p:nvSpPr>
         <p:spPr>
           <a:xfrm>
-            <a:off x="5532120" y="2395728"/>
-            <a:ext cx="6110935" cy="3657600"/>
+            <a:off x="5532120" y="2121408"/>
+            <a:ext cx="6110935" cy="4114800"/>
           </a:xfrm>
           <a:prstGeom prst="rect">
             <a:avLst/>
@@ -4560,111 +4654,23 @@
                 <a:spcPts val="0"/>
               </a:spcBef>
               <a:spcAft>
-                <a:spcPts val="400"/>
+                <a:spcPts val="300"/>
               </a:spcAft>
             </a:pPr>
             <a:r>
-              <a:rPr sz="2100" b="1" i="0">
+              <a:rPr sz="1800" b="1" i="0">
                 <a:solidFill>
                   <a:srgbClr val="141B2D"/>
                 </a:solidFill>
                 <a:latin typeface="Calibri"/>
               </a:rPr>
-              <a:t>Strong on the downside.</a:t>
+              <a:t>Validated the outcome labels.</a:t>
             </a:r>
           </a:p>
           <a:p>
             <a:pPr>
               <a:lnSpc>
-                <a:spcPct val="108000"/>
-              </a:lnSpc>
-              <a:spcBef>
-                <a:spcPts val="0"/>
-              </a:spcBef>
-              <a:spcAft>
-                <a:spcPts val="1600"/>
-              </a:spcAft>
-            </a:pPr>
-            <a:r>
-              <a:rPr sz="1500" b="0" i="0">
-                <a:solidFill>
-                  <a:srgbClr val="5A6478"/>
-                </a:solidFill>
-                <a:latin typeface="Calibri"/>
-              </a:rPr>
-              <a:t>R² = 0.31 within negative readouts</a:t>
-            </a:r>
-          </a:p>
-          <a:p>
-            <a:pPr>
-              <a:lnSpc>
-                <a:spcPct val="108000"/>
-              </a:lnSpc>
-              <a:spcBef>
-                <a:spcPts val="0"/>
-              </a:spcBef>
-              <a:spcAft>
-                <a:spcPts val="400"/>
-              </a:spcAft>
-            </a:pPr>
-            <a:r>
-              <a:rPr sz="2100" b="1" i="0">
-                <a:solidFill>
-                  <a:srgbClr val="A8322D"/>
-                </a:solidFill>
-                <a:latin typeface="Calibri"/>
-              </a:rPr>
-              <a:t>Weak on the upside.</a:t>
-            </a:r>
-          </a:p>
-          <a:p>
-            <a:pPr>
-              <a:lnSpc>
-                <a:spcPct val="108000"/>
-              </a:lnSpc>
-              <a:spcBef>
-                <a:spcPts val="0"/>
-              </a:spcBef>
-              <a:spcAft>
-                <a:spcPts val="1600"/>
-              </a:spcAft>
-            </a:pPr>
-            <a:r>
-              <a:rPr sz="1500" b="0" i="0">
-                <a:solidFill>
-                  <a:srgbClr val="5A6478"/>
-                </a:solidFill>
-                <a:latin typeface="Calibri"/>
-              </a:rPr>
-              <a:t>R² = 0.03 within positive readouts — use history, not the model</a:t>
-            </a:r>
-          </a:p>
-          <a:p>
-            <a:pPr>
-              <a:lnSpc>
-                <a:spcPct val="108000"/>
-              </a:lnSpc>
-              <a:spcBef>
-                <a:spcPts val="0"/>
-              </a:spcBef>
-              <a:spcAft>
-                <a:spcPts val="400"/>
-              </a:spcAft>
-            </a:pPr>
-            <a:r>
-              <a:rPr sz="2100" b="1" i="0">
-                <a:solidFill>
-                  <a:srgbClr val="141B2D"/>
-                </a:solidFill>
-                <a:latin typeface="Calibri"/>
-              </a:rPr>
-              <a:t>Not a forecast, a ranking.</a:t>
-            </a:r>
-          </a:p>
-          <a:p>
-            <a:pPr>
-              <a:lnSpc>
-                <a:spcPct val="108000"/>
+                <a:spcPct val="112000"/>
               </a:lnSpc>
               <a:spcBef>
                 <a:spcPts val="0"/>
@@ -4674,13 +4680,145 @@
               </a:spcAft>
             </a:pPr>
             <a:r>
-              <a:rPr sz="1500" b="0" i="0">
+              <a:rPr sz="1400" b="0" i="0">
                 <a:solidFill>
                   <a:srgbClr val="5A6478"/>
                 </a:solidFill>
                 <a:latin typeface="Calibri"/>
               </a:rPr>
-              <a:t>Typical error on a single event is about 21 percentage points</a:t>
+              <a:t>30 filings read by hand · all 2,392 directional labels checked against the realised move · a screen over all 4,539 classifications flags 40%, mostly timing rather than wrong labels.</a:t>
+            </a:r>
+          </a:p>
+          <a:p>
+            <a:pPr>
+              <a:lnSpc>
+                <a:spcPct val="108000"/>
+              </a:lnSpc>
+              <a:spcBef>
+                <a:spcPts val="1200"/>
+              </a:spcBef>
+              <a:spcAft>
+                <a:spcPts val="300"/>
+              </a:spcAft>
+            </a:pPr>
+            <a:r>
+              <a:rPr sz="1800" b="1" i="0">
+                <a:solidFill>
+                  <a:srgbClr val="141B2D"/>
+                </a:solidFill>
+                <a:latin typeface="Calibri"/>
+              </a:rPr>
+              <a:t>Grouped 1,975 readouts into eight families.</a:t>
+            </a:r>
+          </a:p>
+          <a:p>
+            <a:pPr>
+              <a:lnSpc>
+                <a:spcPct val="112000"/>
+              </a:lnSpc>
+              <a:spcBef>
+                <a:spcPts val="0"/>
+              </a:spcBef>
+              <a:spcAft>
+                <a:spcPts val="0"/>
+              </a:spcAft>
+            </a:pPr>
+            <a:r>
+              <a:rPr sz="1400" b="0" i="0">
+                <a:solidFill>
+                  <a:srgbClr val="5A6478"/>
+                </a:solidFill>
+                <a:latin typeface="Calibri"/>
+              </a:rPr>
+              <a:t>Disease, design, stage and sponsor — to find comparables for each readout.</a:t>
+            </a:r>
+          </a:p>
+          <a:p>
+            <a:pPr>
+              <a:lnSpc>
+                <a:spcPct val="108000"/>
+              </a:lnSpc>
+              <a:spcBef>
+                <a:spcPts val="1200"/>
+              </a:spcBef>
+              <a:spcAft>
+                <a:spcPts val="300"/>
+              </a:spcAft>
+            </a:pPr>
+            <a:r>
+              <a:rPr sz="1800" b="1" i="0">
+                <a:solidFill>
+                  <a:srgbClr val="141B2D"/>
+                </a:solidFill>
+                <a:latin typeface="Calibri"/>
+              </a:rPr>
+              <a:t>Modelled the three-day abnormal return.</a:t>
+            </a:r>
+          </a:p>
+          <a:p>
+            <a:pPr>
+              <a:lnSpc>
+                <a:spcPct val="112000"/>
+              </a:lnSpc>
+              <a:spcBef>
+                <a:spcPts val="0"/>
+              </a:spcBef>
+              <a:spcAft>
+                <a:spcPts val="0"/>
+              </a:spcAft>
+            </a:pPr>
+            <a:r>
+              <a:rPr sz="1400" b="0" i="0">
+                <a:solidFill>
+                  <a:srgbClr val="5A6478"/>
+                </a:solidFill>
+                <a:latin typeface="Calibri"/>
+              </a:rPr>
+              <a:t>Trial, text and company features, scored on held-out announcements. Explains 20%.</a:t>
+            </a:r>
+          </a:p>
+          <a:p>
+            <a:pPr>
+              <a:lnSpc>
+                <a:spcPct val="108000"/>
+              </a:lnSpc>
+              <a:spcBef>
+                <a:spcPts val="1200"/>
+              </a:spcBef>
+              <a:spcAft>
+                <a:spcPts val="300"/>
+              </a:spcAft>
+            </a:pPr>
+            <a:r>
+              <a:rPr sz="1800" b="1" i="0">
+                <a:solidFill>
+                  <a:srgbClr val="141B2D"/>
+                </a:solidFill>
+                <a:latin typeface="Calibri"/>
+              </a:rPr>
+              <a:t>Applied it to the three readouts.</a:t>
+            </a:r>
+          </a:p>
+          <a:p>
+            <a:pPr>
+              <a:lnSpc>
+                <a:spcPct val="112000"/>
+              </a:lnSpc>
+              <a:spcBef>
+                <a:spcPts val="0"/>
+              </a:spcBef>
+              <a:spcAft>
+                <a:spcPts val="0"/>
+              </a:spcAft>
+            </a:pPr>
+            <a:r>
+              <a:rPr sz="1400" b="0" i="0">
+                <a:solidFill>
+                  <a:srgbClr val="5A6478"/>
+                </a:solidFill>
+                <a:latin typeface="Calibri"/>
+              </a:rPr>
+              <a:t>Three scenarios each, plus a validation, monitoring and refresh plan.</a:t>
             </a:r>
           </a:p>
         </p:txBody>
@@ -4860,7 +4998,7 @@
                 </a:solidFill>
                 <a:latin typeface="Calibri"/>
               </a:rPr>
-              <a:t>WHAT THE ANALYSIS SUPPORTS</a:t>
+              <a:t>MY OPINION</a:t>
             </a:r>
           </a:p>
           <a:p>
@@ -4882,8 +5020,8 @@
                 </a:solidFill>
                 <a:latin typeface="Calibri"/>
               </a:rPr>
-              <a:t>Three things I'd
-stand behind</a:t>
+              <a:t>Rely on it to inform —
+not to produce a number</a:t>
             </a:r>
           </a:p>
         </p:txBody>
@@ -4896,7 +5034,7 @@
         </p:nvSpPr>
         <p:spPr>
           <a:xfrm>
-            <a:off x="5532120" y="1847088"/>
+            <a:off x="5532120" y="2121408"/>
             <a:ext cx="1371600" cy="38100"/>
           </a:xfrm>
           <a:prstGeom prst="rect">
@@ -4940,8 +5078,8 @@
         </p:nvSpPr>
         <p:spPr>
           <a:xfrm>
-            <a:off x="5532120" y="2121408"/>
-            <a:ext cx="6110935" cy="4114800"/>
+            <a:off x="5532120" y="2395728"/>
+            <a:ext cx="6110935" cy="3657600"/>
           </a:xfrm>
           <a:prstGeom prst="rect">
             <a:avLst/>
@@ -4962,23 +5100,111 @@
                 <a:spcPts val="0"/>
               </a:spcBef>
               <a:spcAft>
-                <a:spcPts val="300"/>
+                <a:spcPts val="400"/>
               </a:spcAft>
             </a:pPr>
             <a:r>
-              <a:rPr sz="1900" b="1" i="0">
+              <a:rPr sz="2100" b="1" i="0">
                 <a:solidFill>
                   <a:srgbClr val="141B2D"/>
                 </a:solidFill>
                 <a:latin typeface="Calibri"/>
               </a:rPr>
-              <a:t>The ordering is reliable.</a:t>
+              <a:t>Strong on the downside.</a:t>
             </a:r>
           </a:p>
           <a:p>
             <a:pPr>
               <a:lnSpc>
-                <a:spcPct val="112000"/>
+                <a:spcPct val="108000"/>
+              </a:lnSpc>
+              <a:spcBef>
+                <a:spcPts val="0"/>
+              </a:spcBef>
+              <a:spcAft>
+                <a:spcPts val="1600"/>
+              </a:spcAft>
+            </a:pPr>
+            <a:r>
+              <a:rPr sz="1500" b="0" i="0">
+                <a:solidFill>
+                  <a:srgbClr val="5A6478"/>
+                </a:solidFill>
+                <a:latin typeface="Calibri"/>
+              </a:rPr>
+              <a:t>R² = 0.31 within negative readouts</a:t>
+            </a:r>
+          </a:p>
+          <a:p>
+            <a:pPr>
+              <a:lnSpc>
+                <a:spcPct val="108000"/>
+              </a:lnSpc>
+              <a:spcBef>
+                <a:spcPts val="0"/>
+              </a:spcBef>
+              <a:spcAft>
+                <a:spcPts val="400"/>
+              </a:spcAft>
+            </a:pPr>
+            <a:r>
+              <a:rPr sz="2100" b="1" i="0">
+                <a:solidFill>
+                  <a:srgbClr val="A8322D"/>
+                </a:solidFill>
+                <a:latin typeface="Calibri"/>
+              </a:rPr>
+              <a:t>Weak on the upside.</a:t>
+            </a:r>
+          </a:p>
+          <a:p>
+            <a:pPr>
+              <a:lnSpc>
+                <a:spcPct val="108000"/>
+              </a:lnSpc>
+              <a:spcBef>
+                <a:spcPts val="0"/>
+              </a:spcBef>
+              <a:spcAft>
+                <a:spcPts val="1600"/>
+              </a:spcAft>
+            </a:pPr>
+            <a:r>
+              <a:rPr sz="1500" b="0" i="0">
+                <a:solidFill>
+                  <a:srgbClr val="5A6478"/>
+                </a:solidFill>
+                <a:latin typeface="Calibri"/>
+              </a:rPr>
+              <a:t>R² = 0.03 within positive readouts — use history, not the model</a:t>
+            </a:r>
+          </a:p>
+          <a:p>
+            <a:pPr>
+              <a:lnSpc>
+                <a:spcPct val="108000"/>
+              </a:lnSpc>
+              <a:spcBef>
+                <a:spcPts val="0"/>
+              </a:spcBef>
+              <a:spcAft>
+                <a:spcPts val="400"/>
+              </a:spcAft>
+            </a:pPr>
+            <a:r>
+              <a:rPr sz="2100" b="1" i="0">
+                <a:solidFill>
+                  <a:srgbClr val="141B2D"/>
+                </a:solidFill>
+                <a:latin typeface="Calibri"/>
+              </a:rPr>
+              <a:t>Not a forecast, a ranking.</a:t>
+            </a:r>
+          </a:p>
+          <a:p>
+            <a:pPr>
+              <a:lnSpc>
+                <a:spcPct val="108000"/>
               </a:lnSpc>
               <a:spcBef>
                 <a:spcPts val="0"/>
@@ -4994,95 +5220,7 @@
                 </a:solidFill>
                 <a:latin typeface="Calibri"/>
               </a:rPr>
-              <a:t>Negative vs positive separated by 16–27 points of central estimate, for all three assets, and it survives every seed.</a:t>
-            </a:r>
-          </a:p>
-          <a:p>
-            <a:pPr>
-              <a:lnSpc>
-                <a:spcPct val="108000"/>
-              </a:lnSpc>
-              <a:spcBef>
-                <a:spcPts val="1400"/>
-              </a:spcBef>
-              <a:spcAft>
-                <a:spcPts val="300"/>
-              </a:spcAft>
-            </a:pPr>
-            <a:r>
-              <a:rPr sz="1900" b="1" i="0">
-                <a:solidFill>
-                  <a:srgbClr val="141B2D"/>
-                </a:solidFill>
-                <a:latin typeface="Calibri"/>
-              </a:rPr>
-              <a:t>ASC-204's downside is well evidenced.</a:t>
-            </a:r>
-          </a:p>
-          <a:p>
-            <a:pPr>
-              <a:lnSpc>
-                <a:spcPct val="112000"/>
-              </a:lnSpc>
-              <a:spcBef>
-                <a:spcPts val="0"/>
-              </a:spcBef>
-              <a:spcAft>
-                <a:spcPts val="0"/>
-              </a:spcAft>
-            </a:pPr>
-            <a:r>
-              <a:rPr sz="1500" b="0" i="0">
-                <a:solidFill>
-                  <a:srgbClr val="5A6478"/>
-                </a:solidFill>
-                <a:latin typeface="Calibri"/>
-              </a:rPr>
-              <a:t>266-trial cardiovascular and renal cluster · 246 in the same therapeutic area · 34 negative readouts behind the distribution.</a:t>
-            </a:r>
-          </a:p>
-          <a:p>
-            <a:pPr>
-              <a:lnSpc>
-                <a:spcPct val="108000"/>
-              </a:lnSpc>
-              <a:spcBef>
-                <a:spcPts val="1400"/>
-              </a:spcBef>
-              <a:spcAft>
-                <a:spcPts val="300"/>
-              </a:spcAft>
-            </a:pPr>
-            <a:r>
-              <a:rPr sz="1900" b="1" i="0">
-                <a:solidFill>
-                  <a:srgbClr val="141B2D"/>
-                </a:solidFill>
-                <a:latin typeface="Calibri"/>
-              </a:rPr>
-              <a:t>It ranks severity.</a:t>
-            </a:r>
-          </a:p>
-          <a:p>
-            <a:pPr>
-              <a:lnSpc>
-                <a:spcPct val="112000"/>
-              </a:lnSpc>
-              <a:spcBef>
-                <a:spcPts val="0"/>
-              </a:spcBef>
-              <a:spcAft>
-                <a:spcPts val="0"/>
-              </a:spcAft>
-            </a:pPr>
-            <a:r>
-              <a:rPr sz="1500" b="0" i="0">
-                <a:solidFill>
-                  <a:srgbClr val="5A6478"/>
-                </a:solidFill>
-                <a:latin typeface="Calibri"/>
-              </a:rPr>
-              <a:t>Worst-ranked decile: 61% fell more than 10%, 43% more than 25%. AUC 0.78 for a fall beyond 25%.</a:t>
+              <a:t>Typical error on a single event is about 21 percentage points</a:t>
             </a:r>
           </a:p>
         </p:txBody>
@@ -5262,7 +5400,7 @@
                 </a:solidFill>
                 <a:latin typeface="Calibri"/>
               </a:rPr>
-              <a:t>WHERE IT SHOULD NOT BE RELIED UPON</a:t>
+              <a:t>WHAT THE ANALYSIS SUPPORTS</a:t>
             </a:r>
           </a:p>
           <a:p>
@@ -5280,12 +5418,12 @@
             <a:r>
               <a:rPr sz="3000" b="1" i="0">
                 <a:solidFill>
-                  <a:srgbClr val="A8322D"/>
+                  <a:srgbClr val="1F4E79"/>
                 </a:solidFill>
                 <a:latin typeface="Calibri"/>
               </a:rPr>
-              <a:t>Three limits,
-and they are real</a:t>
+              <a:t>Three things I'd
+stand behind</a:t>
             </a:r>
           </a:p>
         </p:txBody>
@@ -5305,7 +5443,7 @@
             <a:avLst/>
           </a:prstGeom>
           <a:solidFill>
-            <a:srgbClr val="A8322D"/>
+            <a:srgbClr val="1F4E79"/>
           </a:solidFill>
           <a:ln>
             <a:noFill/>
@@ -5374,7 +5512,7 @@
                 </a:solidFill>
                 <a:latin typeface="Calibri"/>
               </a:rPr>
-              <a:t>ASC-101 has effectively no comparables.</a:t>
+              <a:t>The ordering is reliable.</a:t>
             </a:r>
           </a:p>
           <a:p>
@@ -5396,7 +5534,7 @@
                 </a:solidFill>
                 <a:latin typeface="Calibri"/>
               </a:rPr>
-              <a:t>7 hereditary angioedema readouts in the whole dataset. Matched to vaccine trials on design because disease was unmatchable — a Phase 3 base rate, and it must be labelled as one.</a:t>
+              <a:t>Negative vs positive separated by 16–27 points of central estimate, for all three assets, and it survives every seed.</a:t>
             </a:r>
           </a:p>
           <a:p>
@@ -5418,7 +5556,7 @@
                 </a:solidFill>
                 <a:latin typeface="Calibri"/>
               </a:rPr>
-              <a:t>The upside is close to unmodelled.</a:t>
+              <a:t>ASC-204's downside is well evidenced.</a:t>
             </a:r>
           </a:p>
           <a:p>
@@ -5440,7 +5578,7 @@
                 </a:solidFill>
                 <a:latin typeface="Calibri"/>
               </a:rPr>
-              <a:t>R² ≈ 0.03 within positives, ~0 with the features Asclepius can supply. Quote the comparable-set range instead.</a:t>
+              <a:t>266-trial cardiovascular and renal cluster · 246 in the same therapeutic area · 34 negative readouts behind the distribution.</a:t>
             </a:r>
           </a:p>
           <a:p>
@@ -5462,7 +5600,7 @@
                 </a:solidFill>
                 <a:latin typeface="Calibri"/>
               </a:rPr>
-              <a:t>The dataset supplies no price series for ASCL.</a:t>
+              <a:t>It ranks severity.</a:t>
             </a:r>
           </a:p>
           <a:p>
@@ -5484,7 +5622,7 @@
                 </a:solidFill>
                 <a:latin typeface="Calibri"/>
               </a:rPr>
-              <a:t>A gap in the data, not a fact about the company. Volatility did most of the work in sizing a bad outcome, so bands are ~69 points wide — correctly wide.</a:t>
+              <a:t>Worst-ranked decile: 61% fell more than 10%, 43% more than 25%. AUC 0.78 for a fall beyond 25%.</a:t>
             </a:r>
           </a:p>
         </p:txBody>
@@ -5664,7 +5802,7 @@
                 </a:solidFill>
                 <a:latin typeface="Calibri"/>
               </a:rPr>
-              <a:t>HOW THE WORK WAS PRODUCED</a:t>
+              <a:t>WHERE IT SHOULD NOT BE RELIED UPON</a:t>
             </a:r>
           </a:p>
           <a:p>
@@ -5682,12 +5820,12 @@
             <a:r>
               <a:rPr sz="3000" b="1" i="0">
                 <a:solidFill>
-                  <a:srgbClr val="1F4E79"/>
+                  <a:srgbClr val="A8322D"/>
                 </a:solidFill>
                 <a:latin typeface="Calibri"/>
               </a:rPr>
-              <a:t>AI throughout —
-judgement not delegated</a:t>
+              <a:t>Three limits,
+and they are real</a:t>
             </a:r>
           </a:p>
         </p:txBody>
@@ -5707,7 +5845,7 @@
             <a:avLst/>
           </a:prstGeom>
           <a:solidFill>
-            <a:srgbClr val="1F4E79"/>
+            <a:srgbClr val="A8322D"/>
           </a:solidFill>
           <a:ln>
             <a:noFill/>
@@ -5776,7 +5914,7 @@
                 </a:solidFill>
                 <a:latin typeface="Calibri"/>
               </a:rPr>
-              <a:t>Claude, via Claude Code, heavily and throughout.</a:t>
+              <a:t>ASC-101 has effectively no comparables.</a:t>
             </a:r>
           </a:p>
           <a:p>
@@ -5798,7 +5936,7 @@
                 </a:solidFill>
                 <a:latin typeface="Calibri"/>
               </a:rPr>
-              <a:t>Code written and debugged, result sentences pulled from the filings for me to read, commentary drafted and then rewritten. Full logs submitted.</a:t>
+              <a:t>7 hereditary angioedema readouts in the whole dataset. Matched to vaccine trials on design because disease was unmatchable — a Phase 3 base rate, and it must be labelled as one.</a:t>
             </a:r>
           </a:p>
           <a:p>
@@ -5820,7 +5958,7 @@
                 </a:solidFill>
                 <a:latin typeface="Calibri"/>
               </a:rPr>
-              <a:t>The constraints were mine.</a:t>
+              <a:t>The upside is close to unmodelled.</a:t>
             </a:r>
           </a:p>
           <a:p>
@@ -5842,7 +5980,7 @@
                 </a:solidFill>
                 <a:latin typeface="Calibri"/>
               </a:rPr>
-              <a:t>No feature unobservable before the event. Announcement drafts excluded as circular. The 30 filings read against the 8-Ks are my reading.</a:t>
+              <a:t>R² ≈ 0.03 within positives, ~0 with the features Asclepius can supply. Quote the comparable-set range instead.</a:t>
             </a:r>
           </a:p>
           <a:p>
@@ -5864,7 +6002,7 @@
                 </a:solidFill>
                 <a:latin typeface="Calibri"/>
               </a:rPr>
-              <a:t>And I corrected it.</a:t>
+              <a:t>The dataset supplies no price series for ASCL.</a:t>
             </a:r>
           </a:p>
           <a:p>
@@ -5886,7 +6024,7 @@
                 </a:solidFill>
                 <a:latin typeface="Calibri"/>
               </a:rPr>
-              <a:t>It called all three mixed scenarios mixed-positive. ASC-204's misses its primary endpoint and is rescued by a subgroup — that is mixed-negative.</a:t>
+              <a:t>A gap in the data, not a fact about the company. Volatility did most of the work in sizing a bad outcome, so bands are ~69 points wide — correctly wide.</a:t>
             </a:r>
           </a:p>
         </p:txBody>
@@ -6066,7 +6204,7 @@
                 </a:solidFill>
                 <a:latin typeface="Calibri"/>
               </a:rPr>
-              <a:t>HOW I SATISFIED MYSELF IT IS SOUND</a:t>
+              <a:t>HOW THE WORK WAS PRODUCED</a:t>
             </a:r>
           </a:p>
           <a:p>
@@ -6088,8 +6226,8 @@
                 </a:solidFill>
                 <a:latin typeface="Calibri"/>
               </a:rPr>
-              <a:t>What I examined,
-and what it changed</a:t>
+              <a:t>AI throughout —
+judgement not delegated</a:t>
             </a:r>
           </a:p>
         </p:txBody>
@@ -6172,13 +6310,13 @@
               </a:spcAft>
             </a:pPr>
             <a:r>
-              <a:rPr sz="1800" b="1" i="0">
+              <a:rPr sz="1900" b="1" i="0">
                 <a:solidFill>
                   <a:srgbClr val="141B2D"/>
                 </a:solidFill>
                 <a:latin typeface="Calibri"/>
               </a:rPr>
-              <a:t>Leakage audit before anything was fitted.</a:t>
+              <a:t>Claude, via Claude Code, heavily and throughout.</a:t>
             </a:r>
           </a:p>
           <a:p>
@@ -6194,6 +6332,408 @@
               </a:spcAft>
             </a:pPr>
             <a:r>
+              <a:rPr sz="1500" b="0" i="0">
+                <a:solidFill>
+                  <a:srgbClr val="5A6478"/>
+                </a:solidFill>
+                <a:latin typeface="Calibri"/>
+              </a:rPr>
+              <a:t>Code written and debugged, result sentences pulled from the filings for me to read, commentary drafted and then rewritten. Full logs submitted.</a:t>
+            </a:r>
+          </a:p>
+          <a:p>
+            <a:pPr>
+              <a:lnSpc>
+                <a:spcPct val="108000"/>
+              </a:lnSpc>
+              <a:spcBef>
+                <a:spcPts val="1400"/>
+              </a:spcBef>
+              <a:spcAft>
+                <a:spcPts val="300"/>
+              </a:spcAft>
+            </a:pPr>
+            <a:r>
+              <a:rPr sz="1900" b="1" i="0">
+                <a:solidFill>
+                  <a:srgbClr val="141B2D"/>
+                </a:solidFill>
+                <a:latin typeface="Calibri"/>
+              </a:rPr>
+              <a:t>The constraints were mine.</a:t>
+            </a:r>
+          </a:p>
+          <a:p>
+            <a:pPr>
+              <a:lnSpc>
+                <a:spcPct val="112000"/>
+              </a:lnSpc>
+              <a:spcBef>
+                <a:spcPts val="0"/>
+              </a:spcBef>
+              <a:spcAft>
+                <a:spcPts val="0"/>
+              </a:spcAft>
+            </a:pPr>
+            <a:r>
+              <a:rPr sz="1500" b="0" i="0">
+                <a:solidFill>
+                  <a:srgbClr val="5A6478"/>
+                </a:solidFill>
+                <a:latin typeface="Calibri"/>
+              </a:rPr>
+              <a:t>No feature unobservable before the event. Announcement drafts excluded as circular. The 30 filings read against the 8-Ks are my reading.</a:t>
+            </a:r>
+          </a:p>
+          <a:p>
+            <a:pPr>
+              <a:lnSpc>
+                <a:spcPct val="108000"/>
+              </a:lnSpc>
+              <a:spcBef>
+                <a:spcPts val="1400"/>
+              </a:spcBef>
+              <a:spcAft>
+                <a:spcPts val="300"/>
+              </a:spcAft>
+            </a:pPr>
+            <a:r>
+              <a:rPr sz="1900" b="1" i="0">
+                <a:solidFill>
+                  <a:srgbClr val="141B2D"/>
+                </a:solidFill>
+                <a:latin typeface="Calibri"/>
+              </a:rPr>
+              <a:t>And I corrected it.</a:t>
+            </a:r>
+          </a:p>
+          <a:p>
+            <a:pPr>
+              <a:lnSpc>
+                <a:spcPct val="112000"/>
+              </a:lnSpc>
+              <a:spcBef>
+                <a:spcPts val="0"/>
+              </a:spcBef>
+              <a:spcAft>
+                <a:spcPts val="0"/>
+              </a:spcAft>
+            </a:pPr>
+            <a:r>
+              <a:rPr sz="1500" b="0" i="0">
+                <a:solidFill>
+                  <a:srgbClr val="5A6478"/>
+                </a:solidFill>
+                <a:latin typeface="Calibri"/>
+              </a:rPr>
+              <a:t>It called all three mixed scenarios mixed-positive. ASC-204's misses its primary endpoint and is rescued by a subgroup — that is mixed-negative.</a:t>
+            </a:r>
+          </a:p>
+        </p:txBody>
+      </p:sp>
+    </p:spTree>
+  </p:cSld>
+  <p:clrMapOvr>
+    <a:masterClrMapping/>
+  </p:clrMapOvr>
+</p:sld>
+</file>
+
+<file path=ppt/slides/slide7.xml><?xml version="1.0" encoding="utf-8"?>
+<p:sld xmlns:a="http://schemas.openxmlformats.org/drawingml/2006/main" xmlns:p="http://schemas.openxmlformats.org/presentationml/2006/main" xmlns:r="http://schemas.openxmlformats.org/officeDocument/2006/relationships">
+  <p:cSld>
+    <p:spTree>
+      <p:nvGrpSpPr>
+        <p:cNvPr id="1" name=""/>
+        <p:cNvGrpSpPr/>
+        <p:nvPr/>
+      </p:nvGrpSpPr>
+      <p:grpSpPr/>
+      <p:sp>
+        <p:nvSpPr>
+          <p:cNvPr id="2" name="Rectangle 1"/>
+          <p:cNvSpPr/>
+          <p:nvPr/>
+        </p:nvSpPr>
+        <p:spPr>
+          <a:xfrm>
+            <a:off x="0" y="0"/>
+            <a:ext cx="12191695" cy="6858000"/>
+          </a:xfrm>
+          <a:prstGeom prst="rect">
+            <a:avLst/>
+          </a:prstGeom>
+          <a:solidFill>
+            <a:srgbClr val="FFFFFF"/>
+          </a:solidFill>
+          <a:ln>
+            <a:noFill/>
+          </a:ln>
+          <a:effectLst/>
+        </p:spPr>
+        <p:style>
+          <a:lnRef idx="1">
+            <a:schemeClr val="accent1"/>
+          </a:lnRef>
+          <a:fillRef idx="3">
+            <a:schemeClr val="accent1"/>
+          </a:fillRef>
+          <a:effectRef idx="2">
+            <a:schemeClr val="accent1"/>
+          </a:effectRef>
+          <a:fontRef idx="minor">
+            <a:schemeClr val="lt1"/>
+          </a:fontRef>
+        </p:style>
+        <p:txBody>
+          <a:bodyPr rtlCol="0" anchor="ctr"/>
+          <a:lstStyle/>
+          <a:p>
+            <a:pPr algn="ctr"/>
+          </a:p>
+        </p:txBody>
+      </p:sp>
+      <p:sp>
+        <p:nvSpPr>
+          <p:cNvPr id="3" name="Rounded Rectangle 2"/>
+          <p:cNvSpPr/>
+          <p:nvPr/>
+        </p:nvSpPr>
+        <p:spPr>
+          <a:xfrm>
+            <a:off x="411480" y="685800"/>
+            <a:ext cx="4663440" cy="5486400"/>
+          </a:xfrm>
+          <a:prstGeom prst="roundRect">
+            <a:avLst>
+              <a:gd name="adj" fmla="val 2000"/>
+            </a:avLst>
+          </a:prstGeom>
+          <a:solidFill>
+            <a:srgbClr val="EDF0F5"/>
+          </a:solidFill>
+          <a:ln w="12700">
+            <a:solidFill>
+              <a:srgbClr val="C2CBD8"/>
+            </a:solidFill>
+          </a:ln>
+          <a:effectLst/>
+        </p:spPr>
+        <p:style>
+          <a:lnRef idx="1">
+            <a:schemeClr val="accent1"/>
+          </a:lnRef>
+          <a:fillRef idx="3">
+            <a:schemeClr val="accent1"/>
+          </a:fillRef>
+          <a:effectRef idx="2">
+            <a:schemeClr val="accent1"/>
+          </a:effectRef>
+          <a:fontRef idx="minor">
+            <a:schemeClr val="lt1"/>
+          </a:fontRef>
+        </p:style>
+        <p:txBody>
+          <a:bodyPr rtlCol="0" anchor="ctr" wrap="square"/>
+          <a:lstStyle/>
+          <a:p>
+            <a:pPr algn="ctr"/>
+            <a:r>
+              <a:rPr sz="1300" b="1">
+                <a:solidFill>
+                  <a:srgbClr val="9AA4B2"/>
+                </a:solidFill>
+                <a:latin typeface="Calibri"/>
+              </a:rPr>
+              <a:t>VIDEO</a:t>
+            </a:r>
+          </a:p>
+          <a:p>
+            <a:pPr algn="ctr">
+              <a:spcBef>
+                <a:spcPts val="400"/>
+              </a:spcBef>
+            </a:pPr>
+            <a:r>
+              <a:rPr sz="900">
+                <a:solidFill>
+                  <a:srgbClr val="9AA4B2"/>
+                </a:solidFill>
+                <a:latin typeface="Calibri"/>
+              </a:rPr>
+              <a:t>place your camera here · delete this shape before recording</a:t>
+            </a:r>
+          </a:p>
+        </p:txBody>
+      </p:sp>
+      <p:sp>
+        <p:nvSpPr>
+          <p:cNvPr id="4" name="TextBox 3"/>
+          <p:cNvSpPr txBox="1"/>
+          <p:nvPr/>
+        </p:nvSpPr>
+        <p:spPr>
+          <a:xfrm>
+            <a:off x="5532120" y="685800"/>
+            <a:ext cx="6110935" cy="1371600"/>
+          </a:xfrm>
+          <a:prstGeom prst="rect">
+            <a:avLst/>
+          </a:prstGeom>
+          <a:noFill/>
+        </p:spPr>
+        <p:txBody>
+          <a:bodyPr wrap="square">
+            <a:spAutoFit/>
+          </a:bodyPr>
+          <a:lstStyle/>
+          <a:p>
+            <a:pPr>
+              <a:lnSpc>
+                <a:spcPct val="108000"/>
+              </a:lnSpc>
+              <a:spcBef>
+                <a:spcPts val="0"/>
+              </a:spcBef>
+              <a:spcAft>
+                <a:spcPts val="600"/>
+              </a:spcAft>
+            </a:pPr>
+            <a:r>
+              <a:rPr sz="1200" b="1" i="0">
+                <a:solidFill>
+                  <a:srgbClr val="5A6478"/>
+                </a:solidFill>
+                <a:latin typeface="Calibri"/>
+              </a:rPr>
+              <a:t>HOW I SATISFIED MYSELF IT IS SOUND</a:t>
+            </a:r>
+          </a:p>
+          <a:p>
+            <a:pPr>
+              <a:lnSpc>
+                <a:spcPct val="100000"/>
+              </a:lnSpc>
+              <a:spcBef>
+                <a:spcPts val="0"/>
+              </a:spcBef>
+              <a:spcAft>
+                <a:spcPts val="0"/>
+              </a:spcAft>
+            </a:pPr>
+            <a:r>
+              <a:rPr sz="3000" b="1" i="0">
+                <a:solidFill>
+                  <a:srgbClr val="1F4E79"/>
+                </a:solidFill>
+                <a:latin typeface="Calibri"/>
+              </a:rPr>
+              <a:t>What I examined,
+and what it changed</a:t>
+            </a:r>
+          </a:p>
+        </p:txBody>
+      </p:sp>
+      <p:sp>
+        <p:nvSpPr>
+          <p:cNvPr id="5" name="Rectangle 4"/>
+          <p:cNvSpPr/>
+          <p:nvPr/>
+        </p:nvSpPr>
+        <p:spPr>
+          <a:xfrm>
+            <a:off x="5532120" y="1847088"/>
+            <a:ext cx="1371600" cy="38100"/>
+          </a:xfrm>
+          <a:prstGeom prst="rect">
+            <a:avLst/>
+          </a:prstGeom>
+          <a:solidFill>
+            <a:srgbClr val="1F4E79"/>
+          </a:solidFill>
+          <a:ln>
+            <a:noFill/>
+          </a:ln>
+          <a:effectLst/>
+        </p:spPr>
+        <p:style>
+          <a:lnRef idx="1">
+            <a:schemeClr val="accent1"/>
+          </a:lnRef>
+          <a:fillRef idx="3">
+            <a:schemeClr val="accent1"/>
+          </a:fillRef>
+          <a:effectRef idx="2">
+            <a:schemeClr val="accent1"/>
+          </a:effectRef>
+          <a:fontRef idx="minor">
+            <a:schemeClr val="lt1"/>
+          </a:fontRef>
+        </p:style>
+        <p:txBody>
+          <a:bodyPr rtlCol="0" anchor="ctr"/>
+          <a:lstStyle/>
+          <a:p>
+            <a:pPr algn="ctr"/>
+          </a:p>
+        </p:txBody>
+      </p:sp>
+      <p:sp>
+        <p:nvSpPr>
+          <p:cNvPr id="6" name="TextBox 5"/>
+          <p:cNvSpPr txBox="1"/>
+          <p:nvPr/>
+        </p:nvSpPr>
+        <p:spPr>
+          <a:xfrm>
+            <a:off x="5532120" y="2121408"/>
+            <a:ext cx="6110935" cy="4114800"/>
+          </a:xfrm>
+          <a:prstGeom prst="rect">
+            <a:avLst/>
+          </a:prstGeom>
+          <a:noFill/>
+        </p:spPr>
+        <p:txBody>
+          <a:bodyPr wrap="square">
+            <a:spAutoFit/>
+          </a:bodyPr>
+          <a:lstStyle/>
+          <a:p>
+            <a:pPr>
+              <a:lnSpc>
+                <a:spcPct val="108000"/>
+              </a:lnSpc>
+              <a:spcBef>
+                <a:spcPts val="0"/>
+              </a:spcBef>
+              <a:spcAft>
+                <a:spcPts val="300"/>
+              </a:spcAft>
+            </a:pPr>
+            <a:r>
+              <a:rPr sz="1800" b="1" i="0">
+                <a:solidFill>
+                  <a:srgbClr val="141B2D"/>
+                </a:solidFill>
+                <a:latin typeface="Calibri"/>
+              </a:rPr>
+              <a:t>Leakage audit before anything was fitted.</a:t>
+            </a:r>
+          </a:p>
+          <a:p>
+            <a:pPr>
+              <a:lnSpc>
+                <a:spcPct val="112000"/>
+              </a:lnSpc>
+              <a:spcBef>
+                <a:spcPts val="0"/>
+              </a:spcBef>
+              <a:spcAft>
+                <a:spcPts val="0"/>
+              </a:spcAft>
+            </a:pPr>
+            <a:r>
               <a:rPr sz="1400" b="0" i="0">
                 <a:solidFill>
                   <a:srgbClr val="5A6478"/>
@@ -6345,7 +6885,7 @@
 </p:sld>
 </file>
 
-<file path=ppt/slides/slide7.xml><?xml version="1.0" encoding="utf-8"?>
+<file path=ppt/slides/slide8.xml><?xml version="1.0" encoding="utf-8"?>
 <p:sld xmlns:a="http://schemas.openxmlformats.org/drawingml/2006/main" xmlns:p="http://schemas.openxmlformats.org/presentationml/2006/main" xmlns:r="http://schemas.openxmlformats.org/officeDocument/2006/relationships">
   <p:cSld>
     <p:spTree>

--- a/q5_video/Q5_handover_deck.pptx
+++ b/q5_video/Q5_handover_deck.pptx
@@ -767,7 +767,7 @@
           <a:p/>
           <a:p>
             <a:r>
-              <a:t>The ordering. For all three assets a negative readout is materially worse than a positive one, by sixteen to twenty-seven points of central estimate, and that survives every seed.</a:t>
+              <a:t>The ordering. For all three assets a negative readout is materially worse than a positive one, by eleven to twenty-seven points of central estimate, and that survives every seed.</a:t>
             </a:r>
           </a:p>
           <a:p/>
@@ -5534,7 +5534,7 @@
                 </a:solidFill>
                 <a:latin typeface="Calibri"/>
               </a:rPr>
-              <a:t>Negative vs positive separated by 16–27 points of central estimate, for all three assets, and it survives every seed.</a:t>
+              <a:t>Negative vs positive separated by 11–27 points of central estimate, for all three assets, and it survives every seed.</a:t>
             </a:r>
           </a:p>
           <a:p>

--- a/q5_video/Q5_handover_deck.pptx
+++ b/q5_video/Q5_handover_deck.pptx
@@ -4,17 +4,20 @@
   <p:sldMasterIdLst>
     <p:sldMasterId id="2147483648" r:id="rId1"/>
   </p:sldMasterIdLst>
+  <p:notesMasterIdLst>
+    <p:notesMasterId r:id="rId10"/>
+  </p:notesMasterIdLst>
   <p:sldIdLst>
-    <p:sldId id="256" r:id="rId7"/>
-    <p:sldId id="257" r:id="rId9"/>
-    <p:sldId id="258" r:id="rId10"/>
-    <p:sldId id="259" r:id="rId11"/>
-    <p:sldId id="260" r:id="rId12"/>
-    <p:sldId id="261" r:id="rId13"/>
-    <p:sldId id="262" r:id="rId14"/>
-    <p:sldId id="263" r:id="rId15"/>
+    <p:sldId id="256" r:id="rId2"/>
+    <p:sldId id="257" r:id="rId3"/>
+    <p:sldId id="258" r:id="rId4"/>
+    <p:sldId id="259" r:id="rId5"/>
+    <p:sldId id="260" r:id="rId6"/>
+    <p:sldId id="261" r:id="rId7"/>
+    <p:sldId id="262" r:id="rId8"/>
+    <p:sldId id="263" r:id="rId9"/>
   </p:sldIdLst>
-  <p:sldSz cx="12191695" cy="6858000" type="screen4x3"/>
+  <p:sldSz cx="12192000" cy="6858000"/>
   <p:notesSz cx="6858000" cy="9144000"/>
   <p:defaultTextStyle>
     <a:defPPr>
@@ -111,11 +114,27 @@
       </a:defRPr>
     </a:lvl9pPr>
   </p:defaultTextStyle>
+  <p:extLst>
+    <p:ext uri="{EFAFB233-063F-42B5-8137-9DF3F51BA10A}">
+      <p15:sldGuideLst xmlns:p15="http://schemas.microsoft.com/office/powerpoint/2012/main">
+        <p15:guide id="1" orient="horz" pos="2160">
+          <p15:clr>
+            <a:srgbClr val="A4A3A4"/>
+          </p15:clr>
+        </p15:guide>
+        <p15:guide id="2" pos="2880">
+          <p15:clr>
+            <a:srgbClr val="A4A3A4"/>
+          </p15:clr>
+        </p15:guide>
+      </p15:sldGuideLst>
+    </p:ext>
+  </p:extLst>
 </p:presentation>
 </file>
 
 <file path=ppt/notesMasters/notesMaster1.xml><?xml version="1.0" encoding="utf-8"?>
-<p:notesMaster xmlns:a="http://schemas.openxmlformats.org/drawingml/2006/main" xmlns:p="http://schemas.openxmlformats.org/presentationml/2006/main" xmlns:r="http://schemas.openxmlformats.org/officeDocument/2006/relationships">
+<p:notesMaster xmlns:a="http://schemas.openxmlformats.org/drawingml/2006/main" xmlns:r="http://schemas.openxmlformats.org/officeDocument/2006/relationships" xmlns:p="http://schemas.openxmlformats.org/presentationml/2006/main">
   <p:cSld>
     <p:bg>
       <p:bgRef idx="1001">
@@ -136,241 +155,16 @@
           <a:chExt cx="0" cy="0"/>
         </a:xfrm>
       </p:grpSpPr>
-      <p:sp>
-        <p:nvSpPr>
-          <p:cNvPr id="2" name="Header Placeholder 1"/>
-          <p:cNvSpPr>
-            <a:spLocks noGrp="1"/>
-          </p:cNvSpPr>
-          <p:nvPr>
-            <p:ph type="hdr" sz="quarter"/>
-          </p:nvPr>
-        </p:nvSpPr>
-        <p:spPr>
-          <a:xfrm>
-            <a:off x="0" y="0"/>
-            <a:ext cx="2971800" cy="457200"/>
-          </a:xfrm>
-          <a:prstGeom prst="rect">
-            <a:avLst/>
-          </a:prstGeom>
-        </p:spPr>
-        <p:txBody>
-          <a:bodyPr vert="horz" lIns="91440" tIns="45720" rIns="91440" bIns="45720" rtlCol="0"/>
-          <a:lstStyle>
-            <a:lvl1pPr algn="l">
-              <a:defRPr sz="1200"/>
-            </a:lvl1pPr>
-          </a:lstStyle>
-          <a:p>
-            <a:endParaRPr lang="en-US"/>
-          </a:p>
-        </p:txBody>
-      </p:sp>
-      <p:sp>
-        <p:nvSpPr>
-          <p:cNvPr id="3" name="Date Placeholder 2"/>
-          <p:cNvSpPr>
-            <a:spLocks noGrp="1"/>
-          </p:cNvSpPr>
-          <p:nvPr>
-            <p:ph type="dt" idx="1"/>
-          </p:nvPr>
-        </p:nvSpPr>
-        <p:spPr>
-          <a:xfrm>
-            <a:off x="3884613" y="0"/>
-            <a:ext cx="2971800" cy="457200"/>
-          </a:xfrm>
-          <a:prstGeom prst="rect">
-            <a:avLst/>
-          </a:prstGeom>
-        </p:spPr>
-        <p:txBody>
-          <a:bodyPr vert="horz" lIns="91440" tIns="45720" rIns="91440" bIns="45720" rtlCol="0"/>
-          <a:lstStyle>
-            <a:lvl1pPr algn="r">
-              <a:defRPr sz="1200"/>
-            </a:lvl1pPr>
-          </a:lstStyle>
-          <a:p>
-            <a:fld id="{0F89C1C7-3DCD-1040-A9CF-14679D8B5DDD}" type="datetimeFigureOut">
-              <a:rPr lang="en-US" smtClean="0"/>
-              <a:t>10/17/16</a:t>
-            </a:fld>
-            <a:endParaRPr lang="en-US"/>
-          </a:p>
-        </p:txBody>
-      </p:sp>
-      <p:sp>
-        <p:nvSpPr>
-          <p:cNvPr id="4" name="Slide Image Placeholder 3"/>
-          <p:cNvSpPr>
-            <a:spLocks noGrp="1" noRot="1" noChangeAspect="1"/>
-          </p:cNvSpPr>
-          <p:nvPr>
-            <p:ph type="sldImg" idx="2"/>
-          </p:nvPr>
-        </p:nvSpPr>
-        <p:spPr>
-          <a:xfrm>
-            <a:off x="1143000" y="685800"/>
-            <a:ext cx="4572000" cy="3429000"/>
-          </a:xfrm>
-          <a:prstGeom prst="rect">
-            <a:avLst/>
-          </a:prstGeom>
-          <a:noFill/>
-          <a:ln w="12700">
-            <a:solidFill>
-              <a:prstClr val="black"/>
-            </a:solidFill>
-          </a:ln>
-        </p:spPr>
-        <p:txBody>
-          <a:bodyPr vert="horz" lIns="91440" tIns="45720" rIns="91440" bIns="45720" rtlCol="0" anchor="ctr"/>
-          <a:lstStyle/>
-          <a:p>
-            <a:endParaRPr lang="en-US"/>
-          </a:p>
-        </p:txBody>
-      </p:sp>
-      <p:sp>
-        <p:nvSpPr>
-          <p:cNvPr id="5" name="Notes Placeholder 4"/>
-          <p:cNvSpPr>
-            <a:spLocks noGrp="1"/>
-          </p:cNvSpPr>
-          <p:nvPr>
-            <p:ph type="body" sz="quarter" idx="3"/>
-          </p:nvPr>
-        </p:nvSpPr>
-        <p:spPr>
-          <a:xfrm>
-            <a:off x="685800" y="4343400"/>
-            <a:ext cx="5486400" cy="4114800"/>
-          </a:xfrm>
-          <a:prstGeom prst="rect">
-            <a:avLst/>
-          </a:prstGeom>
-        </p:spPr>
-        <p:txBody>
-          <a:bodyPr vert="horz" lIns="91440" tIns="45720" rIns="91440" bIns="45720" rtlCol="0"/>
-          <a:lstStyle/>
-          <a:p>
-            <a:pPr lvl="0"/>
-            <a:r>
-              <a:rPr lang="en-US" smtClean="0"/>
-              <a:t>Click to edit Master text styles</a:t>
-            </a:r>
-          </a:p>
-          <a:p>
-            <a:pPr lvl="1"/>
-            <a:r>
-              <a:rPr lang="en-US" smtClean="0"/>
-              <a:t>Second level</a:t>
-            </a:r>
-          </a:p>
-          <a:p>
-            <a:pPr lvl="2"/>
-            <a:r>
-              <a:rPr lang="en-US" smtClean="0"/>
-              <a:t>Third level</a:t>
-            </a:r>
-          </a:p>
-          <a:p>
-            <a:pPr lvl="3"/>
-            <a:r>
-              <a:rPr lang="en-US" smtClean="0"/>
-              <a:t>Fourth level</a:t>
-            </a:r>
-          </a:p>
-          <a:p>
-            <a:pPr lvl="4"/>
-            <a:r>
-              <a:rPr lang="en-US" smtClean="0"/>
-              <a:t>Fifth level</a:t>
-            </a:r>
-            <a:endParaRPr lang="en-US"/>
-          </a:p>
-        </p:txBody>
-      </p:sp>
-      <p:sp>
-        <p:nvSpPr>
-          <p:cNvPr id="6" name="Footer Placeholder 5"/>
-          <p:cNvSpPr>
-            <a:spLocks noGrp="1"/>
-          </p:cNvSpPr>
-          <p:nvPr>
-            <p:ph type="ftr" sz="quarter" idx="4"/>
-          </p:nvPr>
-        </p:nvSpPr>
-        <p:spPr>
-          <a:xfrm>
-            <a:off x="0" y="8685213"/>
-            <a:ext cx="2971800" cy="457200"/>
-          </a:xfrm>
-          <a:prstGeom prst="rect">
-            <a:avLst/>
-          </a:prstGeom>
-        </p:spPr>
-        <p:txBody>
-          <a:bodyPr vert="horz" lIns="91440" tIns="45720" rIns="91440" bIns="45720" rtlCol="0" anchor="b"/>
-          <a:lstStyle>
-            <a:lvl1pPr algn="l">
-              <a:defRPr sz="1200"/>
-            </a:lvl1pPr>
-          </a:lstStyle>
-          <a:p>
-            <a:endParaRPr lang="en-US"/>
-          </a:p>
-        </p:txBody>
-      </p:sp>
-      <p:sp>
-        <p:nvSpPr>
-          <p:cNvPr id="7" name="Slide Number Placeholder 6"/>
-          <p:cNvSpPr>
-            <a:spLocks noGrp="1"/>
-          </p:cNvSpPr>
-          <p:nvPr>
-            <p:ph type="sldNum" sz="quarter" idx="5"/>
-          </p:nvPr>
-        </p:nvSpPr>
-        <p:spPr>
-          <a:xfrm>
-            <a:off x="3884613" y="8685213"/>
-            <a:ext cx="2971800" cy="457200"/>
-          </a:xfrm>
-          <a:prstGeom prst="rect">
-            <a:avLst/>
-          </a:prstGeom>
-        </p:spPr>
-        <p:txBody>
-          <a:bodyPr vert="horz" lIns="91440" tIns="45720" rIns="91440" bIns="45720" rtlCol="0" anchor="b"/>
-          <a:lstStyle>
-            <a:lvl1pPr algn="r">
-              <a:defRPr sz="1200"/>
-            </a:lvl1pPr>
-          </a:lstStyle>
-          <a:p>
-            <a:fld id="{BB5E49A5-4136-284D-997B-48E1D791AD67}" type="slidenum">
-              <a:rPr lang="en-US" smtClean="0"/>
-              <a:t>‹#›</a:t>
-            </a:fld>
-            <a:endParaRPr lang="en-US"/>
-          </a:p>
-        </p:txBody>
-      </p:sp>
     </p:spTree>
     <p:extLst>
       <p:ext uri="{BB962C8B-B14F-4D97-AF65-F5344CB8AC3E}">
-        <p14:creationId xmlns:p14="http://schemas.microsoft.com/office/powerpoint/2010/main" val="2623252185"/>
+        <p14:creationId xmlns:p14="http://schemas.microsoft.com/office/powerpoint/2010/main" val="3444886402"/>
       </p:ext>
     </p:extLst>
   </p:cSld>
   <p:clrMap bg1="lt1" tx1="dk1" bg2="lt2" tx2="dk2" accent1="accent1" accent2="accent2" accent3="accent3" accent4="accent4" accent5="accent5" accent6="accent6" hlink="hlink" folHlink="folHlink"/>
   <p:notesStyle>
-    <a:lvl1pPr marL="0" algn="l" defTabSz="457200" rtl="0" eaLnBrk="1" latinLnBrk="0" hangingPunct="1">
+    <a:lvl1pPr marL="0" algn="l" defTabSz="914400" rtl="0" eaLnBrk="1" latinLnBrk="0" hangingPunct="1">
       <a:defRPr sz="1200" kern="1200">
         <a:solidFill>
           <a:schemeClr val="tx1"/>
@@ -380,7 +174,7 @@
         <a:cs typeface="+mn-cs"/>
       </a:defRPr>
     </a:lvl1pPr>
-    <a:lvl2pPr marL="457200" algn="l" defTabSz="457200" rtl="0" eaLnBrk="1" latinLnBrk="0" hangingPunct="1">
+    <a:lvl2pPr marL="457200" algn="l" defTabSz="914400" rtl="0" eaLnBrk="1" latinLnBrk="0" hangingPunct="1">
       <a:defRPr sz="1200" kern="1200">
         <a:solidFill>
           <a:schemeClr val="tx1"/>
@@ -390,7 +184,7 @@
         <a:cs typeface="+mn-cs"/>
       </a:defRPr>
     </a:lvl2pPr>
-    <a:lvl3pPr marL="914400" algn="l" defTabSz="457200" rtl="0" eaLnBrk="1" latinLnBrk="0" hangingPunct="1">
+    <a:lvl3pPr marL="914400" algn="l" defTabSz="914400" rtl="0" eaLnBrk="1" latinLnBrk="0" hangingPunct="1">
       <a:defRPr sz="1200" kern="1200">
         <a:solidFill>
           <a:schemeClr val="tx1"/>
@@ -400,7 +194,7 @@
         <a:cs typeface="+mn-cs"/>
       </a:defRPr>
     </a:lvl3pPr>
-    <a:lvl4pPr marL="1371600" algn="l" defTabSz="457200" rtl="0" eaLnBrk="1" latinLnBrk="0" hangingPunct="1">
+    <a:lvl4pPr marL="1371600" algn="l" defTabSz="914400" rtl="0" eaLnBrk="1" latinLnBrk="0" hangingPunct="1">
       <a:defRPr sz="1200" kern="1200">
         <a:solidFill>
           <a:schemeClr val="tx1"/>
@@ -410,7 +204,7 @@
         <a:cs typeface="+mn-cs"/>
       </a:defRPr>
     </a:lvl4pPr>
-    <a:lvl5pPr marL="1828800" algn="l" defTabSz="457200" rtl="0" eaLnBrk="1" latinLnBrk="0" hangingPunct="1">
+    <a:lvl5pPr marL="1828800" algn="l" defTabSz="914400" rtl="0" eaLnBrk="1" latinLnBrk="0" hangingPunct="1">
       <a:defRPr sz="1200" kern="1200">
         <a:solidFill>
           <a:schemeClr val="tx1"/>
@@ -420,7 +214,7 @@
         <a:cs typeface="+mn-cs"/>
       </a:defRPr>
     </a:lvl5pPr>
-    <a:lvl6pPr marL="2286000" algn="l" defTabSz="457200" rtl="0" eaLnBrk="1" latinLnBrk="0" hangingPunct="1">
+    <a:lvl6pPr marL="2286000" algn="l" defTabSz="914400" rtl="0" eaLnBrk="1" latinLnBrk="0" hangingPunct="1">
       <a:defRPr sz="1200" kern="1200">
         <a:solidFill>
           <a:schemeClr val="tx1"/>
@@ -430,7 +224,7 @@
         <a:cs typeface="+mn-cs"/>
       </a:defRPr>
     </a:lvl6pPr>
-    <a:lvl7pPr marL="2743200" algn="l" defTabSz="457200" rtl="0" eaLnBrk="1" latinLnBrk="0" hangingPunct="1">
+    <a:lvl7pPr marL="2743200" algn="l" defTabSz="914400" rtl="0" eaLnBrk="1" latinLnBrk="0" hangingPunct="1">
       <a:defRPr sz="1200" kern="1200">
         <a:solidFill>
           <a:schemeClr val="tx1"/>
@@ -440,7 +234,7 @@
         <a:cs typeface="+mn-cs"/>
       </a:defRPr>
     </a:lvl7pPr>
-    <a:lvl8pPr marL="3200400" algn="l" defTabSz="457200" rtl="0" eaLnBrk="1" latinLnBrk="0" hangingPunct="1">
+    <a:lvl8pPr marL="3200400" algn="l" defTabSz="914400" rtl="0" eaLnBrk="1" latinLnBrk="0" hangingPunct="1">
       <a:defRPr sz="1200" kern="1200">
         <a:solidFill>
           <a:schemeClr val="tx1"/>
@@ -450,7 +244,7 @@
         <a:cs typeface="+mn-cs"/>
       </a:defRPr>
     </a:lvl8pPr>
-    <a:lvl9pPr marL="3657600" algn="l" defTabSz="457200" rtl="0" eaLnBrk="1" latinLnBrk="0" hangingPunct="1">
+    <a:lvl9pPr marL="3657600" algn="l" defTabSz="914400" rtl="0" eaLnBrk="1" latinLnBrk="0" hangingPunct="1">
       <a:defRPr sz="1200" kern="1200">
         <a:solidFill>
           <a:schemeClr val="tx1"/>
@@ -465,7 +259,7 @@
 </file>
 
 <file path=ppt/notesSlides/notesSlide1.xml><?xml version="1.0" encoding="utf-8"?>
-<p:notes xmlns:a="http://schemas.openxmlformats.org/drawingml/2006/main" xmlns:p="http://schemas.openxmlformats.org/presentationml/2006/main" xmlns:r="http://schemas.openxmlformats.org/officeDocument/2006/relationships">
+<p:notes xmlns:a="http://schemas.openxmlformats.org/drawingml/2006/main" xmlns:r="http://schemas.openxmlformats.org/officeDocument/2006/relationships" xmlns:p="http://schemas.openxmlformats.org/presentationml/2006/main">
   <p:cSld>
     <p:spTree>
       <p:nvGrpSpPr>
@@ -485,49 +279,51 @@
         <p:nvSpPr>
           <p:cNvPr id="2" name="Slide Image Placeholder 1"/>
           <p:cNvSpPr>
+            <a:spLocks noGrp="1" noRot="1" noChangeAspect="1"/>
+          </p:cNvSpPr>
+          <p:nvPr>
+            <p:ph type="sldImg" idx="2"/>
+          </p:nvPr>
+        </p:nvSpPr>
+        <p:spPr/>
+      </p:sp>
+      <p:sp>
+        <p:nvSpPr>
+          <p:cNvPr id="3" name="Notes Placeholder 2"/>
+          <p:cNvSpPr>
             <a:spLocks noGrp="1"/>
           </p:cNvSpPr>
           <p:nvPr>
-            <p:ph type="sldImg" idx="2"/>
+            <p:ph type="body" sz="quarter" idx="3"/>
           </p:nvPr>
         </p:nvSpPr>
         <p:spPr/>
-      </p:sp>
-      <p:sp>
-        <p:nvSpPr>
-          <p:cNvPr id="3" name="Notes Placeholder 2"/>
+        <p:txBody>
+          <a:bodyPr/>
+          <a:lstStyle/>
+          <a:p>
+            <a:r>
+              <a:t>[0:00 — ~19s]</a:t>
+            </a:r>
+          </a:p>
+          <a:p>
+            <a:endParaRPr/>
+          </a:p>
+          <a:p>
+            <a:r>
+              <a:t>Hello. I'm handing over the analysis behind the IR team's estimates of how the market will react to our three upcoming readouts. My position: it's fit to inform those estimates, but not to produce a headline number, and it's far stronger on the downside than the upside.</a:t>
+            </a:r>
+          </a:p>
+        </p:txBody>
+      </p:sp>
+      <p:sp>
+        <p:nvSpPr>
+          <p:cNvPr id="4" name="Slide Number Placeholder 3"/>
           <p:cNvSpPr>
             <a:spLocks noGrp="1"/>
           </p:cNvSpPr>
           <p:nvPr>
-            <p:ph type="body" idx="3" sz="quarter"/>
-          </p:nvPr>
-        </p:nvSpPr>
-        <p:spPr/>
-        <p:txBody>
-          <a:bodyPr/>
-          <a:lstStyle/>
-          <a:p>
-            <a:r>
-              <a:t>[0:00 — ~19s]</a:t>
-            </a:r>
-          </a:p>
-          <a:p/>
-          <a:p>
-            <a:r>
-              <a:t>Hello. I'm handing over the analysis behind the IR team's estimates of how the market will react to our three upcoming readouts. My position: it's fit to inform those estimates, but not to produce a headline number, and it's far stronger on the downside than the upside.</a:t>
-            </a:r>
-          </a:p>
-        </p:txBody>
-      </p:sp>
-      <p:sp>
-        <p:nvSpPr>
-          <p:cNvPr id="4" name="Slide Number Placeholder 3"/>
-          <p:cNvSpPr>
-            <a:spLocks noGrp="1"/>
-          </p:cNvSpPr>
-          <p:nvPr>
-            <p:ph type="sldNum" idx="5" sz="quarter"/>
+            <p:ph type="sldNum" sz="quarter" idx="5"/>
           </p:nvPr>
         </p:nvSpPr>
         <p:spPr/>
@@ -541,7 +337,7 @@
 </file>
 
 <file path=ppt/notesSlides/notesSlide2.xml><?xml version="1.0" encoding="utf-8"?>
-<p:notes xmlns:a="http://schemas.openxmlformats.org/drawingml/2006/main" xmlns:p="http://schemas.openxmlformats.org/presentationml/2006/main" xmlns:r="http://schemas.openxmlformats.org/officeDocument/2006/relationships">
+<p:notes xmlns:a="http://schemas.openxmlformats.org/drawingml/2006/main" xmlns:r="http://schemas.openxmlformats.org/officeDocument/2006/relationships" xmlns:p="http://schemas.openxmlformats.org/presentationml/2006/main">
   <p:cSld>
     <p:spTree>
       <p:nvGrpSpPr>
@@ -561,73 +357,83 @@
         <p:nvSpPr>
           <p:cNvPr id="2" name="Slide Image Placeholder 1"/>
           <p:cNvSpPr>
+            <a:spLocks noGrp="1" noRot="1" noChangeAspect="1"/>
+          </p:cNvSpPr>
+          <p:nvPr>
+            <p:ph type="sldImg" idx="2"/>
+          </p:nvPr>
+        </p:nvSpPr>
+        <p:spPr/>
+      </p:sp>
+      <p:sp>
+        <p:nvSpPr>
+          <p:cNvPr id="3" name="Notes Placeholder 2"/>
+          <p:cNvSpPr>
             <a:spLocks noGrp="1"/>
           </p:cNvSpPr>
           <p:nvPr>
-            <p:ph type="sldImg" idx="2"/>
+            <p:ph type="body" sz="quarter" idx="3"/>
           </p:nvPr>
         </p:nvSpPr>
         <p:spPr/>
-      </p:sp>
-      <p:sp>
-        <p:nvSpPr>
-          <p:cNvPr id="3" name="Notes Placeholder 2"/>
+        <p:txBody>
+          <a:bodyPr/>
+          <a:lstStyle/>
+          <a:p>
+            <a:r>
+              <a:t>[0:19 — ~43s]</a:t>
+            </a:r>
+          </a:p>
+          <a:p>
+            <a:endParaRPr/>
+          </a:p>
+          <a:p>
+            <a:r>
+              <a:t>Four stages.</a:t>
+            </a:r>
+          </a:p>
+          <a:p>
+            <a:endParaRPr/>
+          </a:p>
+          <a:p>
+            <a:r>
+              <a:t>I validated the LLM's outcome labels — thirty filings read by hand against the original 8-Ks, then all 2,392 directional labels checked against the price move that followed. That gave a screen scoring all 4,539 classifications, which flags forty per cent, mostly for timing rather than a wrong label.</a:t>
+            </a:r>
+          </a:p>
+          <a:p>
+            <a:endParaRPr/>
+          </a:p>
+          <a:p>
+            <a:r>
+              <a:t>I grouped 1,975 historical readouts into eight families, on disease, design, stage and sponsor, to find comparables.</a:t>
+            </a:r>
+          </a:p>
+          <a:p>
+            <a:endParaRPr/>
+          </a:p>
+          <a:p>
+            <a:r>
+              <a:t>I modelled the three-day abnormal return from trial, text and company features; it explains twenty per cent of the variation.</a:t>
+            </a:r>
+          </a:p>
+          <a:p>
+            <a:endParaRPr/>
+          </a:p>
+          <a:p>
+            <a:r>
+              <a:t>Then I applied that to our three readouts, three scenarios each, with a monitoring plan.</a:t>
+            </a:r>
+          </a:p>
+        </p:txBody>
+      </p:sp>
+      <p:sp>
+        <p:nvSpPr>
+          <p:cNvPr id="4" name="Slide Number Placeholder 3"/>
           <p:cNvSpPr>
             <a:spLocks noGrp="1"/>
           </p:cNvSpPr>
           <p:nvPr>
-            <p:ph type="body" idx="3" sz="quarter"/>
-          </p:nvPr>
-        </p:nvSpPr>
-        <p:spPr/>
-        <p:txBody>
-          <a:bodyPr/>
-          <a:lstStyle/>
-          <a:p>
-            <a:r>
-              <a:t>[0:19 — ~43s]</a:t>
-            </a:r>
-          </a:p>
-          <a:p/>
-          <a:p>
-            <a:r>
-              <a:t>Four stages.</a:t>
-            </a:r>
-          </a:p>
-          <a:p/>
-          <a:p>
-            <a:r>
-              <a:t>I validated the LLM's outcome labels — thirty filings read by hand against the original 8-Ks, then all 2,392 directional labels checked against the price move that followed. That gave a screen scoring all 4,539 classifications, which flags forty per cent, mostly for timing rather than a wrong label.</a:t>
-            </a:r>
-          </a:p>
-          <a:p/>
-          <a:p>
-            <a:r>
-              <a:t>I grouped 1,975 historical readouts into eight families, on disease, design, stage and sponsor, to find comparables.</a:t>
-            </a:r>
-          </a:p>
-          <a:p/>
-          <a:p>
-            <a:r>
-              <a:t>I modelled the three-day abnormal return from trial, text and company features; it explains twenty per cent of the variation.</a:t>
-            </a:r>
-          </a:p>
-          <a:p/>
-          <a:p>
-            <a:r>
-              <a:t>Then I applied that to our three readouts, three scenarios each, with a monitoring plan.</a:t>
-            </a:r>
-          </a:p>
-        </p:txBody>
-      </p:sp>
-      <p:sp>
-        <p:nvSpPr>
-          <p:cNvPr id="4" name="Slide Number Placeholder 3"/>
-          <p:cNvSpPr>
-            <a:spLocks noGrp="1"/>
-          </p:cNvSpPr>
-          <p:nvPr>
-            <p:ph type="sldNum" idx="5" sz="quarter"/>
+            <p:ph type="sldNum" sz="quarter" idx="5"/>
           </p:nvPr>
         </p:nvSpPr>
         <p:spPr/>
@@ -641,7 +447,7 @@
 </file>
 
 <file path=ppt/notesSlides/notesSlide3.xml><?xml version="1.0" encoding="utf-8"?>
-<p:notes xmlns:a="http://schemas.openxmlformats.org/drawingml/2006/main" xmlns:p="http://schemas.openxmlformats.org/presentationml/2006/main" xmlns:r="http://schemas.openxmlformats.org/officeDocument/2006/relationships">
+<p:notes xmlns:a="http://schemas.openxmlformats.org/drawingml/2006/main" xmlns:r="http://schemas.openxmlformats.org/officeDocument/2006/relationships" xmlns:p="http://schemas.openxmlformats.org/presentationml/2006/main">
   <p:cSld>
     <p:spTree>
       <p:nvGrpSpPr>
@@ -661,43 +467,43 @@
         <p:nvSpPr>
           <p:cNvPr id="2" name="Slide Image Placeholder 1"/>
           <p:cNvSpPr>
+            <a:spLocks noGrp="1" noRot="1" noChangeAspect="1"/>
+          </p:cNvSpPr>
+          <p:nvPr>
+            <p:ph type="sldImg" idx="2"/>
+          </p:nvPr>
+        </p:nvSpPr>
+        <p:spPr/>
+      </p:sp>
+      <p:sp>
+        <p:nvSpPr>
+          <p:cNvPr id="3" name="Notes Placeholder 2"/>
+          <p:cNvSpPr>
             <a:spLocks noGrp="1"/>
           </p:cNvSpPr>
           <p:nvPr>
-            <p:ph type="sldImg" idx="2"/>
+            <p:ph type="body" sz="quarter" idx="3"/>
           </p:nvPr>
         </p:nvSpPr>
         <p:spPr/>
-      </p:sp>
-      <p:sp>
-        <p:nvSpPr>
-          <p:cNvPr id="3" name="Notes Placeholder 2"/>
+        <p:txBody>
+          <a:bodyPr/>
+          <a:lstStyle/>
+          <a:p>
+            <a:r>
+              <a:t>No script of its own — this frame carries the verdict while you move from what you built into the evidence for it. Land on it as you say 'so, three things I'd stand behind', then advance.</a:t>
+            </a:r>
+          </a:p>
+        </p:txBody>
+      </p:sp>
+      <p:sp>
+        <p:nvSpPr>
+          <p:cNvPr id="4" name="Slide Number Placeholder 3"/>
           <p:cNvSpPr>
             <a:spLocks noGrp="1"/>
           </p:cNvSpPr>
           <p:nvPr>
-            <p:ph type="body" idx="3" sz="quarter"/>
-          </p:nvPr>
-        </p:nvSpPr>
-        <p:spPr/>
-        <p:txBody>
-          <a:bodyPr/>
-          <a:lstStyle/>
-          <a:p>
-            <a:r>
-              <a:t>No script of its own — this frame carries the verdict while you move from what you built into the evidence for it. Land on it as you say 'so, three things I'd stand behind', then advance.</a:t>
-            </a:r>
-          </a:p>
-        </p:txBody>
-      </p:sp>
-      <p:sp>
-        <p:nvSpPr>
-          <p:cNvPr id="4" name="Slide Number Placeholder 3"/>
-          <p:cNvSpPr>
-            <a:spLocks noGrp="1"/>
-          </p:cNvSpPr>
-          <p:nvPr>
-            <p:ph type="sldNum" idx="5" sz="quarter"/>
+            <p:ph type="sldNum" sz="quarter" idx="5"/>
           </p:nvPr>
         </p:nvSpPr>
         <p:spPr/>
@@ -711,7 +517,7 @@
 </file>
 
 <file path=ppt/notesSlides/notesSlide4.xml><?xml version="1.0" encoding="utf-8"?>
-<p:notes xmlns:a="http://schemas.openxmlformats.org/drawingml/2006/main" xmlns:p="http://schemas.openxmlformats.org/presentationml/2006/main" xmlns:r="http://schemas.openxmlformats.org/officeDocument/2006/relationships">
+<p:notes xmlns:a="http://schemas.openxmlformats.org/drawingml/2006/main" xmlns:r="http://schemas.openxmlformats.org/officeDocument/2006/relationships" xmlns:p="http://schemas.openxmlformats.org/presentationml/2006/main">
   <p:cSld>
     <p:spTree>
       <p:nvGrpSpPr>
@@ -731,67 +537,75 @@
         <p:nvSpPr>
           <p:cNvPr id="2" name="Slide Image Placeholder 1"/>
           <p:cNvSpPr>
+            <a:spLocks noGrp="1" noRot="1" noChangeAspect="1"/>
+          </p:cNvSpPr>
+          <p:nvPr>
+            <p:ph type="sldImg" idx="2"/>
+          </p:nvPr>
+        </p:nvSpPr>
+        <p:spPr/>
+      </p:sp>
+      <p:sp>
+        <p:nvSpPr>
+          <p:cNvPr id="3" name="Notes Placeholder 2"/>
+          <p:cNvSpPr>
             <a:spLocks noGrp="1"/>
           </p:cNvSpPr>
           <p:nvPr>
-            <p:ph type="sldImg" idx="2"/>
+            <p:ph type="body" sz="quarter" idx="3"/>
           </p:nvPr>
         </p:nvSpPr>
         <p:spPr/>
-      </p:sp>
-      <p:sp>
-        <p:nvSpPr>
-          <p:cNvPr id="3" name="Notes Placeholder 2"/>
+        <p:txBody>
+          <a:bodyPr/>
+          <a:lstStyle/>
+          <a:p>
+            <a:r>
+              <a:t>[1:02 — ~45s]</a:t>
+            </a:r>
+          </a:p>
+          <a:p>
+            <a:endParaRPr/>
+          </a:p>
+          <a:p>
+            <a:r>
+              <a:t>So, three things I'd stand behind.</a:t>
+            </a:r>
+          </a:p>
+          <a:p>
+            <a:endParaRPr/>
+          </a:p>
+          <a:p>
+            <a:r>
+              <a:t>The ordering. For all three assets a negative readout is materially worse than a positive one, by eleven to twenty-seven points of central estimate, and that survives every seed.</a:t>
+            </a:r>
+          </a:p>
+          <a:p>
+            <a:endParaRPr/>
+          </a:p>
+          <a:p>
+            <a:r>
+              <a:t>The downside for ASC-204. It sits in a cluster of 266 cardiovascular and renal outcome trials, 246 in the same therapeutic area, with 34 negative readouts behind it. That's the estimate I'd let the funding decision rest on.</a:t>
+            </a:r>
+          </a:p>
+          <a:p>
+            <a:endParaRPr/>
+          </a:p>
+          <a:p>
+            <a:r>
+              <a:t>[CUT IF LONG] And severity ranking: 61 per cent of the announcements in the model's worst decile fell more than ten per cent. It sorts readouts into 'could be severe' and 'probably won't be', not into a number.</a:t>
+            </a:r>
+          </a:p>
+        </p:txBody>
+      </p:sp>
+      <p:sp>
+        <p:nvSpPr>
+          <p:cNvPr id="4" name="Slide Number Placeholder 3"/>
           <p:cNvSpPr>
             <a:spLocks noGrp="1"/>
           </p:cNvSpPr>
           <p:nvPr>
-            <p:ph type="body" idx="3" sz="quarter"/>
-          </p:nvPr>
-        </p:nvSpPr>
-        <p:spPr/>
-        <p:txBody>
-          <a:bodyPr/>
-          <a:lstStyle/>
-          <a:p>
-            <a:r>
-              <a:t>[1:02 — ~45s]</a:t>
-            </a:r>
-          </a:p>
-          <a:p/>
-          <a:p>
-            <a:r>
-              <a:t>So, three things I'd stand behind.</a:t>
-            </a:r>
-          </a:p>
-          <a:p/>
-          <a:p>
-            <a:r>
-              <a:t>The ordering. For all three assets a negative readout is materially worse than a positive one, by eleven to twenty-seven points of central estimate, and that survives every seed.</a:t>
-            </a:r>
-          </a:p>
-          <a:p/>
-          <a:p>
-            <a:r>
-              <a:t>The downside for ASC-204. It sits in a cluster of 266 cardiovascular and renal outcome trials, 246 in the same therapeutic area, with 34 negative readouts behind it. That's the estimate I'd let the funding decision rest on.</a:t>
-            </a:r>
-          </a:p>
-          <a:p/>
-          <a:p>
-            <a:r>
-              <a:t>[CUT IF LONG] And severity ranking: 61 per cent of the announcements in the model's worst decile fell more than ten per cent. It sorts readouts into 'could be severe' and 'probably won't be', not into a number.</a:t>
-            </a:r>
-          </a:p>
-        </p:txBody>
-      </p:sp>
-      <p:sp>
-        <p:nvSpPr>
-          <p:cNvPr id="4" name="Slide Number Placeholder 3"/>
-          <p:cNvSpPr>
-            <a:spLocks noGrp="1"/>
-          </p:cNvSpPr>
-          <p:nvPr>
-            <p:ph type="sldNum" idx="5" sz="quarter"/>
+            <p:ph type="sldNum" sz="quarter" idx="5"/>
           </p:nvPr>
         </p:nvSpPr>
         <p:spPr/>
@@ -805,7 +619,7 @@
 </file>
 
 <file path=ppt/notesSlides/notesSlide5.xml><?xml version="1.0" encoding="utf-8"?>
-<p:notes xmlns:a="http://schemas.openxmlformats.org/drawingml/2006/main" xmlns:p="http://schemas.openxmlformats.org/presentationml/2006/main" xmlns:r="http://schemas.openxmlformats.org/officeDocument/2006/relationships">
+<p:notes xmlns:a="http://schemas.openxmlformats.org/drawingml/2006/main" xmlns:r="http://schemas.openxmlformats.org/officeDocument/2006/relationships" xmlns:p="http://schemas.openxmlformats.org/presentationml/2006/main">
   <p:cSld>
     <p:spTree>
       <p:nvGrpSpPr>
@@ -825,67 +639,75 @@
         <p:nvSpPr>
           <p:cNvPr id="2" name="Slide Image Placeholder 1"/>
           <p:cNvSpPr>
+            <a:spLocks noGrp="1" noRot="1" noChangeAspect="1"/>
+          </p:cNvSpPr>
+          <p:nvPr>
+            <p:ph type="sldImg" idx="2"/>
+          </p:nvPr>
+        </p:nvSpPr>
+        <p:spPr/>
+      </p:sp>
+      <p:sp>
+        <p:nvSpPr>
+          <p:cNvPr id="3" name="Notes Placeholder 2"/>
+          <p:cNvSpPr>
             <a:spLocks noGrp="1"/>
           </p:cNvSpPr>
           <p:nvPr>
-            <p:ph type="sldImg" idx="2"/>
+            <p:ph type="body" sz="quarter" idx="3"/>
           </p:nvPr>
         </p:nvSpPr>
         <p:spPr/>
-      </p:sp>
-      <p:sp>
-        <p:nvSpPr>
-          <p:cNvPr id="3" name="Notes Placeholder 2"/>
+        <p:txBody>
+          <a:bodyPr/>
+          <a:lstStyle/>
+          <a:p>
+            <a:r>
+              <a:t>[1:47 — ~52s]</a:t>
+            </a:r>
+          </a:p>
+          <a:p>
+            <a:endParaRPr/>
+          </a:p>
+          <a:p>
+            <a:r>
+              <a:t>Now the limits, and they're real.</a:t>
+            </a:r>
+          </a:p>
+          <a:p>
+            <a:endParaRPr/>
+          </a:p>
+          <a:p>
+            <a:r>
+              <a:t>ASC-101 has effectively no comparables. The dataset holds seven hereditary angioedema readouts in total, so my method matched it to vaccine trials on design, having nothing to match on disease. That number is a Phase 3 base rate wearing a comparable set's clothes.</a:t>
+            </a:r>
+          </a:p>
+          <a:p>
+            <a:endParaRPr/>
+          </a:p>
+          <a:p>
+            <a:r>
+              <a:t>The upside is close to unmodelled — three per cent of the spread within positive readouts, and effectively nothing with the features Asclepius can supply. For an upside case, quote the historical range.</a:t>
+            </a:r>
+          </a:p>
+          <a:p>
+            <a:endParaRPr/>
+          </a:p>
+          <a:p>
+            <a:r>
+              <a:t>And the dataset supplies no price series for Asclepius — a gap in the data, not a fact about the company. Volatility is most of what let the model size a bad outcome, so the bands are about 69 points wide, and correctly so.</a:t>
+            </a:r>
+          </a:p>
+        </p:txBody>
+      </p:sp>
+      <p:sp>
+        <p:nvSpPr>
+          <p:cNvPr id="4" name="Slide Number Placeholder 3"/>
           <p:cNvSpPr>
             <a:spLocks noGrp="1"/>
           </p:cNvSpPr>
           <p:nvPr>
-            <p:ph type="body" idx="3" sz="quarter"/>
-          </p:nvPr>
-        </p:nvSpPr>
-        <p:spPr/>
-        <p:txBody>
-          <a:bodyPr/>
-          <a:lstStyle/>
-          <a:p>
-            <a:r>
-              <a:t>[1:47 — ~52s]</a:t>
-            </a:r>
-          </a:p>
-          <a:p/>
-          <a:p>
-            <a:r>
-              <a:t>Now the limits, and they're real.</a:t>
-            </a:r>
-          </a:p>
-          <a:p/>
-          <a:p>
-            <a:r>
-              <a:t>ASC-101 has effectively no comparables. The dataset holds seven hereditary angioedema readouts in total, so my method matched it to vaccine trials on design, having nothing to match on disease. That number is a Phase 3 base rate wearing a comparable set's clothes.</a:t>
-            </a:r>
-          </a:p>
-          <a:p/>
-          <a:p>
-            <a:r>
-              <a:t>The upside is close to unmodelled — three per cent of the spread within positive readouts, and effectively nothing with the features Asclepius can supply. For an upside case, quote the historical range.</a:t>
-            </a:r>
-          </a:p>
-          <a:p/>
-          <a:p>
-            <a:r>
-              <a:t>And the dataset supplies no price series for Asclepius — a gap in the data, not a fact about the company. Volatility is most of what let the model size a bad outcome, so the bands are about 69 points wide, and correctly so.</a:t>
-            </a:r>
-          </a:p>
-        </p:txBody>
-      </p:sp>
-      <p:sp>
-        <p:nvSpPr>
-          <p:cNvPr id="4" name="Slide Number Placeholder 3"/>
-          <p:cNvSpPr>
-            <a:spLocks noGrp="1"/>
-          </p:cNvSpPr>
-          <p:nvPr>
-            <p:ph type="sldNum" idx="5" sz="quarter"/>
+            <p:ph type="sldNum" sz="quarter" idx="5"/>
           </p:nvPr>
         </p:nvSpPr>
         <p:spPr/>
@@ -899,7 +721,7 @@
 </file>
 
 <file path=ppt/notesSlides/notesSlide6.xml><?xml version="1.0" encoding="utf-8"?>
-<p:notes xmlns:a="http://schemas.openxmlformats.org/drawingml/2006/main" xmlns:p="http://schemas.openxmlformats.org/presentationml/2006/main" xmlns:r="http://schemas.openxmlformats.org/officeDocument/2006/relationships">
+<p:notes xmlns:a="http://schemas.openxmlformats.org/drawingml/2006/main" xmlns:r="http://schemas.openxmlformats.org/officeDocument/2006/relationships" xmlns:p="http://schemas.openxmlformats.org/presentationml/2006/main">
   <p:cSld>
     <p:spTree>
       <p:nvGrpSpPr>
@@ -919,67 +741,75 @@
         <p:nvSpPr>
           <p:cNvPr id="2" name="Slide Image Placeholder 1"/>
           <p:cNvSpPr>
+            <a:spLocks noGrp="1" noRot="1" noChangeAspect="1"/>
+          </p:cNvSpPr>
+          <p:nvPr>
+            <p:ph type="sldImg" idx="2"/>
+          </p:nvPr>
+        </p:nvSpPr>
+        <p:spPr/>
+      </p:sp>
+      <p:sp>
+        <p:nvSpPr>
+          <p:cNvPr id="3" name="Notes Placeholder 2"/>
+          <p:cNvSpPr>
             <a:spLocks noGrp="1"/>
           </p:cNvSpPr>
           <p:nvPr>
-            <p:ph type="sldImg" idx="2"/>
+            <p:ph type="body" sz="quarter" idx="3"/>
           </p:nvPr>
         </p:nvSpPr>
         <p:spPr/>
-      </p:sp>
-      <p:sp>
-        <p:nvSpPr>
-          <p:cNvPr id="3" name="Notes Placeholder 2"/>
+        <p:txBody>
+          <a:bodyPr/>
+          <a:lstStyle/>
+          <a:p>
+            <a:r>
+              <a:t>[2:39 — ~47s]</a:t>
+            </a:r>
+          </a:p>
+          <a:p>
+            <a:endParaRPr/>
+          </a:p>
+          <a:p>
+            <a:r>
+              <a:t>I used Claude, through Claude Code, heavily and throughout — to write and debug the code, to surface result sentences from the filings for me to read, and to draft commentary I rewrote. The full conversations are in the submitted log.</a:t>
+            </a:r>
+          </a:p>
+          <a:p>
+            <a:endParaRPr/>
+          </a:p>
+          <a:p>
+            <a:r>
+              <a:t>What I didn't delegate was the judgement. I set the constraints: no feature unobservable before the event, and the announcement drafts excluded entirely, because they were written to express the assumed outcome. The thirty filings are my reading, not its summary.</a:t>
+            </a:r>
+          </a:p>
+          <a:p>
+            <a:endParaRPr/>
+          </a:p>
+          <a:p>
+            <a:r>
+              <a:t>And I corrected it. It mapped all three mixed scenarios to mixed-positive; I read the ASC-204 draft, saw a missed primary endpoint rescued by a subgroup, and moved it to mixed-negative.</a:t>
+            </a:r>
+          </a:p>
+          <a:p>
+            <a:endParaRPr/>
+          </a:p>
+          <a:p>
+            <a:r>
+              <a:t>(If asked for more: it hard-coded a cluster by number, which breaks because k-means relabels on refit; and its first ablation conflated losing the text with losing the price history, so I had it split the comparison.)</a:t>
+            </a:r>
+          </a:p>
+        </p:txBody>
+      </p:sp>
+      <p:sp>
+        <p:nvSpPr>
+          <p:cNvPr id="4" name="Slide Number Placeholder 3"/>
           <p:cNvSpPr>
             <a:spLocks noGrp="1"/>
           </p:cNvSpPr>
           <p:nvPr>
-            <p:ph type="body" idx="3" sz="quarter"/>
-          </p:nvPr>
-        </p:nvSpPr>
-        <p:spPr/>
-        <p:txBody>
-          <a:bodyPr/>
-          <a:lstStyle/>
-          <a:p>
-            <a:r>
-              <a:t>[2:39 — ~47s]</a:t>
-            </a:r>
-          </a:p>
-          <a:p/>
-          <a:p>
-            <a:r>
-              <a:t>I used Claude, through Claude Code, heavily and throughout — to write and debug the code, to surface result sentences from the filings for me to read, and to draft commentary I rewrote. The full conversations are in the submitted log.</a:t>
-            </a:r>
-          </a:p>
-          <a:p/>
-          <a:p>
-            <a:r>
-              <a:t>What I didn't delegate was the judgement. I set the constraints: no feature unobservable before the event, and the announcement drafts excluded entirely, because they were written to express the assumed outcome. The thirty filings are my reading, not its summary.</a:t>
-            </a:r>
-          </a:p>
-          <a:p/>
-          <a:p>
-            <a:r>
-              <a:t>And I corrected it. It mapped all three mixed scenarios to mixed-positive; I read the ASC-204 draft, saw a missed primary endpoint rescued by a subgroup, and moved it to mixed-negative.</a:t>
-            </a:r>
-          </a:p>
-          <a:p/>
-          <a:p>
-            <a:r>
-              <a:t>(If asked for more: it hard-coded a cluster by number, which breaks because k-means relabels on refit; and its first ablation conflated losing the text with losing the price history, so I had it split the comparison.)</a:t>
-            </a:r>
-          </a:p>
-        </p:txBody>
-      </p:sp>
-      <p:sp>
-        <p:nvSpPr>
-          <p:cNvPr id="4" name="Slide Number Placeholder 3"/>
-          <p:cNvSpPr>
-            <a:spLocks noGrp="1"/>
-          </p:cNvSpPr>
-          <p:nvPr>
-            <p:ph type="sldNum" idx="5" sz="quarter"/>
+            <p:ph type="sldNum" sz="quarter" idx="5"/>
           </p:nvPr>
         </p:nvSpPr>
         <p:spPr/>
@@ -993,7 +823,7 @@
 </file>
 
 <file path=ppt/notesSlides/notesSlide7.xml><?xml version="1.0" encoding="utf-8"?>
-<p:notes xmlns:a="http://schemas.openxmlformats.org/drawingml/2006/main" xmlns:p="http://schemas.openxmlformats.org/presentationml/2006/main" xmlns:r="http://schemas.openxmlformats.org/officeDocument/2006/relationships">
+<p:notes xmlns:a="http://schemas.openxmlformats.org/drawingml/2006/main" xmlns:r="http://schemas.openxmlformats.org/officeDocument/2006/relationships" xmlns:p="http://schemas.openxmlformats.org/presentationml/2006/main">
   <p:cSld>
     <p:spTree>
       <p:nvGrpSpPr>
@@ -1013,61 +843,67 @@
         <p:nvSpPr>
           <p:cNvPr id="2" name="Slide Image Placeholder 1"/>
           <p:cNvSpPr>
+            <a:spLocks noGrp="1" noRot="1" noChangeAspect="1"/>
+          </p:cNvSpPr>
+          <p:nvPr>
+            <p:ph type="sldImg" idx="2"/>
+          </p:nvPr>
+        </p:nvSpPr>
+        <p:spPr/>
+      </p:sp>
+      <p:sp>
+        <p:nvSpPr>
+          <p:cNvPr id="3" name="Notes Placeholder 2"/>
+          <p:cNvSpPr>
             <a:spLocks noGrp="1"/>
           </p:cNvSpPr>
           <p:nvPr>
-            <p:ph type="sldImg" idx="2"/>
+            <p:ph type="body" sz="quarter" idx="3"/>
           </p:nvPr>
         </p:nvSpPr>
         <p:spPr/>
-      </p:sp>
-      <p:sp>
-        <p:nvSpPr>
-          <p:cNvPr id="3" name="Notes Placeholder 2"/>
+        <p:txBody>
+          <a:bodyPr/>
+          <a:lstStyle/>
+          <a:p>
+            <a:r>
+              <a:t>[3:26 — ~45s]</a:t>
+            </a:r>
+          </a:p>
+          <a:p>
+            <a:endParaRPr/>
+          </a:p>
+          <a:p>
+            <a:r>
+              <a:t>On checking. I ran a leakage audit before fitting anything: with the nine excluded columns put back, R-squared goes from 0.20 to 0.96. The one that mattered was my own data-quality index — worth 0.14, until I traced it to one signal built from the realised return. That's the leakage that survives review; the name gives nothing away.</a:t>
+            </a:r>
+          </a:p>
+          <a:p>
+            <a:endParaRPr/>
+          </a:p>
+          <a:p>
+            <a:r>
+              <a:t>[CUT IF LONG] I validated against honest nulls — permuted features, bootstrap by filing rather than by row, and forward chaining, which drops R-squared to 0.17. That's what the pipeline can deliver.</a:t>
+            </a:r>
+          </a:p>
+          <a:p>
+            <a:endParaRPr/>
+          </a:p>
+          <a:p>
+            <a:r>
+              <a:t>And I corrected my own claims: I'd told the team the range width was mainly the unknown result. It's about a quarter.</a:t>
+            </a:r>
+          </a:p>
+        </p:txBody>
+      </p:sp>
+      <p:sp>
+        <p:nvSpPr>
+          <p:cNvPr id="4" name="Slide Number Placeholder 3"/>
           <p:cNvSpPr>
             <a:spLocks noGrp="1"/>
           </p:cNvSpPr>
           <p:nvPr>
-            <p:ph type="body" idx="3" sz="quarter"/>
-          </p:nvPr>
-        </p:nvSpPr>
-        <p:spPr/>
-        <p:txBody>
-          <a:bodyPr/>
-          <a:lstStyle/>
-          <a:p>
-            <a:r>
-              <a:t>[3:26 — ~45s]</a:t>
-            </a:r>
-          </a:p>
-          <a:p/>
-          <a:p>
-            <a:r>
-              <a:t>On checking. I ran a leakage audit before fitting anything: with the nine excluded columns put back, R-squared goes from 0.20 to 0.96. The one that mattered was my own data-quality index — worth 0.14, until I traced it to one signal built from the realised return. That's the leakage that survives review; the name gives nothing away.</a:t>
-            </a:r>
-          </a:p>
-          <a:p/>
-          <a:p>
-            <a:r>
-              <a:t>[CUT IF LONG] I validated against honest nulls — permuted features, bootstrap by filing rather than by row, and forward chaining, which drops R-squared to 0.17. That's what the pipeline can deliver.</a:t>
-            </a:r>
-          </a:p>
-          <a:p/>
-          <a:p>
-            <a:r>
-              <a:t>And I corrected my own claims: I'd told the team the range width was mainly the unknown result. It's about a quarter.</a:t>
-            </a:r>
-          </a:p>
-        </p:txBody>
-      </p:sp>
-      <p:sp>
-        <p:nvSpPr>
-          <p:cNvPr id="4" name="Slide Number Placeholder 3"/>
-          <p:cNvSpPr>
-            <a:spLocks noGrp="1"/>
-          </p:cNvSpPr>
-          <p:nvPr>
-            <p:ph type="sldNum" idx="5" sz="quarter"/>
+            <p:ph type="sldNum" sz="quarter" idx="5"/>
           </p:nvPr>
         </p:nvSpPr>
         <p:spPr/>
@@ -1081,7 +917,7 @@
 </file>
 
 <file path=ppt/notesSlides/notesSlide8.xml><?xml version="1.0" encoding="utf-8"?>
-<p:notes xmlns:a="http://schemas.openxmlformats.org/drawingml/2006/main" xmlns:p="http://schemas.openxmlformats.org/presentationml/2006/main" xmlns:r="http://schemas.openxmlformats.org/officeDocument/2006/relationships">
+<p:notes xmlns:a="http://schemas.openxmlformats.org/drawingml/2006/main" xmlns:r="http://schemas.openxmlformats.org/officeDocument/2006/relationships" xmlns:p="http://schemas.openxmlformats.org/presentationml/2006/main">
   <p:cSld>
     <p:spTree>
       <p:nvGrpSpPr>
@@ -1101,61 +937,67 @@
         <p:nvSpPr>
           <p:cNvPr id="2" name="Slide Image Placeholder 1"/>
           <p:cNvSpPr>
+            <a:spLocks noGrp="1" noRot="1" noChangeAspect="1"/>
+          </p:cNvSpPr>
+          <p:nvPr>
+            <p:ph type="sldImg" idx="2"/>
+          </p:nvPr>
+        </p:nvSpPr>
+        <p:spPr/>
+      </p:sp>
+      <p:sp>
+        <p:nvSpPr>
+          <p:cNvPr id="3" name="Notes Placeholder 2"/>
+          <p:cNvSpPr>
             <a:spLocks noGrp="1"/>
           </p:cNvSpPr>
           <p:nvPr>
-            <p:ph type="sldImg" idx="2"/>
+            <p:ph type="body" sz="quarter" idx="3"/>
           </p:nvPr>
         </p:nvSpPr>
         <p:spPr/>
-      </p:sp>
-      <p:sp>
-        <p:nvSpPr>
-          <p:cNvPr id="3" name="Notes Placeholder 2"/>
+        <p:txBody>
+          <a:bodyPr/>
+          <a:lstStyle/>
+          <a:p>
+            <a:r>
+              <a:t>[4:11 — ~29s]</a:t>
+            </a:r>
+          </a:p>
+          <a:p>
+            <a:endParaRPr/>
+          </a:p>
+          <a:p>
+            <a:r>
+              <a:t>Under PG1 I'm responsible for the judgements here regardless of what produced the first draft of them — which means understanding the model before relying on it, and judging whether its assumptions suit the purpose.</a:t>
+            </a:r>
+          </a:p>
+          <a:p>
+            <a:endParaRPr/>
+          </a:p>
+          <a:p>
+            <a:r>
+              <a:t>If your time is limited, I'd put it on two things: my decision to exclude the announcement drafts, and whether the ASC-101 estimate should go in front of the board at all. Thank you.</a:t>
+            </a:r>
+          </a:p>
+          <a:p>
+            <a:endParaRPr/>
+          </a:p>
+          <a:p>
+            <a:r>
+              <a:t>END — target 4:40, limit 5:00.</a:t>
+            </a:r>
+          </a:p>
+        </p:txBody>
+      </p:sp>
+      <p:sp>
+        <p:nvSpPr>
+          <p:cNvPr id="4" name="Slide Number Placeholder 3"/>
           <p:cNvSpPr>
             <a:spLocks noGrp="1"/>
           </p:cNvSpPr>
           <p:nvPr>
-            <p:ph type="body" idx="3" sz="quarter"/>
-          </p:nvPr>
-        </p:nvSpPr>
-        <p:spPr/>
-        <p:txBody>
-          <a:bodyPr/>
-          <a:lstStyle/>
-          <a:p>
-            <a:r>
-              <a:t>[4:11 — ~29s]</a:t>
-            </a:r>
-          </a:p>
-          <a:p/>
-          <a:p>
-            <a:r>
-              <a:t>Under PG1 I'm responsible for the judgements here regardless of what produced the first draft of them — which means understanding the model before relying on it, and judging whether its assumptions suit the purpose.</a:t>
-            </a:r>
-          </a:p>
-          <a:p/>
-          <a:p>
-            <a:r>
-              <a:t>If your time is limited, I'd put it on two things: my decision to exclude the announcement drafts, and whether the ASC-101 estimate should go in front of the board at all. Thank you.</a:t>
-            </a:r>
-          </a:p>
-          <a:p/>
-          <a:p>
-            <a:r>
-              <a:t>END — target 4:40, limit 5:00.</a:t>
-            </a:r>
-          </a:p>
-        </p:txBody>
-      </p:sp>
-      <p:sp>
-        <p:nvSpPr>
-          <p:cNvPr id="4" name="Slide Number Placeholder 3"/>
-          <p:cNvSpPr>
-            <a:spLocks noGrp="1"/>
-          </p:cNvSpPr>
-          <p:nvPr>
-            <p:ph type="sldNum" idx="5" sz="quarter"/>
+            <p:ph type="sldNum" sz="quarter" idx="5"/>
           </p:nvPr>
         </p:nvSpPr>
         <p:spPr/>
@@ -1206,10 +1048,9 @@
           <a:lstStyle/>
           <a:p>
             <a:r>
-              <a:rPr lang="en-US" smtClean="0"/>
+              <a:rPr lang="en-US"/>
               <a:t>Click to edit Master title style</a:t>
             </a:r>
-            <a:endParaRPr lang="en-US"/>
           </a:p>
         </p:txBody>
       </p:sp>
@@ -1325,10 +1166,9 @@
           </a:lstStyle>
           <a:p>
             <a:r>
-              <a:rPr lang="en-US" smtClean="0"/>
+              <a:rPr lang="en-US"/>
               <a:t>Click to edit Master subtitle style</a:t>
             </a:r>
-            <a:endParaRPr lang="en-US"/>
           </a:p>
         </p:txBody>
       </p:sp>
@@ -1349,7 +1189,7 @@
           <a:p>
             <a:fld id="{5BCAD085-E8A6-8845-BD4E-CB4CCA059FC4}" type="datetimeFigureOut">
               <a:rPr lang="en-US" smtClean="0"/>
-              <a:t>1/27/13</a:t>
+              <a:t>9/25/2026</a:t>
             </a:fld>
             <a:endParaRPr lang="en-US"/>
           </a:p>
@@ -1443,10 +1283,9 @@
           <a:lstStyle/>
           <a:p>
             <a:r>
-              <a:rPr lang="en-US" smtClean="0"/>
+              <a:rPr lang="en-US"/>
               <a:t>Click to edit Master title style</a:t>
             </a:r>
-            <a:endParaRPr lang="en-US"/>
           </a:p>
         </p:txBody>
       </p:sp>
@@ -1467,38 +1306,37 @@
           <a:p>
             <a:pPr lvl="0"/>
             <a:r>
-              <a:rPr lang="en-US" smtClean="0"/>
+              <a:rPr lang="en-US"/>
               <a:t>Click to edit Master text styles</a:t>
             </a:r>
           </a:p>
           <a:p>
             <a:pPr lvl="1"/>
             <a:r>
-              <a:rPr lang="en-US" smtClean="0"/>
+              <a:rPr lang="en-US"/>
               <a:t>Second level</a:t>
             </a:r>
           </a:p>
           <a:p>
             <a:pPr lvl="2"/>
             <a:r>
-              <a:rPr lang="en-US" smtClean="0"/>
+              <a:rPr lang="en-US"/>
               <a:t>Third level</a:t>
             </a:r>
           </a:p>
           <a:p>
             <a:pPr lvl="3"/>
             <a:r>
-              <a:rPr lang="en-US" smtClean="0"/>
+              <a:rPr lang="en-US"/>
               <a:t>Fourth level</a:t>
             </a:r>
           </a:p>
           <a:p>
             <a:pPr lvl="4"/>
             <a:r>
-              <a:rPr lang="en-US" smtClean="0"/>
+              <a:rPr lang="en-US"/>
               <a:t>Fifth level</a:t>
             </a:r>
-            <a:endParaRPr lang="en-US"/>
           </a:p>
         </p:txBody>
       </p:sp>
@@ -1519,7 +1357,7 @@
           <a:p>
             <a:fld id="{5BCAD085-E8A6-8845-BD4E-CB4CCA059FC4}" type="datetimeFigureOut">
               <a:rPr lang="en-US" smtClean="0"/>
-              <a:t>1/27/13</a:t>
+              <a:t>9/25/2026</a:t>
             </a:fld>
             <a:endParaRPr lang="en-US"/>
           </a:p>
@@ -1618,10 +1456,9 @@
           <a:lstStyle/>
           <a:p>
             <a:r>
-              <a:rPr lang="en-US" smtClean="0"/>
+              <a:rPr lang="en-US"/>
               <a:t>Click to edit Master title style</a:t>
             </a:r>
-            <a:endParaRPr lang="en-US"/>
           </a:p>
         </p:txBody>
       </p:sp>
@@ -1647,38 +1484,37 @@
           <a:p>
             <a:pPr lvl="0"/>
             <a:r>
-              <a:rPr lang="en-US" smtClean="0"/>
+              <a:rPr lang="en-US"/>
               <a:t>Click to edit Master text styles</a:t>
             </a:r>
           </a:p>
           <a:p>
             <a:pPr lvl="1"/>
             <a:r>
-              <a:rPr lang="en-US" smtClean="0"/>
+              <a:rPr lang="en-US"/>
               <a:t>Second level</a:t>
             </a:r>
           </a:p>
           <a:p>
             <a:pPr lvl="2"/>
             <a:r>
-              <a:rPr lang="en-US" smtClean="0"/>
+              <a:rPr lang="en-US"/>
               <a:t>Third level</a:t>
             </a:r>
           </a:p>
           <a:p>
             <a:pPr lvl="3"/>
             <a:r>
-              <a:rPr lang="en-US" smtClean="0"/>
+              <a:rPr lang="en-US"/>
               <a:t>Fourth level</a:t>
             </a:r>
           </a:p>
           <a:p>
             <a:pPr lvl="4"/>
             <a:r>
-              <a:rPr lang="en-US" smtClean="0"/>
+              <a:rPr lang="en-US"/>
               <a:t>Fifth level</a:t>
             </a:r>
-            <a:endParaRPr lang="en-US"/>
           </a:p>
         </p:txBody>
       </p:sp>
@@ -1699,7 +1535,7 @@
           <a:p>
             <a:fld id="{5BCAD085-E8A6-8845-BD4E-CB4CCA059FC4}" type="datetimeFigureOut">
               <a:rPr lang="en-US" smtClean="0"/>
-              <a:t>1/27/13</a:t>
+              <a:t>9/25/2026</a:t>
             </a:fld>
             <a:endParaRPr lang="en-US"/>
           </a:p>
@@ -1793,10 +1629,9 @@
           <a:lstStyle/>
           <a:p>
             <a:r>
-              <a:rPr lang="en-US" smtClean="0"/>
+              <a:rPr lang="en-US"/>
               <a:t>Click to edit Master title style</a:t>
             </a:r>
-            <a:endParaRPr lang="en-US"/>
           </a:p>
         </p:txBody>
       </p:sp>
@@ -1817,38 +1652,37 @@
           <a:p>
             <a:pPr lvl="0"/>
             <a:r>
-              <a:rPr lang="en-US" smtClean="0"/>
+              <a:rPr lang="en-US"/>
               <a:t>Click to edit Master text styles</a:t>
             </a:r>
           </a:p>
           <a:p>
             <a:pPr lvl="1"/>
             <a:r>
-              <a:rPr lang="en-US" smtClean="0"/>
+              <a:rPr lang="en-US"/>
               <a:t>Second level</a:t>
             </a:r>
           </a:p>
           <a:p>
             <a:pPr lvl="2"/>
             <a:r>
-              <a:rPr lang="en-US" smtClean="0"/>
+              <a:rPr lang="en-US"/>
               <a:t>Third level</a:t>
             </a:r>
           </a:p>
           <a:p>
             <a:pPr lvl="3"/>
             <a:r>
-              <a:rPr lang="en-US" smtClean="0"/>
+              <a:rPr lang="en-US"/>
               <a:t>Fourth level</a:t>
             </a:r>
           </a:p>
           <a:p>
             <a:pPr lvl="4"/>
             <a:r>
-              <a:rPr lang="en-US" smtClean="0"/>
+              <a:rPr lang="en-US"/>
               <a:t>Fifth level</a:t>
             </a:r>
-            <a:endParaRPr lang="en-US"/>
           </a:p>
         </p:txBody>
       </p:sp>
@@ -1869,7 +1703,7 @@
           <a:p>
             <a:fld id="{5BCAD085-E8A6-8845-BD4E-CB4CCA059FC4}" type="datetimeFigureOut">
               <a:rPr lang="en-US" smtClean="0"/>
-              <a:t>1/27/13</a:t>
+              <a:t>9/25/2026</a:t>
             </a:fld>
             <a:endParaRPr lang="en-US"/>
           </a:p>
@@ -1972,10 +1806,9 @@
           </a:lstStyle>
           <a:p>
             <a:r>
-              <a:rPr lang="en-US" smtClean="0"/>
+              <a:rPr lang="en-US"/>
               <a:t>Click to edit Master title style</a:t>
             </a:r>
-            <a:endParaRPr lang="en-US"/>
           </a:p>
         </p:txBody>
       </p:sp>
@@ -2092,7 +1925,7 @@
           <a:p>
             <a:pPr lvl="0"/>
             <a:r>
-              <a:rPr lang="en-US" smtClean="0"/>
+              <a:rPr lang="en-US"/>
               <a:t>Click to edit Master text styles</a:t>
             </a:r>
           </a:p>
@@ -2115,7 +1948,7 @@
           <a:p>
             <a:fld id="{5BCAD085-E8A6-8845-BD4E-CB4CCA059FC4}" type="datetimeFigureOut">
               <a:rPr lang="en-US" smtClean="0"/>
-              <a:t>1/27/13</a:t>
+              <a:t>9/25/2026</a:t>
             </a:fld>
             <a:endParaRPr lang="en-US"/>
           </a:p>
@@ -2209,10 +2042,9 @@
           <a:lstStyle/>
           <a:p>
             <a:r>
-              <a:rPr lang="en-US" smtClean="0"/>
+              <a:rPr lang="en-US"/>
               <a:t>Click to edit Master title style</a:t>
             </a:r>
-            <a:endParaRPr lang="en-US"/>
           </a:p>
         </p:txBody>
       </p:sp>
@@ -2266,38 +2098,37 @@
           <a:p>
             <a:pPr lvl="0"/>
             <a:r>
-              <a:rPr lang="en-US" smtClean="0"/>
+              <a:rPr lang="en-US"/>
               <a:t>Click to edit Master text styles</a:t>
             </a:r>
           </a:p>
           <a:p>
             <a:pPr lvl="1"/>
             <a:r>
-              <a:rPr lang="en-US" smtClean="0"/>
+              <a:rPr lang="en-US"/>
               <a:t>Second level</a:t>
             </a:r>
           </a:p>
           <a:p>
             <a:pPr lvl="2"/>
             <a:r>
-              <a:rPr lang="en-US" smtClean="0"/>
+              <a:rPr lang="en-US"/>
               <a:t>Third level</a:t>
             </a:r>
           </a:p>
           <a:p>
             <a:pPr lvl="3"/>
             <a:r>
-              <a:rPr lang="en-US" smtClean="0"/>
+              <a:rPr lang="en-US"/>
               <a:t>Fourth level</a:t>
             </a:r>
           </a:p>
           <a:p>
             <a:pPr lvl="4"/>
             <a:r>
-              <a:rPr lang="en-US" smtClean="0"/>
+              <a:rPr lang="en-US"/>
               <a:t>Fifth level</a:t>
             </a:r>
-            <a:endParaRPr lang="en-US"/>
           </a:p>
         </p:txBody>
       </p:sp>
@@ -2351,38 +2182,37 @@
           <a:p>
             <a:pPr lvl="0"/>
             <a:r>
-              <a:rPr lang="en-US" smtClean="0"/>
+              <a:rPr lang="en-US"/>
               <a:t>Click to edit Master text styles</a:t>
             </a:r>
           </a:p>
           <a:p>
             <a:pPr lvl="1"/>
             <a:r>
-              <a:rPr lang="en-US" smtClean="0"/>
+              <a:rPr lang="en-US"/>
               <a:t>Second level</a:t>
             </a:r>
           </a:p>
           <a:p>
             <a:pPr lvl="2"/>
             <a:r>
-              <a:rPr lang="en-US" smtClean="0"/>
+              <a:rPr lang="en-US"/>
               <a:t>Third level</a:t>
             </a:r>
           </a:p>
           <a:p>
             <a:pPr lvl="3"/>
             <a:r>
-              <a:rPr lang="en-US" smtClean="0"/>
+              <a:rPr lang="en-US"/>
               <a:t>Fourth level</a:t>
             </a:r>
           </a:p>
           <a:p>
             <a:pPr lvl="4"/>
             <a:r>
-              <a:rPr lang="en-US" smtClean="0"/>
+              <a:rPr lang="en-US"/>
               <a:t>Fifth level</a:t>
             </a:r>
-            <a:endParaRPr lang="en-US"/>
           </a:p>
         </p:txBody>
       </p:sp>
@@ -2403,7 +2233,7 @@
           <a:p>
             <a:fld id="{5BCAD085-E8A6-8845-BD4E-CB4CCA059FC4}" type="datetimeFigureOut">
               <a:rPr lang="en-US" smtClean="0"/>
-              <a:t>1/27/13</a:t>
+              <a:t>9/25/2026</a:t>
             </a:fld>
             <a:endParaRPr lang="en-US"/>
           </a:p>
@@ -2501,10 +2331,9 @@
           </a:lstStyle>
           <a:p>
             <a:r>
-              <a:rPr lang="en-US" smtClean="0"/>
+              <a:rPr lang="en-US"/>
               <a:t>Click to edit Master title style</a:t>
             </a:r>
-            <a:endParaRPr lang="en-US"/>
           </a:p>
         </p:txBody>
       </p:sp>
@@ -2567,7 +2396,7 @@
           <a:p>
             <a:pPr lvl="0"/>
             <a:r>
-              <a:rPr lang="en-US" smtClean="0"/>
+              <a:rPr lang="en-US"/>
               <a:t>Click to edit Master text styles</a:t>
             </a:r>
           </a:p>
@@ -2623,38 +2452,37 @@
           <a:p>
             <a:pPr lvl="0"/>
             <a:r>
-              <a:rPr lang="en-US" smtClean="0"/>
+              <a:rPr lang="en-US"/>
               <a:t>Click to edit Master text styles</a:t>
             </a:r>
           </a:p>
           <a:p>
             <a:pPr lvl="1"/>
             <a:r>
-              <a:rPr lang="en-US" smtClean="0"/>
+              <a:rPr lang="en-US"/>
               <a:t>Second level</a:t>
             </a:r>
           </a:p>
           <a:p>
             <a:pPr lvl="2"/>
             <a:r>
-              <a:rPr lang="en-US" smtClean="0"/>
+              <a:rPr lang="en-US"/>
               <a:t>Third level</a:t>
             </a:r>
           </a:p>
           <a:p>
             <a:pPr lvl="3"/>
             <a:r>
-              <a:rPr lang="en-US" smtClean="0"/>
+              <a:rPr lang="en-US"/>
               <a:t>Fourth level</a:t>
             </a:r>
           </a:p>
           <a:p>
             <a:pPr lvl="4"/>
             <a:r>
-              <a:rPr lang="en-US" smtClean="0"/>
+              <a:rPr lang="en-US"/>
               <a:t>Fifth level</a:t>
             </a:r>
-            <a:endParaRPr lang="en-US"/>
           </a:p>
         </p:txBody>
       </p:sp>
@@ -2717,7 +2545,7 @@
           <a:p>
             <a:pPr lvl="0"/>
             <a:r>
-              <a:rPr lang="en-US" smtClean="0"/>
+              <a:rPr lang="en-US"/>
               <a:t>Click to edit Master text styles</a:t>
             </a:r>
           </a:p>
@@ -2773,38 +2601,37 @@
           <a:p>
             <a:pPr lvl="0"/>
             <a:r>
-              <a:rPr lang="en-US" smtClean="0"/>
+              <a:rPr lang="en-US"/>
               <a:t>Click to edit Master text styles</a:t>
             </a:r>
           </a:p>
           <a:p>
             <a:pPr lvl="1"/>
             <a:r>
-              <a:rPr lang="en-US" smtClean="0"/>
+              <a:rPr lang="en-US"/>
               <a:t>Second level</a:t>
             </a:r>
           </a:p>
           <a:p>
             <a:pPr lvl="2"/>
             <a:r>
-              <a:rPr lang="en-US" smtClean="0"/>
+              <a:rPr lang="en-US"/>
               <a:t>Third level</a:t>
             </a:r>
           </a:p>
           <a:p>
             <a:pPr lvl="3"/>
             <a:r>
-              <a:rPr lang="en-US" smtClean="0"/>
+              <a:rPr lang="en-US"/>
               <a:t>Fourth level</a:t>
             </a:r>
           </a:p>
           <a:p>
             <a:pPr lvl="4"/>
             <a:r>
-              <a:rPr lang="en-US" smtClean="0"/>
+              <a:rPr lang="en-US"/>
               <a:t>Fifth level</a:t>
             </a:r>
-            <a:endParaRPr lang="en-US"/>
           </a:p>
         </p:txBody>
       </p:sp>
@@ -2825,7 +2652,7 @@
           <a:p>
             <a:fld id="{5BCAD085-E8A6-8845-BD4E-CB4CCA059FC4}" type="datetimeFigureOut">
               <a:rPr lang="en-US" smtClean="0"/>
-              <a:t>1/27/13</a:t>
+              <a:t>9/25/2026</a:t>
             </a:fld>
             <a:endParaRPr lang="en-US"/>
           </a:p>
@@ -2919,10 +2746,9 @@
           <a:lstStyle/>
           <a:p>
             <a:r>
-              <a:rPr lang="en-US" smtClean="0"/>
+              <a:rPr lang="en-US"/>
               <a:t>Click to edit Master title style</a:t>
             </a:r>
-            <a:endParaRPr lang="en-US"/>
           </a:p>
         </p:txBody>
       </p:sp>
@@ -2943,7 +2769,7 @@
           <a:p>
             <a:fld id="{5BCAD085-E8A6-8845-BD4E-CB4CCA059FC4}" type="datetimeFigureOut">
               <a:rPr lang="en-US" smtClean="0"/>
-              <a:t>1/27/13</a:t>
+              <a:t>9/25/2026</a:t>
             </a:fld>
             <a:endParaRPr lang="en-US"/>
           </a:p>
@@ -3038,7 +2864,7 @@
           <a:p>
             <a:fld id="{5BCAD085-E8A6-8845-BD4E-CB4CCA059FC4}" type="datetimeFigureOut">
               <a:rPr lang="en-US" smtClean="0"/>
-              <a:t>1/27/13</a:t>
+              <a:t>9/25/2026</a:t>
             </a:fld>
             <a:endParaRPr lang="en-US"/>
           </a:p>
@@ -3141,10 +2967,9 @@
           </a:lstStyle>
           <a:p>
             <a:r>
-              <a:rPr lang="en-US" smtClean="0"/>
+              <a:rPr lang="en-US"/>
               <a:t>Click to edit Master title style</a:t>
             </a:r>
-            <a:endParaRPr lang="en-US"/>
           </a:p>
         </p:txBody>
       </p:sp>
@@ -3198,38 +3023,37 @@
           <a:p>
             <a:pPr lvl="0"/>
             <a:r>
-              <a:rPr lang="en-US" smtClean="0"/>
+              <a:rPr lang="en-US"/>
               <a:t>Click to edit Master text styles</a:t>
             </a:r>
           </a:p>
           <a:p>
             <a:pPr lvl="1"/>
             <a:r>
-              <a:rPr lang="en-US" smtClean="0"/>
+              <a:rPr lang="en-US"/>
               <a:t>Second level</a:t>
             </a:r>
           </a:p>
           <a:p>
             <a:pPr lvl="2"/>
             <a:r>
-              <a:rPr lang="en-US" smtClean="0"/>
+              <a:rPr lang="en-US"/>
               <a:t>Third level</a:t>
             </a:r>
           </a:p>
           <a:p>
             <a:pPr lvl="3"/>
             <a:r>
-              <a:rPr lang="en-US" smtClean="0"/>
+              <a:rPr lang="en-US"/>
               <a:t>Fourth level</a:t>
             </a:r>
           </a:p>
           <a:p>
             <a:pPr lvl="4"/>
             <a:r>
-              <a:rPr lang="en-US" smtClean="0"/>
+              <a:rPr lang="en-US"/>
               <a:t>Fifth level</a:t>
             </a:r>
-            <a:endParaRPr lang="en-US"/>
           </a:p>
         </p:txBody>
       </p:sp>
@@ -3292,7 +3116,7 @@
           <a:p>
             <a:pPr lvl="0"/>
             <a:r>
-              <a:rPr lang="en-US" smtClean="0"/>
+              <a:rPr lang="en-US"/>
               <a:t>Click to edit Master text styles</a:t>
             </a:r>
           </a:p>
@@ -3315,7 +3139,7 @@
           <a:p>
             <a:fld id="{5BCAD085-E8A6-8845-BD4E-CB4CCA059FC4}" type="datetimeFigureOut">
               <a:rPr lang="en-US" smtClean="0"/>
-              <a:t>1/27/13</a:t>
+              <a:t>9/25/2026</a:t>
             </a:fld>
             <a:endParaRPr lang="en-US"/>
           </a:p>
@@ -3418,10 +3242,9 @@
           </a:lstStyle>
           <a:p>
             <a:r>
-              <a:rPr lang="en-US" smtClean="0"/>
+              <a:rPr lang="en-US"/>
               <a:t>Click to edit Master title style</a:t>
             </a:r>
-            <a:endParaRPr lang="en-US"/>
           </a:p>
         </p:txBody>
       </p:sp>
@@ -3545,7 +3368,7 @@
           <a:p>
             <a:pPr lvl="0"/>
             <a:r>
-              <a:rPr lang="en-US" smtClean="0"/>
+              <a:rPr lang="en-US"/>
               <a:t>Click to edit Master text styles</a:t>
             </a:r>
           </a:p>
@@ -3568,7 +3391,7 @@
           <a:p>
             <a:fld id="{5BCAD085-E8A6-8845-BD4E-CB4CCA059FC4}" type="datetimeFigureOut">
               <a:rPr lang="en-US" smtClean="0"/>
-              <a:t>1/27/13</a:t>
+              <a:t>9/25/2026</a:t>
             </a:fld>
             <a:endParaRPr lang="en-US"/>
           </a:p>
@@ -3677,10 +3500,9 @@
           <a:lstStyle/>
           <a:p>
             <a:r>
-              <a:rPr lang="en-US" smtClean="0"/>
+              <a:rPr lang="en-US"/>
               <a:t>Click to edit Master title style</a:t>
             </a:r>
-            <a:endParaRPr lang="en-US"/>
           </a:p>
         </p:txBody>
       </p:sp>
@@ -3711,38 +3533,37 @@
           <a:p>
             <a:pPr lvl="0"/>
             <a:r>
-              <a:rPr lang="en-US" smtClean="0"/>
+              <a:rPr lang="en-US"/>
               <a:t>Click to edit Master text styles</a:t>
             </a:r>
           </a:p>
           <a:p>
             <a:pPr lvl="1"/>
             <a:r>
-              <a:rPr lang="en-US" smtClean="0"/>
+              <a:rPr lang="en-US"/>
               <a:t>Second level</a:t>
             </a:r>
           </a:p>
           <a:p>
             <a:pPr lvl="2"/>
             <a:r>
-              <a:rPr lang="en-US" smtClean="0"/>
+              <a:rPr lang="en-US"/>
               <a:t>Third level</a:t>
             </a:r>
           </a:p>
           <a:p>
             <a:pPr lvl="3"/>
             <a:r>
-              <a:rPr lang="en-US" smtClean="0"/>
+              <a:rPr lang="en-US"/>
               <a:t>Fourth level</a:t>
             </a:r>
           </a:p>
           <a:p>
             <a:pPr lvl="4"/>
             <a:r>
-              <a:rPr lang="en-US" smtClean="0"/>
+              <a:rPr lang="en-US"/>
               <a:t>Fifth level</a:t>
             </a:r>
-            <a:endParaRPr lang="en-US"/>
           </a:p>
         </p:txBody>
       </p:sp>
@@ -3781,7 +3602,7 @@
           <a:p>
             <a:fld id="{5BCAD085-E8A6-8845-BD4E-CB4CCA059FC4}" type="datetimeFigureOut">
               <a:rPr lang="en-US" smtClean="0"/>
-              <a:t>1/27/13</a:t>
+              <a:t>9/25/2026</a:t>
             </a:fld>
             <a:endParaRPr lang="en-US"/>
           </a:p>
@@ -4140,7 +3961,7 @@
 </file>
 
 <file path=ppt/slides/slide1.xml><?xml version="1.0" encoding="utf-8"?>
-<p:sld xmlns:a="http://schemas.openxmlformats.org/drawingml/2006/main" xmlns:p="http://schemas.openxmlformats.org/presentationml/2006/main" xmlns:r="http://schemas.openxmlformats.org/officeDocument/2006/relationships">
+<p:sld xmlns:a="http://schemas.openxmlformats.org/drawingml/2006/main" xmlns:r="http://schemas.openxmlformats.org/officeDocument/2006/relationships" xmlns:p="http://schemas.openxmlformats.org/presentationml/2006/main">
   <p:cSld>
     <p:spTree>
       <p:nvGrpSpPr>
@@ -4148,7 +3969,14 @@
         <p:cNvGrpSpPr/>
         <p:nvPr/>
       </p:nvGrpSpPr>
-      <p:grpSpPr/>
+      <p:grpSpPr>
+        <a:xfrm>
+          <a:off x="0" y="0"/>
+          <a:ext cx="0" cy="0"/>
+          <a:chOff x="0" y="0"/>
+          <a:chExt cx="0" cy="0"/>
+        </a:xfrm>
+      </p:grpSpPr>
       <p:sp>
         <p:nvSpPr>
           <p:cNvPr id="2" name="Rectangle 1"/>
@@ -4190,6 +4018,7 @@
           <a:lstStyle/>
           <a:p>
             <a:pPr algn="ctr"/>
+            <a:endParaRPr/>
           </a:p>
         </p:txBody>
       </p:sp>
@@ -4234,7 +4063,7 @@
           </a:fontRef>
         </p:style>
         <p:txBody>
-          <a:bodyPr rtlCol="0" anchor="ctr" wrap="square"/>
+          <a:bodyPr wrap="square" rtlCol="0" anchor="ctr"/>
           <a:lstStyle/>
           <a:p>
             <a:pPr algn="ctr"/>
@@ -4275,7 +4104,7 @@
         <p:spPr>
           <a:xfrm>
             <a:off x="5532120" y="1737360"/>
-            <a:ext cx="6110935" cy="3108960"/>
+            <a:ext cx="6110935" cy="1842620"/>
           </a:xfrm>
           <a:prstGeom prst="rect">
             <a:avLst/>
@@ -4290,28 +4119,6 @@
           <a:p>
             <a:pPr>
               <a:lnSpc>
-                <a:spcPct val="108000"/>
-              </a:lnSpc>
-              <a:spcBef>
-                <a:spcPts val="0"/>
-              </a:spcBef>
-              <a:spcAft>
-                <a:spcPts val="1000"/>
-              </a:spcAft>
-            </a:pPr>
-            <a:r>
-              <a:rPr sz="1200" b="1" i="0">
-                <a:solidFill>
-                  <a:srgbClr val="5A6478"/>
-                </a:solidFill>
-                <a:latin typeface="Calibri"/>
-              </a:rPr>
-              <a:t>DSA 2026 S2 — QUESTION 5</a:t>
-            </a:r>
-          </a:p>
-          <a:p>
-            <a:pPr>
-              <a:lnSpc>
                 <a:spcPct val="100000"/>
               </a:lnSpc>
               <a:spcBef>
@@ -4322,7 +4129,7 @@
               </a:spcAft>
             </a:pPr>
             <a:r>
-              <a:rPr sz="3600" b="1" i="0">
+              <a:rPr sz="3600" b="1" i="0" dirty="0">
                 <a:solidFill>
                   <a:srgbClr val="1F4E79"/>
                 </a:solidFill>
@@ -4345,35 +4152,31 @@
               </a:spcAft>
             </a:pPr>
             <a:r>
-              <a:rPr sz="1700" b="0" i="0">
+              <a:rPr sz="1700" b="0" i="0" dirty="0">
                 <a:solidFill>
                   <a:srgbClr val="141B2D"/>
                 </a:solidFill>
                 <a:latin typeface="Calibri"/>
               </a:rPr>
-              <a:t>Estimating market reactions to the ASC-101, ASC-204 and ASC-370 readouts</a:t>
-            </a:r>
-          </a:p>
-          <a:p>
-            <a:pPr>
-              <a:lnSpc>
-                <a:spcPct val="108000"/>
-              </a:lnSpc>
-              <a:spcBef>
-                <a:spcPts val="0"/>
-              </a:spcBef>
-              <a:spcAft>
-                <a:spcPts val="0"/>
-              </a:spcAft>
-            </a:pPr>
-            <a:r>
-              <a:rPr sz="1400" b="0" i="0">
-                <a:solidFill>
-                  <a:srgbClr val="5A6478"/>
-                </a:solidFill>
-                <a:latin typeface="Calibri"/>
-              </a:rPr>
-              <a:t>Member ID: [INSERT]</a:t>
+              <a:t>Estimating </a:t>
+            </a:r>
+            <a:r>
+              <a:rPr sz="1700" b="0" i="0" dirty="0" err="1">
+                <a:solidFill>
+                  <a:srgbClr val="141B2D"/>
+                </a:solidFill>
+                <a:latin typeface="Calibri"/>
+              </a:rPr>
+              <a:t>arket</a:t>
+            </a:r>
+            <a:r>
+              <a:rPr sz="1700" b="0" i="0" dirty="0">
+                <a:solidFill>
+                  <a:srgbClr val="141B2D"/>
+                </a:solidFill>
+                <a:latin typeface="Calibri"/>
+              </a:rPr>
+              <a:t> reactions to the ASC-101, ASC-204 and ASC-370</a:t>
             </a:r>
           </a:p>
         </p:txBody>
@@ -4387,7 +4190,7 @@
 </file>
 
 <file path=ppt/slides/slide2.xml><?xml version="1.0" encoding="utf-8"?>
-<p:sld xmlns:a="http://schemas.openxmlformats.org/drawingml/2006/main" xmlns:p="http://schemas.openxmlformats.org/presentationml/2006/main" xmlns:r="http://schemas.openxmlformats.org/officeDocument/2006/relationships">
+<p:sld xmlns:a="http://schemas.openxmlformats.org/drawingml/2006/main" xmlns:r="http://schemas.openxmlformats.org/officeDocument/2006/relationships" xmlns:p="http://schemas.openxmlformats.org/presentationml/2006/main">
   <p:cSld>
     <p:spTree>
       <p:nvGrpSpPr>
@@ -4395,7 +4198,14 @@
         <p:cNvGrpSpPr/>
         <p:nvPr/>
       </p:nvGrpSpPr>
-      <p:grpSpPr/>
+      <p:grpSpPr>
+        <a:xfrm>
+          <a:off x="0" y="0"/>
+          <a:ext cx="0" cy="0"/>
+          <a:chOff x="0" y="0"/>
+          <a:chExt cx="0" cy="0"/>
+        </a:xfrm>
+      </p:grpSpPr>
       <p:sp>
         <p:nvSpPr>
           <p:cNvPr id="2" name="Rectangle 1"/>
@@ -4437,6 +4247,7 @@
           <a:lstStyle/>
           <a:p>
             <a:pPr algn="ctr"/>
+            <a:endParaRPr/>
           </a:p>
         </p:txBody>
       </p:sp>
@@ -4481,7 +4292,7 @@
           </a:fontRef>
         </p:style>
         <p:txBody>
-          <a:bodyPr rtlCol="0" anchor="ctr" wrap="square"/>
+          <a:bodyPr wrap="square" rtlCol="0" anchor="ctr"/>
           <a:lstStyle/>
           <a:p>
             <a:pPr algn="ctr"/>
@@ -4621,6 +4432,7 @@
           <a:lstStyle/>
           <a:p>
             <a:pPr algn="ctr"/>
+            <a:endParaRPr/>
           </a:p>
         </p:txBody>
       </p:sp>
@@ -4633,7 +4445,7 @@
         <p:spPr>
           <a:xfrm>
             <a:off x="5532120" y="2121408"/>
-            <a:ext cx="6110935" cy="4114800"/>
+            <a:ext cx="6110935" cy="3822008"/>
           </a:xfrm>
           <a:prstGeom prst="rect">
             <a:avLst/>
@@ -4658,7 +4470,7 @@
               </a:spcAft>
             </a:pPr>
             <a:r>
-              <a:rPr sz="1800" b="1" i="0">
+              <a:rPr sz="1800" b="1" i="0" dirty="0">
                 <a:solidFill>
                   <a:srgbClr val="141B2D"/>
                 </a:solidFill>
@@ -4680,13 +4492,144 @@
               </a:spcAft>
             </a:pPr>
             <a:r>
-              <a:rPr sz="1400" b="0" i="0">
+              <a:rPr sz="1400" b="0" i="0" dirty="0">
                 <a:solidFill>
                   <a:srgbClr val="5A6478"/>
                 </a:solidFill>
                 <a:latin typeface="Calibri"/>
               </a:rPr>
-              <a:t>30 filings read by hand · all 2,392 directional labels checked against the realised move · a screen over all 4,539 classifications flags 40%, mostly timing rather than wrong labels.</a:t>
+              <a:t>30 filings read by hand</a:t>
+            </a:r>
+            <a:r>
+              <a:rPr lang="en-US" sz="1400" b="0" i="0" dirty="0">
+                <a:solidFill>
+                  <a:srgbClr val="5A6478"/>
+                </a:solidFill>
+                <a:latin typeface="Calibri"/>
+              </a:rPr>
+              <a:t>. </a:t>
+            </a:r>
+          </a:p>
+          <a:p>
+            <a:pPr>
+              <a:lnSpc>
+                <a:spcPct val="112000"/>
+              </a:lnSpc>
+              <a:spcBef>
+                <a:spcPts val="0"/>
+              </a:spcBef>
+              <a:spcAft>
+                <a:spcPts val="0"/>
+              </a:spcAft>
+            </a:pPr>
+            <a:r>
+              <a:rPr lang="en-US" sz="1400" dirty="0">
+                <a:solidFill>
+                  <a:srgbClr val="5A6478"/>
+                </a:solidFill>
+                <a:latin typeface="Calibri"/>
+              </a:rPr>
+              <a:t>A</a:t>
+            </a:r>
+            <a:r>
+              <a:rPr sz="1400" b="0" i="0" dirty="0">
+                <a:solidFill>
+                  <a:srgbClr val="5A6478"/>
+                </a:solidFill>
+                <a:latin typeface="Calibri"/>
+              </a:rPr>
+              <a:t>ll 2,392 directional labels checked against the </a:t>
+            </a:r>
+            <a:r>
+              <a:rPr sz="1400" b="0" i="0" dirty="0" err="1">
+                <a:solidFill>
+                  <a:srgbClr val="5A6478"/>
+                </a:solidFill>
+                <a:latin typeface="Calibri"/>
+              </a:rPr>
+              <a:t>realised</a:t>
+            </a:r>
+            <a:r>
+              <a:rPr sz="1400" b="0" i="0" dirty="0">
+                <a:solidFill>
+                  <a:srgbClr val="5A6478"/>
+                </a:solidFill>
+                <a:latin typeface="Calibri"/>
+              </a:rPr>
+              <a:t> move</a:t>
+            </a:r>
+            <a:r>
+              <a:rPr lang="en-US" sz="1400" b="0" i="0" dirty="0">
+                <a:solidFill>
+                  <a:srgbClr val="5A6478"/>
+                </a:solidFill>
+                <a:latin typeface="Calibri"/>
+              </a:rPr>
+              <a:t>.</a:t>
+            </a:r>
+            <a:r>
+              <a:rPr sz="1400" b="0" i="0" dirty="0">
+                <a:solidFill>
+                  <a:srgbClr val="5A6478"/>
+                </a:solidFill>
+                <a:latin typeface="Calibri"/>
+              </a:rPr>
+              <a:t> </a:t>
+            </a:r>
+            <a:endParaRPr lang="en-US" sz="1400" b="0" i="0" dirty="0">
+              <a:solidFill>
+                <a:srgbClr val="5A6478"/>
+              </a:solidFill>
+              <a:latin typeface="Calibri"/>
+            </a:endParaRPr>
+          </a:p>
+          <a:p>
+            <a:pPr>
+              <a:lnSpc>
+                <a:spcPct val="112000"/>
+              </a:lnSpc>
+              <a:spcBef>
+                <a:spcPts val="0"/>
+              </a:spcBef>
+              <a:spcAft>
+                <a:spcPts val="0"/>
+              </a:spcAft>
+            </a:pPr>
+            <a:r>
+              <a:rPr lang="en-US" sz="1400" dirty="0">
+                <a:solidFill>
+                  <a:srgbClr val="5A6478"/>
+                </a:solidFill>
+                <a:latin typeface="Calibri"/>
+              </a:rPr>
+              <a:t>A</a:t>
+            </a:r>
+            <a:r>
+              <a:rPr sz="1400" b="0" i="0" dirty="0">
+                <a:solidFill>
+                  <a:srgbClr val="5A6478"/>
+                </a:solidFill>
+                <a:latin typeface="Calibri"/>
+              </a:rPr>
+              <a:t> screen</a:t>
+            </a:r>
+            <a:r>
+              <a:rPr lang="en-US" sz="1400" b="0" i="0" dirty="0">
+                <a:solidFill>
+                  <a:srgbClr val="5A6478"/>
+                </a:solidFill>
+                <a:latin typeface="Calibri"/>
+              </a:rPr>
+              <a:t>ing</a:t>
+            </a:r>
+            <a:r>
+              <a:rPr sz="1400" b="0" i="0" dirty="0">
+                <a:solidFill>
+                  <a:srgbClr val="5A6478"/>
+                </a:solidFill>
+                <a:latin typeface="Calibri"/>
+              </a:rPr>
+              <a:t> over all 4,539 classifications flags 40%, mostly timing rather than wrong labels.</a:t>
             </a:r>
           </a:p>
           <a:p>
@@ -4702,13 +4645,31 @@
               </a:spcAft>
             </a:pPr>
             <a:r>
-              <a:rPr sz="1800" b="1" i="0">
+              <a:rPr sz="1800" b="1" i="0" dirty="0">
                 <a:solidFill>
                   <a:srgbClr val="141B2D"/>
                 </a:solidFill>
                 <a:latin typeface="Calibri"/>
               </a:rPr>
-              <a:t>Grouped 1,975 readouts into eight families.</a:t>
+              <a:t>Grouped 1,975 readouts into eight families</a:t>
+            </a:r>
+            <a:r>
+              <a:rPr lang="en-US" sz="1800" b="1" i="0" dirty="0">
+                <a:solidFill>
+                  <a:srgbClr val="141B2D"/>
+                </a:solidFill>
+                <a:latin typeface="Calibri"/>
+              </a:rPr>
+              <a:t> (clustering)</a:t>
+            </a:r>
+            <a:r>
+              <a:rPr sz="1800" b="1" i="0" dirty="0">
+                <a:solidFill>
+                  <a:srgbClr val="141B2D"/>
+                </a:solidFill>
+                <a:latin typeface="Calibri"/>
+              </a:rPr>
+              <a:t>.</a:t>
             </a:r>
           </a:p>
           <a:p>
@@ -4724,13 +4685,13 @@
               </a:spcAft>
             </a:pPr>
             <a:r>
-              <a:rPr sz="1400" b="0" i="0">
+              <a:rPr sz="1400" b="0" i="0" dirty="0">
                 <a:solidFill>
                   <a:srgbClr val="5A6478"/>
                 </a:solidFill>
                 <a:latin typeface="Calibri"/>
               </a:rPr>
-              <a:t>Disease, design, stage and sponsor — to find comparables for each readout.</a:t>
+              <a:t>Disease, design, stage and sponsor to find comparables for each readout.</a:t>
             </a:r>
           </a:p>
           <a:p>
@@ -4746,7 +4707,7 @@
               </a:spcAft>
             </a:pPr>
             <a:r>
-              <a:rPr sz="1800" b="1" i="0">
+              <a:rPr sz="1800" b="1" i="0" dirty="0">
                 <a:solidFill>
                   <a:srgbClr val="141B2D"/>
                 </a:solidFill>
@@ -4768,14 +4729,29 @@
               </a:spcAft>
             </a:pPr>
             <a:r>
-              <a:rPr sz="1400" b="0" i="0">
+              <a:rPr sz="1400" b="0" i="0" dirty="0">
                 <a:solidFill>
                   <a:srgbClr val="5A6478"/>
                 </a:solidFill>
                 <a:latin typeface="Calibri"/>
               </a:rPr>
-              <a:t>Trial, text and company features, scored on held-out announcements. Explains 20%.</a:t>
-            </a:r>
+              <a:t>Trial, text and company features, scored on held-out announcements. </a:t>
+            </a:r>
+            <a:r>
+              <a:rPr lang="en-US" sz="1400" b="0" i="0" dirty="0">
+                <a:solidFill>
+                  <a:srgbClr val="5A6478"/>
+                </a:solidFill>
+                <a:latin typeface="Calibri"/>
+              </a:rPr>
+              <a:t>The models were random forest, ridge regression and gradient boosting. </a:t>
+            </a:r>
+            <a:endParaRPr sz="1400" b="0" i="0" dirty="0">
+              <a:solidFill>
+                <a:srgbClr val="5A6478"/>
+              </a:solidFill>
+              <a:latin typeface="Calibri"/>
+            </a:endParaRPr>
           </a:p>
           <a:p>
             <a:pPr>
@@ -4790,7 +4766,7 @@
               </a:spcAft>
             </a:pPr>
             <a:r>
-              <a:rPr sz="1800" b="1" i="0">
+              <a:rPr sz="1800" b="1" i="0" dirty="0">
                 <a:solidFill>
                   <a:srgbClr val="141B2D"/>
                 </a:solidFill>
@@ -4812,7 +4788,7 @@
               </a:spcAft>
             </a:pPr>
             <a:r>
-              <a:rPr sz="1400" b="0" i="0">
+              <a:rPr sz="1400" b="0" i="0" dirty="0">
                 <a:solidFill>
                   <a:srgbClr val="5A6478"/>
                 </a:solidFill>
@@ -4832,7 +4808,7 @@
 </file>
 
 <file path=ppt/slides/slide3.xml><?xml version="1.0" encoding="utf-8"?>
-<p:sld xmlns:a="http://schemas.openxmlformats.org/drawingml/2006/main" xmlns:p="http://schemas.openxmlformats.org/presentationml/2006/main" xmlns:r="http://schemas.openxmlformats.org/officeDocument/2006/relationships">
+<p:sld xmlns:a="http://schemas.openxmlformats.org/drawingml/2006/main" xmlns:r="http://schemas.openxmlformats.org/officeDocument/2006/relationships" xmlns:p="http://schemas.openxmlformats.org/presentationml/2006/main">
   <p:cSld>
     <p:spTree>
       <p:nvGrpSpPr>
@@ -4840,7 +4816,14 @@
         <p:cNvGrpSpPr/>
         <p:nvPr/>
       </p:nvGrpSpPr>
-      <p:grpSpPr/>
+      <p:grpSpPr>
+        <a:xfrm>
+          <a:off x="0" y="0"/>
+          <a:ext cx="0" cy="0"/>
+          <a:chOff x="0" y="0"/>
+          <a:chExt cx="0" cy="0"/>
+        </a:xfrm>
+      </p:grpSpPr>
       <p:sp>
         <p:nvSpPr>
           <p:cNvPr id="2" name="Rectangle 1"/>
@@ -4882,6 +4865,7 @@
           <a:lstStyle/>
           <a:p>
             <a:pPr algn="ctr"/>
+            <a:endParaRPr/>
           </a:p>
         </p:txBody>
       </p:sp>
@@ -4926,7 +4910,7 @@
           </a:fontRef>
         </p:style>
         <p:txBody>
-          <a:bodyPr rtlCol="0" anchor="ctr" wrap="square"/>
+          <a:bodyPr wrap="square" rtlCol="0" anchor="ctr"/>
           <a:lstStyle/>
           <a:p>
             <a:pPr algn="ctr"/>
@@ -4992,7 +4976,7 @@
               </a:spcAft>
             </a:pPr>
             <a:r>
-              <a:rPr sz="1200" b="1" i="0">
+              <a:rPr sz="1200" b="1" i="0" dirty="0">
                 <a:solidFill>
                   <a:srgbClr val="5A6478"/>
                 </a:solidFill>
@@ -5014,7 +4998,7 @@
               </a:spcAft>
             </a:pPr>
             <a:r>
-              <a:rPr sz="3000" b="1" i="0">
+              <a:rPr sz="3000" b="1" i="0" dirty="0">
                 <a:solidFill>
                   <a:srgbClr val="1F4E79"/>
                 </a:solidFill>
@@ -5067,6 +5051,7 @@
           <a:lstStyle/>
           <a:p>
             <a:pPr algn="ctr"/>
+            <a:endParaRPr/>
           </a:p>
         </p:txBody>
       </p:sp>
@@ -5234,7 +5219,7 @@
 </file>
 
 <file path=ppt/slides/slide4.xml><?xml version="1.0" encoding="utf-8"?>
-<p:sld xmlns:a="http://schemas.openxmlformats.org/drawingml/2006/main" xmlns:p="http://schemas.openxmlformats.org/presentationml/2006/main" xmlns:r="http://schemas.openxmlformats.org/officeDocument/2006/relationships">
+<p:sld xmlns:a="http://schemas.openxmlformats.org/drawingml/2006/main" xmlns:r="http://schemas.openxmlformats.org/officeDocument/2006/relationships" xmlns:p="http://schemas.openxmlformats.org/presentationml/2006/main">
   <p:cSld>
     <p:spTree>
       <p:nvGrpSpPr>
@@ -5242,7 +5227,14 @@
         <p:cNvGrpSpPr/>
         <p:nvPr/>
       </p:nvGrpSpPr>
-      <p:grpSpPr/>
+      <p:grpSpPr>
+        <a:xfrm>
+          <a:off x="0" y="0"/>
+          <a:ext cx="0" cy="0"/>
+          <a:chOff x="0" y="0"/>
+          <a:chExt cx="0" cy="0"/>
+        </a:xfrm>
+      </p:grpSpPr>
       <p:sp>
         <p:nvSpPr>
           <p:cNvPr id="2" name="Rectangle 1"/>
@@ -5284,6 +5276,7 @@
           <a:lstStyle/>
           <a:p>
             <a:pPr algn="ctr"/>
+            <a:endParaRPr/>
           </a:p>
         </p:txBody>
       </p:sp>
@@ -5328,7 +5321,7 @@
           </a:fontRef>
         </p:style>
         <p:txBody>
-          <a:bodyPr rtlCol="0" anchor="ctr" wrap="square"/>
+          <a:bodyPr wrap="square" rtlCol="0" anchor="ctr"/>
           <a:lstStyle/>
           <a:p>
             <a:pPr algn="ctr"/>
@@ -5368,8 +5361,8 @@
         </p:nvSpPr>
         <p:spPr>
           <a:xfrm>
-            <a:off x="5532120" y="685800"/>
-            <a:ext cx="6110935" cy="1371600"/>
+            <a:off x="5486400" y="1016732"/>
+            <a:ext cx="6110935" cy="830356"/>
           </a:xfrm>
           <a:prstGeom prst="rect">
             <a:avLst/>
@@ -5394,7 +5387,7 @@
               </a:spcAft>
             </a:pPr>
             <a:r>
-              <a:rPr sz="1200" b="1" i="0">
+              <a:rPr sz="1200" b="1" i="0" dirty="0">
                 <a:solidFill>
                   <a:srgbClr val="5A6478"/>
                 </a:solidFill>
@@ -5416,15 +5409,29 @@
               </a:spcAft>
             </a:pPr>
             <a:r>
-              <a:rPr sz="3000" b="1" i="0">
+              <a:rPr sz="3000" b="1" i="0" dirty="0">
                 <a:solidFill>
                   <a:srgbClr val="1F4E79"/>
                 </a:solidFill>
                 <a:latin typeface="Calibri"/>
               </a:rPr>
-              <a:t>Three things I'd
-stand behind</a:t>
-            </a:r>
+              <a:t>Three </a:t>
+            </a:r>
+            <a:r>
+              <a:rPr lang="en-US" sz="3000" b="1" i="0" dirty="0">
+                <a:solidFill>
+                  <a:srgbClr val="1F4E79"/>
+                </a:solidFill>
+                <a:latin typeface="Calibri"/>
+              </a:rPr>
+              <a:t>Key Insights</a:t>
+            </a:r>
+            <a:endParaRPr sz="3000" b="1" i="0" dirty="0">
+              <a:solidFill>
+                <a:srgbClr val="1F4E79"/>
+              </a:solidFill>
+              <a:latin typeface="Calibri"/>
+            </a:endParaRPr>
           </a:p>
         </p:txBody>
       </p:sp>
@@ -5469,6 +5476,7 @@
           <a:lstStyle/>
           <a:p>
             <a:pPr algn="ctr"/>
+            <a:endParaRPr/>
           </a:p>
         </p:txBody>
       </p:sp>
@@ -5636,7 +5644,7 @@
 </file>
 
 <file path=ppt/slides/slide5.xml><?xml version="1.0" encoding="utf-8"?>
-<p:sld xmlns:a="http://schemas.openxmlformats.org/drawingml/2006/main" xmlns:p="http://schemas.openxmlformats.org/presentationml/2006/main" xmlns:r="http://schemas.openxmlformats.org/officeDocument/2006/relationships">
+<p:sld xmlns:a="http://schemas.openxmlformats.org/drawingml/2006/main" xmlns:r="http://schemas.openxmlformats.org/officeDocument/2006/relationships" xmlns:p="http://schemas.openxmlformats.org/presentationml/2006/main">
   <p:cSld>
     <p:spTree>
       <p:nvGrpSpPr>
@@ -5644,7 +5652,14 @@
         <p:cNvGrpSpPr/>
         <p:nvPr/>
       </p:nvGrpSpPr>
-      <p:grpSpPr/>
+      <p:grpSpPr>
+        <a:xfrm>
+          <a:off x="0" y="0"/>
+          <a:ext cx="0" cy="0"/>
+          <a:chOff x="0" y="0"/>
+          <a:chExt cx="0" cy="0"/>
+        </a:xfrm>
+      </p:grpSpPr>
       <p:sp>
         <p:nvSpPr>
           <p:cNvPr id="2" name="Rectangle 1"/>
@@ -5686,6 +5701,7 @@
           <a:lstStyle/>
           <a:p>
             <a:pPr algn="ctr"/>
+            <a:endParaRPr/>
           </a:p>
         </p:txBody>
       </p:sp>
@@ -5730,7 +5746,7 @@
           </a:fontRef>
         </p:style>
         <p:txBody>
-          <a:bodyPr rtlCol="0" anchor="ctr" wrap="square"/>
+          <a:bodyPr wrap="square" rtlCol="0" anchor="ctr"/>
           <a:lstStyle/>
           <a:p>
             <a:pPr algn="ctr"/>
@@ -5770,8 +5786,8 @@
         </p:nvSpPr>
         <p:spPr>
           <a:xfrm>
-            <a:off x="5532120" y="685800"/>
-            <a:ext cx="6110935" cy="1371600"/>
+            <a:off x="5486400" y="1006092"/>
+            <a:ext cx="6110935" cy="830356"/>
           </a:xfrm>
           <a:prstGeom prst="rect">
             <a:avLst/>
@@ -5796,7 +5812,7 @@
               </a:spcAft>
             </a:pPr>
             <a:r>
-              <a:rPr sz="1200" b="1" i="0">
+              <a:rPr sz="1200" b="1" i="0" dirty="0">
                 <a:solidFill>
                   <a:srgbClr val="5A6478"/>
                 </a:solidFill>
@@ -5818,15 +5834,29 @@
               </a:spcAft>
             </a:pPr>
             <a:r>
-              <a:rPr sz="3000" b="1" i="0">
+              <a:rPr sz="3000" b="1" i="0" dirty="0">
                 <a:solidFill>
                   <a:srgbClr val="A8322D"/>
                 </a:solidFill>
                 <a:latin typeface="Calibri"/>
               </a:rPr>
-              <a:t>Three limits,
-and they are real</a:t>
-            </a:r>
+              <a:t>Three </a:t>
+            </a:r>
+            <a:r>
+              <a:rPr lang="en-US" sz="3000" b="1" i="0" dirty="0">
+                <a:solidFill>
+                  <a:srgbClr val="A8322D"/>
+                </a:solidFill>
+                <a:latin typeface="Calibri"/>
+              </a:rPr>
+              <a:t>Key Limitations </a:t>
+            </a:r>
+            <a:endParaRPr sz="3000" b="1" i="0" dirty="0">
+              <a:solidFill>
+                <a:srgbClr val="A8322D"/>
+              </a:solidFill>
+              <a:latin typeface="Calibri"/>
+            </a:endParaRPr>
           </a:p>
         </p:txBody>
       </p:sp>
@@ -5871,6 +5901,7 @@
           <a:lstStyle/>
           <a:p>
             <a:pPr algn="ctr"/>
+            <a:endParaRPr/>
           </a:p>
         </p:txBody>
       </p:sp>
@@ -6038,7 +6069,7 @@
 </file>
 
 <file path=ppt/slides/slide6.xml><?xml version="1.0" encoding="utf-8"?>
-<p:sld xmlns:a="http://schemas.openxmlformats.org/drawingml/2006/main" xmlns:p="http://schemas.openxmlformats.org/presentationml/2006/main" xmlns:r="http://schemas.openxmlformats.org/officeDocument/2006/relationships">
+<p:sld xmlns:a="http://schemas.openxmlformats.org/drawingml/2006/main" xmlns:r="http://schemas.openxmlformats.org/officeDocument/2006/relationships" xmlns:p="http://schemas.openxmlformats.org/presentationml/2006/main">
   <p:cSld>
     <p:spTree>
       <p:nvGrpSpPr>
@@ -6046,7 +6077,14 @@
         <p:cNvGrpSpPr/>
         <p:nvPr/>
       </p:nvGrpSpPr>
-      <p:grpSpPr/>
+      <p:grpSpPr>
+        <a:xfrm>
+          <a:off x="0" y="0"/>
+          <a:ext cx="0" cy="0"/>
+          <a:chOff x="0" y="0"/>
+          <a:chExt cx="0" cy="0"/>
+        </a:xfrm>
+      </p:grpSpPr>
       <p:sp>
         <p:nvSpPr>
           <p:cNvPr id="2" name="Rectangle 1"/>
@@ -6088,6 +6126,7 @@
           <a:lstStyle/>
           <a:p>
             <a:pPr algn="ctr"/>
+            <a:endParaRPr/>
           </a:p>
         </p:txBody>
       </p:sp>
@@ -6132,7 +6171,7 @@
           </a:fontRef>
         </p:style>
         <p:txBody>
-          <a:bodyPr rtlCol="0" anchor="ctr" wrap="square"/>
+          <a:bodyPr wrap="square" rtlCol="0" anchor="ctr"/>
           <a:lstStyle/>
           <a:p>
             <a:pPr algn="ctr"/>
@@ -6198,7 +6237,7 @@
               </a:spcAft>
             </a:pPr>
             <a:r>
-              <a:rPr sz="1200" b="1" i="0">
+              <a:rPr sz="1200" b="1" i="0" dirty="0">
                 <a:solidFill>
                   <a:srgbClr val="5A6478"/>
                 </a:solidFill>
@@ -6220,7 +6259,7 @@
               </a:spcAft>
             </a:pPr>
             <a:r>
-              <a:rPr sz="3000" b="1" i="0">
+              <a:rPr sz="3000" b="1" i="0" dirty="0">
                 <a:solidFill>
                   <a:srgbClr val="1F4E79"/>
                 </a:solidFill>
@@ -6273,6 +6312,7 @@
           <a:lstStyle/>
           <a:p>
             <a:pPr algn="ctr"/>
+            <a:endParaRPr/>
           </a:p>
         </p:txBody>
       </p:sp>
@@ -6285,7 +6325,7 @@
         <p:spPr>
           <a:xfrm>
             <a:off x="5532120" y="2121408"/>
-            <a:ext cx="6110935" cy="4114800"/>
+            <a:ext cx="6110935" cy="3051541"/>
           </a:xfrm>
           <a:prstGeom prst="rect">
             <a:avLst/>
@@ -6310,13 +6350,49 @@
               </a:spcAft>
             </a:pPr>
             <a:r>
-              <a:rPr sz="1900" b="1" i="0">
+              <a:rPr sz="1900" b="1" i="0" dirty="0">
                 <a:solidFill>
                   <a:srgbClr val="141B2D"/>
                 </a:solidFill>
                 <a:latin typeface="Calibri"/>
               </a:rPr>
-              <a:t>Claude, via Claude Code, heavily and throughout.</a:t>
+              <a:t>Claude, via Claude Code</a:t>
+            </a:r>
+            <a:r>
+              <a:rPr lang="en-US" sz="1900" b="1" dirty="0">
+                <a:solidFill>
+                  <a:srgbClr val="141B2D"/>
+                </a:solidFill>
+                <a:latin typeface="Calibri"/>
+              </a:rPr>
+              <a:t> </a:t>
+            </a:r>
+            <a:r>
+              <a:rPr sz="1900" b="1" i="0" dirty="0">
+                <a:solidFill>
+                  <a:srgbClr val="141B2D"/>
+                </a:solidFill>
+                <a:latin typeface="Calibri"/>
+              </a:rPr>
+              <a:t>throughout</a:t>
+            </a:r>
+            <a:r>
+              <a:rPr lang="en-US" sz="1900" b="1" i="0" dirty="0">
+                <a:solidFill>
+                  <a:srgbClr val="141B2D"/>
+                </a:solidFill>
+                <a:latin typeface="Calibri"/>
+              </a:rPr>
+              <a:t> the whole project</a:t>
+            </a:r>
+            <a:r>
+              <a:rPr sz="1900" b="1" i="0" dirty="0">
+                <a:solidFill>
+                  <a:srgbClr val="141B2D"/>
+                </a:solidFill>
+                <a:latin typeface="Calibri"/>
+              </a:rPr>
+              <a:t>.</a:t>
             </a:r>
           </a:p>
           <a:p>
@@ -6332,7 +6408,7 @@
               </a:spcAft>
             </a:pPr>
             <a:r>
-              <a:rPr sz="1500" b="0" i="0">
+              <a:rPr sz="1500" b="0" i="0" dirty="0">
                 <a:solidFill>
                   <a:srgbClr val="5A6478"/>
                 </a:solidFill>
@@ -6340,6 +6416,12 @@
               </a:rPr>
               <a:t>Code written and debugged, result sentences pulled from the filings for me to read, commentary drafted and then rewritten. Full logs submitted.</a:t>
             </a:r>
+            <a:endParaRPr lang="en-US" sz="1500" b="0" i="0" dirty="0">
+              <a:solidFill>
+                <a:srgbClr val="5A6478"/>
+              </a:solidFill>
+              <a:latin typeface="Calibri"/>
+            </a:endParaRPr>
           </a:p>
           <a:p>
             <a:pPr>
@@ -6354,7 +6436,7 @@
               </a:spcAft>
             </a:pPr>
             <a:r>
-              <a:rPr sz="1900" b="1" i="0">
+              <a:rPr lang="en-US" sz="1900" b="1" i="0" dirty="0">
                 <a:solidFill>
                   <a:srgbClr val="141B2D"/>
                 </a:solidFill>
@@ -6376,7 +6458,7 @@
               </a:spcAft>
             </a:pPr>
             <a:r>
-              <a:rPr sz="1500" b="0" i="0">
+              <a:rPr lang="en-US" sz="1500" b="0" i="0" dirty="0">
                 <a:solidFill>
                   <a:srgbClr val="5A6478"/>
                 </a:solidFill>
@@ -6398,7 +6480,7 @@
               </a:spcAft>
             </a:pPr>
             <a:r>
-              <a:rPr sz="1900" b="1" i="0">
+              <a:rPr lang="en-US" sz="1900" b="1" i="0" dirty="0">
                 <a:solidFill>
                   <a:srgbClr val="141B2D"/>
                 </a:solidFill>
@@ -6420,7 +6502,7 @@
               </a:spcAft>
             </a:pPr>
             <a:r>
-              <a:rPr sz="1500" b="0" i="0">
+              <a:rPr lang="en-US" sz="1500" b="0" i="0" dirty="0">
                 <a:solidFill>
                   <a:srgbClr val="5A6478"/>
                 </a:solidFill>
@@ -6440,7 +6522,7 @@
 </file>
 
 <file path=ppt/slides/slide7.xml><?xml version="1.0" encoding="utf-8"?>
-<p:sld xmlns:a="http://schemas.openxmlformats.org/drawingml/2006/main" xmlns:p="http://schemas.openxmlformats.org/presentationml/2006/main" xmlns:r="http://schemas.openxmlformats.org/officeDocument/2006/relationships">
+<p:sld xmlns:a="http://schemas.openxmlformats.org/drawingml/2006/main" xmlns:r="http://schemas.openxmlformats.org/officeDocument/2006/relationships" xmlns:p="http://schemas.openxmlformats.org/presentationml/2006/main">
   <p:cSld>
     <p:spTree>
       <p:nvGrpSpPr>
@@ -6448,7 +6530,14 @@
         <p:cNvGrpSpPr/>
         <p:nvPr/>
       </p:nvGrpSpPr>
-      <p:grpSpPr/>
+      <p:grpSpPr>
+        <a:xfrm>
+          <a:off x="0" y="0"/>
+          <a:ext cx="0" cy="0"/>
+          <a:chOff x="0" y="0"/>
+          <a:chExt cx="0" cy="0"/>
+        </a:xfrm>
+      </p:grpSpPr>
       <p:sp>
         <p:nvSpPr>
           <p:cNvPr id="2" name="Rectangle 1"/>
@@ -6490,6 +6579,7 @@
           <a:lstStyle/>
           <a:p>
             <a:pPr algn="ctr"/>
+            <a:endParaRPr/>
           </a:p>
         </p:txBody>
       </p:sp>
@@ -6534,7 +6624,7 @@
           </a:fontRef>
         </p:style>
         <p:txBody>
-          <a:bodyPr rtlCol="0" anchor="ctr" wrap="square"/>
+          <a:bodyPr wrap="square" rtlCol="0" anchor="ctr"/>
           <a:lstStyle/>
           <a:p>
             <a:pPr algn="ctr"/>
@@ -6575,7 +6665,7 @@
         <p:spPr>
           <a:xfrm>
             <a:off x="5532120" y="685800"/>
-            <a:ext cx="6110935" cy="1371600"/>
+            <a:ext cx="6110935" cy="1292020"/>
           </a:xfrm>
           <a:prstGeom prst="rect">
             <a:avLst/>
@@ -6600,7 +6690,7 @@
               </a:spcAft>
             </a:pPr>
             <a:r>
-              <a:rPr sz="1200" b="1" i="0">
+              <a:rPr sz="1200" b="1" i="0" dirty="0">
                 <a:solidFill>
                   <a:srgbClr val="5A6478"/>
                 </a:solidFill>
@@ -6622,15 +6712,39 @@
               </a:spcAft>
             </a:pPr>
             <a:r>
-              <a:rPr sz="3000" b="1" i="0">
+              <a:rPr lang="en-US" sz="3000" b="1" i="0" dirty="0">
                 <a:solidFill>
                   <a:srgbClr val="1F4E79"/>
                 </a:solidFill>
                 <a:latin typeface="Calibri"/>
               </a:rPr>
-              <a:t>What I examined,
-and what it changed</a:t>
-            </a:r>
+              <a:t>How the work was created</a:t>
+            </a:r>
+            <a:r>
+              <a:rPr sz="3000" b="1" i="0" dirty="0">
+                <a:solidFill>
+                  <a:srgbClr val="1F4E79"/>
+                </a:solidFill>
+                <a:latin typeface="Calibri"/>
+              </a:rPr>
+              <a:t>,
+and </a:t>
+            </a:r>
+            <a:r>
+              <a:rPr lang="en-US" sz="3000" b="1" i="0" dirty="0">
+                <a:solidFill>
+                  <a:srgbClr val="1F4E79"/>
+                </a:solidFill>
+                <a:latin typeface="Calibri"/>
+              </a:rPr>
+              <a:t>what was examined</a:t>
+            </a:r>
+            <a:endParaRPr sz="3000" b="1" i="0" dirty="0">
+              <a:solidFill>
+                <a:srgbClr val="1F4E79"/>
+              </a:solidFill>
+              <a:latin typeface="Calibri"/>
+            </a:endParaRPr>
           </a:p>
         </p:txBody>
       </p:sp>
@@ -6675,6 +6789,7 @@
           <a:lstStyle/>
           <a:p>
             <a:pPr algn="ctr"/>
+            <a:endParaRPr/>
           </a:p>
         </p:txBody>
       </p:sp>
@@ -6687,7 +6802,7 @@
         <p:spPr>
           <a:xfrm>
             <a:off x="5532120" y="2121408"/>
-            <a:ext cx="6110935" cy="4114800"/>
+            <a:ext cx="6110935" cy="3954480"/>
           </a:xfrm>
           <a:prstGeom prst="rect">
             <a:avLst/>
@@ -6712,13 +6827,12 @@
               </a:spcAft>
             </a:pPr>
             <a:r>
-              <a:rPr sz="1800" b="1" i="0">
+              <a:rPr lang="en-US" sz="1200" b="1" dirty="0">
                 <a:solidFill>
                   <a:srgbClr val="141B2D"/>
                 </a:solidFill>
-                <a:latin typeface="Calibri"/>
-              </a:rPr>
-              <a:t>Leakage audit before anything was fitted.</a:t>
+              </a:rPr>
+              <a:t>Claude, via Claude Code throughout the whole project.</a:t>
             </a:r>
           </a:p>
           <a:p>
@@ -6734,13 +6848,12 @@
               </a:spcAft>
             </a:pPr>
             <a:r>
-              <a:rPr sz="1400" b="0" i="0">
+              <a:rPr lang="en-US" sz="1100" dirty="0">
                 <a:solidFill>
                   <a:srgbClr val="5A6478"/>
                 </a:solidFill>
-                <a:latin typeface="Calibri"/>
-              </a:rPr>
-              <a:t>R² 0.20 → 0.96 with the nine excluded columns put back.</a:t>
+              </a:rPr>
+              <a:t>Code written and debugged, result sentences pulled from the filings for me to read, commentary drafted and then rewritten. Full logs submitted.</a:t>
             </a:r>
           </a:p>
           <a:p>
@@ -6749,20 +6862,19 @@
                 <a:spcPct val="108000"/>
               </a:lnSpc>
               <a:spcBef>
-                <a:spcPts val="1200"/>
+                <a:spcPts val="1400"/>
               </a:spcBef>
               <a:spcAft>
                 <a:spcPts val="300"/>
               </a:spcAft>
             </a:pPr>
             <a:r>
-              <a:rPr sz="1800" b="1" i="0">
+              <a:rPr lang="en-US" sz="1200" b="1" dirty="0">
                 <a:solidFill>
                   <a:srgbClr val="141B2D"/>
                 </a:solidFill>
-                <a:latin typeface="Calibri"/>
-              </a:rPr>
-              <a:t>My own quality index was leaking.</a:t>
+              </a:rPr>
+              <a:t>The constraints were mine.</a:t>
             </a:r>
           </a:p>
           <a:p>
@@ -6778,14 +6890,32 @@
               </a:spcAft>
             </a:pPr>
             <a:r>
-              <a:rPr sz="1400" b="0" i="0">
+              <a:rPr lang="en-US" sz="1100" dirty="0">
                 <a:solidFill>
                   <a:srgbClr val="5A6478"/>
                 </a:solidFill>
-                <a:latin typeface="Calibri"/>
-              </a:rPr>
-              <a:t>+0.14 R², traced to one signal built from the realised return — the leakage that survives review, because the name gives nothing away.</a:t>
-            </a:r>
+              </a:rPr>
+              <a:t>No feature unobservable before the event. Announcement drafts excluded as circular. The 30 filings read against the 8-Ks are my reading.</a:t>
+            </a:r>
+          </a:p>
+          <a:p>
+            <a:pPr>
+              <a:lnSpc>
+                <a:spcPct val="112000"/>
+              </a:lnSpc>
+              <a:spcBef>
+                <a:spcPts val="0"/>
+              </a:spcBef>
+              <a:spcAft>
+                <a:spcPts val="0"/>
+              </a:spcAft>
+            </a:pPr>
+            <a:endParaRPr lang="en-US" sz="1000" b="1" i="0" dirty="0">
+              <a:solidFill>
+                <a:srgbClr val="141B2D"/>
+              </a:solidFill>
+              <a:latin typeface="Calibri"/>
+            </a:endParaRPr>
           </a:p>
           <a:p>
             <a:pPr>
@@ -6793,20 +6923,20 @@
                 <a:spcPct val="108000"/>
               </a:lnSpc>
               <a:spcBef>
-                <a:spcPts val="1200"/>
+                <a:spcPts val="0"/>
               </a:spcBef>
               <a:spcAft>
                 <a:spcPts val="300"/>
               </a:spcAft>
             </a:pPr>
             <a:r>
-              <a:rPr sz="1800" b="1" i="0">
+              <a:rPr sz="1200" b="1" i="0" dirty="0">
                 <a:solidFill>
                   <a:srgbClr val="141B2D"/>
                 </a:solidFill>
                 <a:latin typeface="Calibri"/>
               </a:rPr>
-              <a:t>Validated against honest nulls.</a:t>
+              <a:t>Leakage audit before anything was fitted.</a:t>
             </a:r>
           </a:p>
           <a:p>
@@ -6822,35 +6952,13 @@
               </a:spcAft>
             </a:pPr>
             <a:r>
-              <a:rPr sz="1400" b="0" i="0">
+              <a:rPr sz="1100" b="0" i="0" dirty="0">
                 <a:solidFill>
                   <a:srgbClr val="5A6478"/>
                 </a:solidFill>
                 <a:latin typeface="Calibri"/>
               </a:rPr>
-              <a:t>Permuted features · bootstrap by filing, not by row · forward chaining takes R² from 0.20 to 0.17 — what the pipeline can deliver.</a:t>
-            </a:r>
-          </a:p>
-          <a:p>
-            <a:pPr>
-              <a:lnSpc>
-                <a:spcPct val="108000"/>
-              </a:lnSpc>
-              <a:spcBef>
-                <a:spcPts val="1200"/>
-              </a:spcBef>
-              <a:spcAft>
-                <a:spcPts val="300"/>
-              </a:spcAft>
-            </a:pPr>
-            <a:r>
-              <a:rPr sz="1800" b="1" i="0">
-                <a:solidFill>
-                  <a:srgbClr val="141B2D"/>
-                </a:solidFill>
-                <a:latin typeface="Calibri"/>
-              </a:rPr>
-              <a:t>I corrected my own earlier claim.</a:t>
+              <a:t>R² 0.20 → 0.96 with the nine excluded columns put back.</a:t>
             </a:r>
           </a:p>
           <a:p>
@@ -6865,15 +6973,137 @@
                 <a:spcPts val="0"/>
               </a:spcAft>
             </a:pPr>
-            <a:r>
-              <a:rPr sz="1400" b="0" i="0">
+            <a:endParaRPr lang="en-US" sz="1400" dirty="0">
+              <a:solidFill>
+                <a:srgbClr val="5A6478"/>
+              </a:solidFill>
+              <a:latin typeface="Calibri"/>
+            </a:endParaRPr>
+          </a:p>
+          <a:p>
+            <a:pPr>
+              <a:lnSpc>
+                <a:spcPct val="112000"/>
+              </a:lnSpc>
+              <a:spcBef>
+                <a:spcPts val="0"/>
+              </a:spcBef>
+              <a:spcAft>
+                <a:spcPts val="0"/>
+              </a:spcAft>
+            </a:pPr>
+            <a:r>
+              <a:rPr sz="1200" b="1" i="0" dirty="0">
+                <a:solidFill>
+                  <a:srgbClr val="141B2D"/>
+                </a:solidFill>
+                <a:latin typeface="Calibri"/>
+              </a:rPr>
+              <a:t>Validated against honest nulls.</a:t>
+            </a:r>
+          </a:p>
+          <a:p>
+            <a:pPr>
+              <a:lnSpc>
+                <a:spcPct val="112000"/>
+              </a:lnSpc>
+              <a:spcBef>
+                <a:spcPts val="0"/>
+              </a:spcBef>
+              <a:spcAft>
+                <a:spcPts val="0"/>
+              </a:spcAft>
+            </a:pPr>
+            <a:r>
+              <a:rPr sz="1100" b="0" i="0" dirty="0">
                 <a:solidFill>
                   <a:srgbClr val="5A6478"/>
                 </a:solidFill>
                 <a:latin typeface="Calibri"/>
               </a:rPr>
-              <a:t>I had told the team the range width was mainly the unknown result. It is about a quarter.</a:t>
-            </a:r>
+              <a:t>Permuted features · bootstrap by filing, not by row · forward chaining takes R² from 0.20 to 0.17 — what the pipeline can deliver.</a:t>
+            </a:r>
+            <a:endParaRPr lang="en-US" sz="1100" b="0" i="0" dirty="0">
+              <a:solidFill>
+                <a:srgbClr val="5A6478"/>
+              </a:solidFill>
+              <a:latin typeface="Calibri"/>
+            </a:endParaRPr>
+          </a:p>
+          <a:p>
+            <a:pPr>
+              <a:lnSpc>
+                <a:spcPct val="112000"/>
+              </a:lnSpc>
+              <a:spcBef>
+                <a:spcPts val="0"/>
+              </a:spcBef>
+              <a:spcAft>
+                <a:spcPts val="0"/>
+              </a:spcAft>
+            </a:pPr>
+            <a:endParaRPr lang="en-AU" sz="1400" dirty="0">
+              <a:solidFill>
+                <a:srgbClr val="5A6478"/>
+              </a:solidFill>
+              <a:latin typeface="Calibri"/>
+            </a:endParaRPr>
+          </a:p>
+          <a:p>
+            <a:pPr>
+              <a:lnSpc>
+                <a:spcPct val="112000"/>
+              </a:lnSpc>
+            </a:pPr>
+            <a:r>
+              <a:rPr lang="en-US" sz="1200" b="1" dirty="0">
+                <a:solidFill>
+                  <a:srgbClr val="141B2D"/>
+                </a:solidFill>
+              </a:rPr>
+              <a:t>Manual Validation Methods </a:t>
+            </a:r>
+          </a:p>
+          <a:p>
+            <a:pPr>
+              <a:lnSpc>
+                <a:spcPct val="112000"/>
+              </a:lnSpc>
+              <a:spcBef>
+                <a:spcPts val="0"/>
+              </a:spcBef>
+              <a:spcAft>
+                <a:spcPts val="0"/>
+              </a:spcAft>
+            </a:pPr>
+            <a:r>
+              <a:rPr lang="en-AU" sz="1100" dirty="0">
+                <a:solidFill>
+                  <a:srgbClr val="5A6478"/>
+                </a:solidFill>
+                <a:latin typeface="Calibri"/>
+              </a:rPr>
+              <a:t>Validated the code cell by cell to ensure it met the requirements of the task even though it was produced by AI. Rewrote the commentary across various areas of the project. </a:t>
+            </a:r>
+          </a:p>
+          <a:p>
+            <a:pPr>
+              <a:lnSpc>
+                <a:spcPct val="112000"/>
+              </a:lnSpc>
+              <a:spcBef>
+                <a:spcPts val="0"/>
+              </a:spcBef>
+              <a:spcAft>
+                <a:spcPts val="0"/>
+              </a:spcAft>
+            </a:pPr>
+            <a:endParaRPr lang="en-AU" sz="1400" dirty="0">
+              <a:solidFill>
+                <a:srgbClr val="5A6478"/>
+              </a:solidFill>
+              <a:latin typeface="Calibri"/>
+            </a:endParaRPr>
           </a:p>
         </p:txBody>
       </p:sp>
@@ -6886,7 +7116,7 @@
 </file>
 
 <file path=ppt/slides/slide8.xml><?xml version="1.0" encoding="utf-8"?>
-<p:sld xmlns:a="http://schemas.openxmlformats.org/drawingml/2006/main" xmlns:p="http://schemas.openxmlformats.org/presentationml/2006/main" xmlns:r="http://schemas.openxmlformats.org/officeDocument/2006/relationships">
+<p:sld xmlns:a="http://schemas.openxmlformats.org/drawingml/2006/main" xmlns:r="http://schemas.openxmlformats.org/officeDocument/2006/relationships" xmlns:p="http://schemas.openxmlformats.org/presentationml/2006/main">
   <p:cSld>
     <p:spTree>
       <p:nvGrpSpPr>
@@ -6894,7 +7124,14 @@
         <p:cNvGrpSpPr/>
         <p:nvPr/>
       </p:nvGrpSpPr>
-      <p:grpSpPr/>
+      <p:grpSpPr>
+        <a:xfrm>
+          <a:off x="0" y="0"/>
+          <a:ext cx="0" cy="0"/>
+          <a:chOff x="0" y="0"/>
+          <a:chExt cx="0" cy="0"/>
+        </a:xfrm>
+      </p:grpSpPr>
       <p:sp>
         <p:nvSpPr>
           <p:cNvPr id="2" name="Rectangle 1"/>
@@ -6936,6 +7173,7 @@
           <a:lstStyle/>
           <a:p>
             <a:pPr algn="ctr"/>
+            <a:endParaRPr/>
           </a:p>
         </p:txBody>
       </p:sp>
@@ -6980,7 +7218,7 @@
           </a:fontRef>
         </p:style>
         <p:txBody>
-          <a:bodyPr rtlCol="0" anchor="ctr" wrap="square"/>
+          <a:bodyPr wrap="square" rtlCol="0" anchor="ctr"/>
           <a:lstStyle/>
           <a:p>
             <a:pPr algn="ctr"/>
@@ -7020,8 +7258,8 @@
         </p:nvSpPr>
         <p:spPr>
           <a:xfrm>
-            <a:off x="5532120" y="685800"/>
-            <a:ext cx="6110935" cy="1371600"/>
+            <a:off x="5532119" y="1247862"/>
+            <a:ext cx="6110935" cy="830356"/>
           </a:xfrm>
           <a:prstGeom prst="rect">
             <a:avLst/>
@@ -7046,7 +7284,7 @@
               </a:spcAft>
             </a:pPr>
             <a:r>
-              <a:rPr sz="1200" b="1" i="0">
+              <a:rPr sz="1200" b="1" i="0" dirty="0">
                 <a:solidFill>
                   <a:srgbClr val="5A6478"/>
                 </a:solidFill>
@@ -7054,6 +7292,21 @@
               </a:rPr>
               <a:t>MY RESPONSIBILITY UNDER PG1</a:t>
             </a:r>
+            <a:r>
+              <a:rPr lang="en-US" sz="1200" b="1" i="0" dirty="0">
+                <a:solidFill>
+                  <a:srgbClr val="5A6478"/>
+                </a:solidFill>
+                <a:latin typeface="Calibri"/>
+              </a:rPr>
+              <a:t> AND FINAL REMARKS</a:t>
+            </a:r>
+            <a:endParaRPr sz="1200" b="1" i="0" dirty="0">
+              <a:solidFill>
+                <a:srgbClr val="5A6478"/>
+              </a:solidFill>
+              <a:latin typeface="Calibri"/>
+            </a:endParaRPr>
           </a:p>
           <a:p>
             <a:pPr>
@@ -7068,15 +7321,20 @@
               </a:spcAft>
             </a:pPr>
             <a:r>
-              <a:rPr sz="3000" b="1" i="0">
+              <a:rPr lang="en-US" sz="3000" b="1" i="0" dirty="0">
                 <a:solidFill>
                   <a:srgbClr val="1F4E79"/>
                 </a:solidFill>
                 <a:latin typeface="Calibri"/>
               </a:rPr>
-              <a:t>Mine regardless of
-what drafted it first</a:t>
-            </a:r>
+              <a:t>Final Takeaways</a:t>
+            </a:r>
+            <a:endParaRPr sz="3000" b="1" i="0" dirty="0">
+              <a:solidFill>
+                <a:srgbClr val="1F4E79"/>
+              </a:solidFill>
+              <a:latin typeface="Calibri"/>
+            </a:endParaRPr>
           </a:p>
         </p:txBody>
       </p:sp>
@@ -7121,6 +7379,7 @@
           <a:lstStyle/>
           <a:p>
             <a:pPr algn="ctr"/>
+            <a:endParaRPr/>
           </a:p>
         </p:txBody>
       </p:sp>
@@ -7133,7 +7392,7 @@
         <p:spPr>
           <a:xfrm>
             <a:off x="5532120" y="2395728"/>
-            <a:ext cx="6110935" cy="3657600"/>
+            <a:ext cx="6110935" cy="3239028"/>
           </a:xfrm>
           <a:prstGeom prst="rect">
             <a:avLst/>
@@ -7158,7 +7417,7 @@
               </a:spcAft>
             </a:pPr>
             <a:r>
-              <a:rPr sz="1800" b="0" i="0">
+              <a:rPr sz="1800" b="0" i="0" dirty="0">
                 <a:solidFill>
                   <a:srgbClr val="141B2D"/>
                 </a:solidFill>
@@ -7166,6 +7425,30 @@
               </a:rPr>
               <a:t>Understand the model before relying on it. Judge whether its assumptions and methodology suit the purpose at hand.</a:t>
             </a:r>
+            <a:r>
+              <a:rPr lang="en-US" sz="1800" b="0" i="0" dirty="0">
+                <a:solidFill>
+                  <a:srgbClr val="141B2D"/>
+                </a:solidFill>
+                <a:latin typeface="Calibri"/>
+              </a:rPr>
+              <a:t> The code is all stored in GitHub in a markdown file, supported with commentary and </a:t>
+            </a:r>
+            <a:r>
+              <a:rPr lang="en-US" sz="1800" b="0" i="0">
+                <a:solidFill>
+                  <a:srgbClr val="141B2D"/>
+                </a:solidFill>
+                <a:latin typeface="Calibri"/>
+              </a:rPr>
+              <a:t>methodology documents. </a:t>
+            </a:r>
+            <a:endParaRPr sz="1800" b="0" i="0" dirty="0">
+              <a:solidFill>
+                <a:srgbClr val="141B2D"/>
+              </a:solidFill>
+              <a:latin typeface="Calibri"/>
+            </a:endParaRPr>
           </a:p>
           <a:p>
             <a:pPr>
@@ -7180,7 +7463,7 @@
               </a:spcAft>
             </a:pPr>
             <a:r>
-              <a:rPr sz="1200" b="1" i="0">
+              <a:rPr sz="1200" b="1" i="0" dirty="0">
                 <a:solidFill>
                   <a:srgbClr val="5A6478"/>
                 </a:solidFill>
@@ -7202,7 +7485,7 @@
               </a:spcAft>
             </a:pPr>
             <a:r>
-              <a:rPr sz="1700" b="0" i="0">
+              <a:rPr sz="1700" b="0" i="0" dirty="0">
                 <a:solidFill>
                   <a:srgbClr val="141B2D"/>
                 </a:solidFill>
@@ -7224,7 +7507,7 @@
               </a:spcAft>
             </a:pPr>
             <a:r>
-              <a:rPr sz="1700" b="0" i="0">
+              <a:rPr sz="1700" b="0" i="0" dirty="0">
                 <a:solidFill>
                   <a:srgbClr val="141B2D"/>
                 </a:solidFill>
@@ -7574,44 +7857,44 @@
         <a:sysClr val="window" lastClr="FFFFFF"/>
       </a:lt1>
       <a:dk2>
-        <a:srgbClr val="1F497D"/>
+        <a:srgbClr val="0E2841"/>
       </a:dk2>
       <a:lt2>
-        <a:srgbClr val="EEECE1"/>
+        <a:srgbClr val="E8E8E8"/>
       </a:lt2>
       <a:accent1>
-        <a:srgbClr val="4F81BD"/>
+        <a:srgbClr val="156082"/>
       </a:accent1>
       <a:accent2>
-        <a:srgbClr val="C0504D"/>
+        <a:srgbClr val="E97132"/>
       </a:accent2>
       <a:accent3>
-        <a:srgbClr val="9BBB59"/>
+        <a:srgbClr val="196B24"/>
       </a:accent3>
       <a:accent4>
-        <a:srgbClr val="8064A2"/>
+        <a:srgbClr val="0F9ED5"/>
       </a:accent4>
       <a:accent5>
-        <a:srgbClr val="4BACC6"/>
+        <a:srgbClr val="A02B93"/>
       </a:accent5>
       <a:accent6>
-        <a:srgbClr val="F79646"/>
+        <a:srgbClr val="4EA72E"/>
       </a:accent6>
       <a:hlink>
-        <a:srgbClr val="0000FF"/>
+        <a:srgbClr val="467886"/>
       </a:hlink>
       <a:folHlink>
-        <a:srgbClr val="800080"/>
+        <a:srgbClr val="96607D"/>
       </a:folHlink>
     </a:clrScheme>
     <a:fontScheme name="Office">
       <a:majorFont>
-        <a:latin typeface="Calibri"/>
+        <a:latin typeface="Aptos Display" panose="02110004020202020204"/>
         <a:ea typeface=""/>
         <a:cs typeface=""/>
-        <a:font script="Jpan" typeface="ＭＳ Ｐゴシック"/>
+        <a:font script="Jpan" typeface="游ゴシック Light"/>
         <a:font script="Hang" typeface="맑은 고딕"/>
-        <a:font script="Hans" typeface="宋体"/>
+        <a:font script="Hans" typeface="等线 Light"/>
         <a:font script="Hant" typeface="新細明體"/>
         <a:font script="Arab" typeface="Times New Roman"/>
         <a:font script="Hebr" typeface="Times New Roman"/>
@@ -7639,14 +7922,31 @@
         <a:font script="Viet" typeface="Times New Roman"/>
         <a:font script="Uigh" typeface="Microsoft Uighur"/>
         <a:font script="Geor" typeface="Sylfaen"/>
+        <a:font script="Armn" typeface="Arial"/>
+        <a:font script="Bugi" typeface="Leelawadee UI"/>
+        <a:font script="Bopo" typeface="Microsoft JhengHei"/>
+        <a:font script="Java" typeface="Javanese Text"/>
+        <a:font script="Lisu" typeface="Segoe UI"/>
+        <a:font script="Mymr" typeface="Myanmar Text"/>
+        <a:font script="Nkoo" typeface="Ebrima"/>
+        <a:font script="Olck" typeface="Nirmala UI"/>
+        <a:font script="Osma" typeface="Ebrima"/>
+        <a:font script="Phag" typeface="Phagspa"/>
+        <a:font script="Syrn" typeface="Estrangelo Edessa"/>
+        <a:font script="Syrj" typeface="Estrangelo Edessa"/>
+        <a:font script="Syre" typeface="Estrangelo Edessa"/>
+        <a:font script="Sora" typeface="Nirmala UI"/>
+        <a:font script="Tale" typeface="Microsoft Tai Le"/>
+        <a:font script="Talu" typeface="Microsoft New Tai Lue"/>
+        <a:font script="Tfng" typeface="Ebrima"/>
       </a:majorFont>
       <a:minorFont>
-        <a:latin typeface="Calibri"/>
+        <a:latin typeface="Aptos" panose="02110004020202020204"/>
         <a:ea typeface=""/>
         <a:cs typeface=""/>
-        <a:font script="Jpan" typeface="ＭＳ Ｐゴシック"/>
+        <a:font script="Jpan" typeface="游ゴシック"/>
         <a:font script="Hang" typeface="맑은 고딕"/>
-        <a:font script="Hans" typeface="宋体"/>
+        <a:font script="Hans" typeface="等线"/>
         <a:font script="Hant" typeface="新細明體"/>
         <a:font script="Arab" typeface="Arial"/>
         <a:font script="Hebr" typeface="Arial"/>
@@ -7674,6 +7974,23 @@
         <a:font script="Viet" typeface="Arial"/>
         <a:font script="Uigh" typeface="Microsoft Uighur"/>
         <a:font script="Geor" typeface="Sylfaen"/>
+        <a:font script="Armn" typeface="Arial"/>
+        <a:font script="Bugi" typeface="Leelawadee UI"/>
+        <a:font script="Bopo" typeface="Microsoft JhengHei"/>
+        <a:font script="Java" typeface="Javanese Text"/>
+        <a:font script="Lisu" typeface="Segoe UI"/>
+        <a:font script="Mymr" typeface="Myanmar Text"/>
+        <a:font script="Nkoo" typeface="Ebrima"/>
+        <a:font script="Olck" typeface="Nirmala UI"/>
+        <a:font script="Osma" typeface="Ebrima"/>
+        <a:font script="Phag" typeface="Phagspa"/>
+        <a:font script="Syrn" typeface="Estrangelo Edessa"/>
+        <a:font script="Syrj" typeface="Estrangelo Edessa"/>
+        <a:font script="Syre" typeface="Estrangelo Edessa"/>
+        <a:font script="Sora" typeface="Nirmala UI"/>
+        <a:font script="Tale" typeface="Microsoft Tai Le"/>
+        <a:font script="Talu" typeface="Microsoft New Tai Lue"/>
+        <a:font script="Tfng" typeface="Ebrima"/>
       </a:minorFont>
     </a:fontScheme>
     <a:fmtScheme name="Office">
@@ -7685,180 +8002,136 @@
           <a:gsLst>
             <a:gs pos="0">
               <a:schemeClr val="phClr">
-                <a:tint val="50000"/>
-                <a:satMod val="300000"/>
+                <a:lumMod val="110000"/>
+                <a:satMod val="105000"/>
+                <a:tint val="67000"/>
               </a:schemeClr>
             </a:gs>
-            <a:gs pos="35000">
+            <a:gs pos="50000">
               <a:schemeClr val="phClr">
-                <a:tint val="37000"/>
-                <a:satMod val="300000"/>
+                <a:lumMod val="105000"/>
+                <a:satMod val="103000"/>
+                <a:tint val="73000"/>
               </a:schemeClr>
             </a:gs>
             <a:gs pos="100000">
               <a:schemeClr val="phClr">
-                <a:tint val="15000"/>
-                <a:satMod val="350000"/>
+                <a:lumMod val="105000"/>
+                <a:satMod val="109000"/>
+                <a:tint val="81000"/>
               </a:schemeClr>
             </a:gs>
           </a:gsLst>
-          <a:lin ang="16200000" scaled="1"/>
+          <a:lin ang="5400000" scaled="0"/>
         </a:gradFill>
         <a:gradFill rotWithShape="1">
           <a:gsLst>
             <a:gs pos="0">
               <a:schemeClr val="phClr">
-                <a:tint val="100000"/>
+                <a:satMod val="103000"/>
+                <a:lumMod val="102000"/>
+                <a:tint val="94000"/>
+              </a:schemeClr>
+            </a:gs>
+            <a:gs pos="50000">
+              <a:schemeClr val="phClr">
+                <a:satMod val="110000"/>
+                <a:lumMod val="100000"/>
                 <a:shade val="100000"/>
-                <a:satMod val="130000"/>
               </a:schemeClr>
             </a:gs>
             <a:gs pos="100000">
               <a:schemeClr val="phClr">
-                <a:tint val="50000"/>
-                <a:shade val="100000"/>
-                <a:satMod val="350000"/>
+                <a:lumMod val="99000"/>
+                <a:satMod val="120000"/>
+                <a:shade val="78000"/>
               </a:schemeClr>
             </a:gs>
           </a:gsLst>
-          <a:lin ang="16200000" scaled="0"/>
+          <a:lin ang="5400000" scaled="0"/>
         </a:gradFill>
       </a:fillStyleLst>
       <a:lnStyleLst>
-        <a:ln w="9525" cap="flat" cmpd="sng" algn="ctr">
+        <a:ln w="12700" cap="flat" cmpd="sng" algn="ctr">
           <a:solidFill>
-            <a:schemeClr val="phClr">
-              <a:shade val="95000"/>
-              <a:satMod val="105000"/>
-            </a:schemeClr>
+            <a:schemeClr val="phClr"/>
           </a:solidFill>
           <a:prstDash val="solid"/>
+          <a:miter lim="800000"/>
+        </a:ln>
+        <a:ln w="19050" cap="flat" cmpd="sng" algn="ctr">
+          <a:solidFill>
+            <a:schemeClr val="phClr"/>
+          </a:solidFill>
+          <a:prstDash val="solid"/>
+          <a:miter lim="800000"/>
         </a:ln>
         <a:ln w="25400" cap="flat" cmpd="sng" algn="ctr">
           <a:solidFill>
             <a:schemeClr val="phClr"/>
           </a:solidFill>
           <a:prstDash val="solid"/>
-        </a:ln>
-        <a:ln w="38100" cap="flat" cmpd="sng" algn="ctr">
-          <a:solidFill>
-            <a:schemeClr val="phClr"/>
-          </a:solidFill>
-          <a:prstDash val="solid"/>
+          <a:miter lim="800000"/>
         </a:ln>
       </a:lnStyleLst>
       <a:effectStyleLst>
         <a:effectStyle>
+          <a:effectLst/>
+        </a:effectStyle>
+        <a:effectStyle>
+          <a:effectLst/>
+        </a:effectStyle>
+        <a:effectStyle>
           <a:effectLst>
-            <a:outerShdw blurRad="40000" dist="20000" dir="5400000" rotWithShape="0">
+            <a:outerShdw blurRad="57150" dist="19050" dir="5400000" algn="ctr" rotWithShape="0">
               <a:srgbClr val="000000">
-                <a:alpha val="38000"/>
+                <a:alpha val="63000"/>
               </a:srgbClr>
             </a:outerShdw>
           </a:effectLst>
-        </a:effectStyle>
-        <a:effectStyle>
-          <a:effectLst>
-            <a:outerShdw blurRad="40000" dist="23000" dir="5400000" rotWithShape="0">
-              <a:srgbClr val="000000">
-                <a:alpha val="35000"/>
-              </a:srgbClr>
-            </a:outerShdw>
-          </a:effectLst>
-        </a:effectStyle>
-        <a:effectStyle>
-          <a:effectLst>
-            <a:outerShdw blurRad="40000" dist="23000" dir="5400000" rotWithShape="0">
-              <a:srgbClr val="000000">
-                <a:alpha val="35000"/>
-              </a:srgbClr>
-            </a:outerShdw>
-          </a:effectLst>
-          <a:scene3d>
-            <a:camera prst="orthographicFront">
-              <a:rot lat="0" lon="0" rev="0"/>
-            </a:camera>
-            <a:lightRig rig="threePt" dir="t">
-              <a:rot lat="0" lon="0" rev="1200000"/>
-            </a:lightRig>
-          </a:scene3d>
-          <a:sp3d>
-            <a:bevelT w="63500" h="25400"/>
-          </a:sp3d>
         </a:effectStyle>
       </a:effectStyleLst>
       <a:bgFillStyleLst>
         <a:solidFill>
           <a:schemeClr val="phClr"/>
         </a:solidFill>
+        <a:solidFill>
+          <a:schemeClr val="phClr">
+            <a:tint val="95000"/>
+            <a:satMod val="170000"/>
+          </a:schemeClr>
+        </a:solidFill>
         <a:gradFill rotWithShape="1">
           <a:gsLst>
             <a:gs pos="0">
               <a:schemeClr val="phClr">
-                <a:tint val="40000"/>
-                <a:satMod val="350000"/>
+                <a:tint val="93000"/>
+                <a:satMod val="150000"/>
+                <a:shade val="98000"/>
+                <a:lumMod val="102000"/>
               </a:schemeClr>
             </a:gs>
-            <a:gs pos="40000">
+            <a:gs pos="50000">
               <a:schemeClr val="phClr">
-                <a:tint val="45000"/>
-                <a:shade val="99000"/>
-                <a:satMod val="350000"/>
+                <a:tint val="98000"/>
+                <a:satMod val="130000"/>
+                <a:shade val="90000"/>
+                <a:lumMod val="103000"/>
               </a:schemeClr>
             </a:gs>
             <a:gs pos="100000">
               <a:schemeClr val="phClr">
-                <a:shade val="20000"/>
-                <a:satMod val="255000"/>
+                <a:shade val="63000"/>
+                <a:satMod val="120000"/>
               </a:schemeClr>
             </a:gs>
           </a:gsLst>
-          <a:path path="circle">
-            <a:fillToRect l="50000" t="-80000" r="50000" b="180000"/>
-          </a:path>
-        </a:gradFill>
-        <a:gradFill rotWithShape="1">
-          <a:gsLst>
-            <a:gs pos="0">
-              <a:schemeClr val="phClr">
-                <a:tint val="80000"/>
-                <a:satMod val="300000"/>
-              </a:schemeClr>
-            </a:gs>
-            <a:gs pos="100000">
-              <a:schemeClr val="phClr">
-                <a:shade val="30000"/>
-                <a:satMod val="200000"/>
-              </a:schemeClr>
-            </a:gs>
-          </a:gsLst>
-          <a:path path="circle">
-            <a:fillToRect l="50000" t="50000" r="50000" b="50000"/>
-          </a:path>
+          <a:lin ang="5400000" scaled="0"/>
         </a:gradFill>
       </a:bgFillStyleLst>
     </a:fmtScheme>
   </a:themeElements>
   <a:objectDefaults>
-    <a:spDef>
-      <a:spPr/>
-      <a:bodyPr/>
-      <a:lstStyle/>
-      <a:style>
-        <a:lnRef idx="1">
-          <a:schemeClr val="accent1"/>
-        </a:lnRef>
-        <a:fillRef idx="3">
-          <a:schemeClr val="accent1"/>
-        </a:fillRef>
-        <a:effectRef idx="2">
-          <a:schemeClr val="accent1"/>
-        </a:effectRef>
-        <a:fontRef idx="minor">
-          <a:schemeClr val="lt1"/>
-        </a:fontRef>
-      </a:style>
-    </a:spDef>
     <a:lnDef>
       <a:spPr/>
       <a:bodyPr/>
@@ -7880,5 +8153,10 @@
     </a:lnDef>
   </a:objectDefaults>
   <a:extraClrSchemeLst/>
+  <a:extLst>
+    <a:ext uri="{05A4C25C-085E-4340-85A3-A5531E510DB2}">
+      <thm15:themeFamily xmlns:thm15="http://schemas.microsoft.com/office/thememl/2012/main" name="Office Theme" id="{2E142A2C-CD16-42D6-873A-C26D2A0506FA}" vid="{1BDDFF52-6CD6-40A5-AB3C-68EB2F1E4D0A}"/>
+    </a:ext>
+  </a:extLst>
 </a:theme>
 </file>
--- a/q5_video/Q5_handover_deck.pptx
+++ b/q5_video/Q5_handover_deck.pptx
@@ -4152,31 +4152,40 @@
               </a:spcAft>
             </a:pPr>
             <a:r>
+              <a:rPr sz="1700" b="0" i="0">
+                <a:solidFill>
+                  <a:srgbClr val="141B2D"/>
+                </a:solidFill>
+                <a:latin typeface="Calibri"/>
+              </a:rPr>
+              <a:t>Estimating </a:t>
+            </a:r>
+            <a:r>
+              <a:rPr lang="en-US" sz="1700">
+                <a:solidFill>
+                  <a:srgbClr val="141B2D"/>
+                </a:solidFill>
+                <a:latin typeface="Calibri"/>
+              </a:rPr>
+              <a:t>m</a:t>
+            </a:r>
+            <a:r>
+              <a:rPr sz="1700" b="0" i="0">
+                <a:solidFill>
+                  <a:srgbClr val="141B2D"/>
+                </a:solidFill>
+                <a:latin typeface="Calibri"/>
+              </a:rPr>
+              <a:t>arket </a:t>
+            </a:r>
+            <a:r>
               <a:rPr sz="1700" b="0" i="0" dirty="0">
                 <a:solidFill>
                   <a:srgbClr val="141B2D"/>
                 </a:solidFill>
                 <a:latin typeface="Calibri"/>
               </a:rPr>
-              <a:t>Estimating </a:t>
-            </a:r>
-            <a:r>
-              <a:rPr sz="1700" b="0" i="0" dirty="0" err="1">
-                <a:solidFill>
-                  <a:srgbClr val="141B2D"/>
-                </a:solidFill>
-                <a:latin typeface="Calibri"/>
-              </a:rPr>
-              <a:t>arket</a:t>
-            </a:r>
-            <a:r>
-              <a:rPr sz="1700" b="0" i="0" dirty="0">
-                <a:solidFill>
-                  <a:srgbClr val="141B2D"/>
-                </a:solidFill>
-                <a:latin typeface="Calibri"/>
-              </a:rPr>
-              <a:t> reactions to the ASC-101, ASC-204 and ASC-370</a:t>
+              <a:t>reactions to the ASC-101, ASC-204 and ASC-370</a:t>
             </a:r>
           </a:p>
         </p:txBody>

--- a/q5_video/Q5_handover_deck.pptx
+++ b/q5_video/Q5_handover_deck.pptx
@@ -6495,7 +6495,7 @@
                 </a:solidFill>
                 <a:latin typeface="Calibri"/>
               </a:rPr>
-              <a:t>And I corrected it.</a:t>
+              <a:t>I made judgment calls. </a:t>
             </a:r>
           </a:p>
           <a:p>
@@ -6517,7 +6517,25 @@
                 </a:solidFill>
                 <a:latin typeface="Calibri"/>
               </a:rPr>
-              <a:t>It called all three mixed scenarios mixed-positive. ASC-204's misses its primary endpoint and is rescued by a subgroup — that is mixed-negative.</a:t>
+              <a:t>It called some mixed scenarios mixed-positive. Cases like ASC-204's misses its primary endpoint and is rescued by a subgroup </a:t>
+            </a:r>
+            <a:r>
+              <a:rPr lang="en-US" sz="1500" dirty="0">
+                <a:solidFill>
+                  <a:srgbClr val="5A6478"/>
+                </a:solidFill>
+                <a:latin typeface="Calibri"/>
+              </a:rPr>
+              <a:t>which is</a:t>
+            </a:r>
+            <a:r>
+              <a:rPr lang="en-US" sz="1500" b="0" i="0" dirty="0">
+                <a:solidFill>
+                  <a:srgbClr val="5A6478"/>
+                </a:solidFill>
+                <a:latin typeface="Calibri"/>
+              </a:rPr>
+              <a:t> mixed-negative.</a:t>
             </a:r>
           </a:p>
         </p:txBody>

--- a/q5_video/Q5_handover_deck.pptx
+++ b/q5_video/Q5_handover_deck.pptx
@@ -5,17 +5,16 @@
     <p:sldMasterId id="2147483648" r:id="rId1"/>
   </p:sldMasterIdLst>
   <p:notesMasterIdLst>
-    <p:notesMasterId r:id="rId10"/>
+    <p:notesMasterId r:id="rId9"/>
   </p:notesMasterIdLst>
   <p:sldIdLst>
     <p:sldId id="256" r:id="rId2"/>
     <p:sldId id="257" r:id="rId3"/>
-    <p:sldId id="258" r:id="rId4"/>
-    <p:sldId id="259" r:id="rId5"/>
-    <p:sldId id="260" r:id="rId6"/>
-    <p:sldId id="261" r:id="rId7"/>
-    <p:sldId id="262" r:id="rId8"/>
-    <p:sldId id="263" r:id="rId9"/>
+    <p:sldId id="259" r:id="rId4"/>
+    <p:sldId id="260" r:id="rId5"/>
+    <p:sldId id="261" r:id="rId6"/>
+    <p:sldId id="262" r:id="rId7"/>
+    <p:sldId id="263" r:id="rId8"/>
   </p:sldIdLst>
   <p:sldSz cx="12192000" cy="6858000"/>
   <p:notesSz cx="6858000" cy="9144000"/>
@@ -303,15 +302,25 @@
           <a:lstStyle/>
           <a:p>
             <a:r>
+              <a:rPr dirty="0"/>
               <a:t>[0:00 — ~19s]</a:t>
             </a:r>
           </a:p>
           <a:p>
-            <a:endParaRPr/>
-          </a:p>
-          <a:p>
-            <a:r>
-              <a:t>Hello. I'm handing over the analysis behind the IR team's estimates of how the market will react to our three upcoming readouts. My position: it's fit to inform those estimates, but not to produce a headline number, and it's far stronger on the downside than the upside.</a:t>
+            <a:endParaRPr dirty="0"/>
+          </a:p>
+          <a:p>
+            <a:r>
+              <a:rPr lang="en-AU" sz="1200" b="0" kern="1200" dirty="0">
+                <a:solidFill>
+                  <a:schemeClr val="tx1"/>
+                </a:solidFill>
+                <a:effectLst/>
+                <a:latin typeface="+mn-lt"/>
+                <a:ea typeface="+mn-ea"/>
+                <a:cs typeface="+mn-cs"/>
+              </a:rPr>
+              <a:t>Hello. I'm handing over the analysis behind the IR team's estimates of how the market will react to our three upcoming readouts. A quick summary is it's fit to inform those estimates, but not to produce a headline number, and it's far stronger on the downside than the upside.</a:t>
             </a:r>
           </a:p>
         </p:txBody>
@@ -381,46 +390,168 @@
           <a:lstStyle/>
           <a:p>
             <a:r>
+              <a:rPr dirty="0"/>
               <a:t>[0:19 — ~43s]</a:t>
             </a:r>
           </a:p>
           <a:p>
-            <a:endParaRPr/>
-          </a:p>
-          <a:p>
-            <a:r>
-              <a:t>Four stages.</a:t>
-            </a:r>
-          </a:p>
-          <a:p>
-            <a:endParaRPr/>
-          </a:p>
-          <a:p>
-            <a:r>
-              <a:t>I validated the LLM's outcome labels — thirty filings read by hand against the original 8-Ks, then all 2,392 directional labels checked against the price move that followed. That gave a screen scoring all 4,539 classifications, which flags forty per cent, mostly for timing rather than a wrong label.</a:t>
-            </a:r>
-          </a:p>
-          <a:p>
-            <a:endParaRPr/>
-          </a:p>
-          <a:p>
-            <a:r>
-              <a:t>I grouped 1,975 historical readouts into eight families, on disease, design, stage and sponsor, to find comparables.</a:t>
-            </a:r>
-          </a:p>
-          <a:p>
-            <a:endParaRPr/>
-          </a:p>
-          <a:p>
-            <a:r>
-              <a:t>I modelled the three-day abnormal return from trial, text and company features; it explains twenty per cent of the variation.</a:t>
-            </a:r>
-          </a:p>
-          <a:p>
-            <a:endParaRPr/>
-          </a:p>
-          <a:p>
-            <a:r>
+            <a:endParaRPr dirty="0"/>
+          </a:p>
+          <a:p>
+            <a:r>
+              <a:rPr lang="en-AU" sz="1200" b="0" kern="1200" dirty="0">
+                <a:solidFill>
+                  <a:schemeClr val="tx1"/>
+                </a:solidFill>
+                <a:effectLst/>
+                <a:latin typeface="+mn-lt"/>
+                <a:ea typeface="+mn-ea"/>
+                <a:cs typeface="+mn-cs"/>
+              </a:rPr>
+              <a:t>There are four stages for you to review, and I will go through each of the steps that I have done. Then we can move onto the findings, limitations and validations that I performed on my own work.</a:t>
+            </a:r>
+          </a:p>
+          <a:p>
+            <a:br>
+              <a:rPr lang="en-AU" sz="1200" b="0" kern="1200" dirty="0">
+                <a:solidFill>
+                  <a:schemeClr val="tx1"/>
+                </a:solidFill>
+                <a:effectLst/>
+                <a:latin typeface="+mn-lt"/>
+                <a:ea typeface="+mn-ea"/>
+                <a:cs typeface="+mn-cs"/>
+              </a:rPr>
+            </a:br>
+            <a:endParaRPr lang="en-AU" sz="1200" b="0" kern="1200" dirty="0">
+              <a:solidFill>
+                <a:schemeClr val="tx1"/>
+              </a:solidFill>
+              <a:effectLst/>
+              <a:latin typeface="+mn-lt"/>
+              <a:ea typeface="+mn-ea"/>
+              <a:cs typeface="+mn-cs"/>
+            </a:endParaRPr>
+          </a:p>
+          <a:p>
+            <a:r>
+              <a:rPr lang="en-AU" sz="1200" b="0" kern="1200" dirty="0">
+                <a:solidFill>
+                  <a:schemeClr val="tx1"/>
+                </a:solidFill>
+                <a:effectLst/>
+                <a:latin typeface="+mn-lt"/>
+                <a:ea typeface="+mn-ea"/>
+                <a:cs typeface="+mn-cs"/>
+              </a:rPr>
+              <a:t>I validated the LLM's outcome labels which I took a stratified thirty filings read by hand against the original 8-Ks, then all directional labels checked against the price move that followed. That gave a screen scoring all the classifications, which flags forty per cent, mostly for timing rather than a wrong label.</a:t>
+            </a:r>
+          </a:p>
+          <a:p>
+            <a:br>
+              <a:rPr lang="en-AU" sz="1200" b="0" kern="1200" dirty="0">
+                <a:solidFill>
+                  <a:schemeClr val="tx1"/>
+                </a:solidFill>
+                <a:effectLst/>
+                <a:latin typeface="+mn-lt"/>
+                <a:ea typeface="+mn-ea"/>
+                <a:cs typeface="+mn-cs"/>
+              </a:rPr>
+            </a:br>
+            <a:endParaRPr lang="en-AU" sz="1200" b="0" kern="1200" dirty="0">
+              <a:solidFill>
+                <a:schemeClr val="tx1"/>
+              </a:solidFill>
+              <a:effectLst/>
+              <a:latin typeface="+mn-lt"/>
+              <a:ea typeface="+mn-ea"/>
+              <a:cs typeface="+mn-cs"/>
+            </a:endParaRPr>
+          </a:p>
+          <a:p>
+            <a:r>
+              <a:rPr lang="en-AU" sz="1200" b="0" kern="1200" dirty="0">
+                <a:solidFill>
+                  <a:schemeClr val="tx1"/>
+                </a:solidFill>
+                <a:effectLst/>
+                <a:latin typeface="+mn-lt"/>
+                <a:ea typeface="+mn-ea"/>
+                <a:cs typeface="+mn-cs"/>
+              </a:rPr>
+              <a:t>I grouped the historical readouts into eight families, on disease, design, stage and sponsor, to find comparables. This was a clustering exercise and to check for our firms handouts. </a:t>
+            </a:r>
+          </a:p>
+          <a:p>
+            <a:br>
+              <a:rPr lang="en-AU" sz="1200" b="0" kern="1200" dirty="0">
+                <a:solidFill>
+                  <a:schemeClr val="tx1"/>
+                </a:solidFill>
+                <a:effectLst/>
+                <a:latin typeface="+mn-lt"/>
+                <a:ea typeface="+mn-ea"/>
+                <a:cs typeface="+mn-cs"/>
+              </a:rPr>
+            </a:br>
+            <a:endParaRPr lang="en-AU" sz="1200" b="0" kern="1200" dirty="0">
+              <a:solidFill>
+                <a:schemeClr val="tx1"/>
+              </a:solidFill>
+              <a:effectLst/>
+              <a:latin typeface="+mn-lt"/>
+              <a:ea typeface="+mn-ea"/>
+              <a:cs typeface="+mn-cs"/>
+            </a:endParaRPr>
+          </a:p>
+          <a:p>
+            <a:r>
+              <a:rPr lang="en-AU" sz="1200" b="0" kern="1200" dirty="0">
+                <a:solidFill>
+                  <a:schemeClr val="tx1"/>
+                </a:solidFill>
+                <a:effectLst/>
+                <a:latin typeface="+mn-lt"/>
+                <a:ea typeface="+mn-ea"/>
+                <a:cs typeface="+mn-cs"/>
+              </a:rPr>
+              <a:t>I modelled the three-day abnormal return from trial, text and company features. It explains twenty per cent of the variation. The models that were used are random forest, GBM and ridge regression.</a:t>
+            </a:r>
+          </a:p>
+          <a:p>
+            <a:br>
+              <a:rPr lang="en-AU" sz="1200" b="0" kern="1200" dirty="0">
+                <a:solidFill>
+                  <a:schemeClr val="tx1"/>
+                </a:solidFill>
+                <a:effectLst/>
+                <a:latin typeface="+mn-lt"/>
+                <a:ea typeface="+mn-ea"/>
+                <a:cs typeface="+mn-cs"/>
+              </a:rPr>
+            </a:br>
+            <a:endParaRPr lang="en-AU" sz="1200" b="0" kern="1200" dirty="0">
+              <a:solidFill>
+                <a:schemeClr val="tx1"/>
+              </a:solidFill>
+              <a:effectLst/>
+              <a:latin typeface="+mn-lt"/>
+              <a:ea typeface="+mn-ea"/>
+              <a:cs typeface="+mn-cs"/>
+            </a:endParaRPr>
+          </a:p>
+          <a:p>
+            <a:r>
+              <a:rPr lang="en-AU" sz="1200" b="0" kern="1200" dirty="0">
+                <a:solidFill>
+                  <a:schemeClr val="tx1"/>
+                </a:solidFill>
+                <a:effectLst/>
+                <a:latin typeface="+mn-lt"/>
+                <a:ea typeface="+mn-ea"/>
+                <a:cs typeface="+mn-cs"/>
+              </a:rPr>
               <a:t>Then I applied that to our three readouts, three scenarios each, with a monitoring plan.</a:t>
             </a:r>
           </a:p>
@@ -491,7 +622,133 @@
           <a:lstStyle/>
           <a:p>
             <a:r>
-              <a:t>No script of its own — this frame carries the verdict while you move from what you built into the evidence for it. Land on it as you say 'so, three things I'd stand behind', then advance.</a:t>
+              <a:rPr dirty="0"/>
+              <a:t>[1:02 — ~45s]</a:t>
+            </a:r>
+          </a:p>
+          <a:p>
+            <a:endParaRPr dirty="0"/>
+          </a:p>
+          <a:p>
+            <a:r>
+              <a:rPr lang="en-AU" sz="1200" b="0" kern="1200" dirty="0">
+                <a:solidFill>
+                  <a:schemeClr val="tx1"/>
+                </a:solidFill>
+                <a:effectLst/>
+                <a:latin typeface="+mn-lt"/>
+                <a:ea typeface="+mn-ea"/>
+                <a:cs typeface="+mn-cs"/>
+              </a:rPr>
+              <a:t>So, three things I have come to conclusion from the analysis.</a:t>
+            </a:r>
+          </a:p>
+          <a:p>
+            <a:br>
+              <a:rPr lang="en-AU" sz="1200" b="0" kern="1200" dirty="0">
+                <a:solidFill>
+                  <a:schemeClr val="tx1"/>
+                </a:solidFill>
+                <a:effectLst/>
+                <a:latin typeface="+mn-lt"/>
+                <a:ea typeface="+mn-ea"/>
+                <a:cs typeface="+mn-cs"/>
+              </a:rPr>
+            </a:br>
+            <a:endParaRPr lang="en-AU" sz="1200" b="0" kern="1200" dirty="0">
+              <a:solidFill>
+                <a:schemeClr val="tx1"/>
+              </a:solidFill>
+              <a:effectLst/>
+              <a:latin typeface="+mn-lt"/>
+              <a:ea typeface="+mn-ea"/>
+              <a:cs typeface="+mn-cs"/>
+            </a:endParaRPr>
+          </a:p>
+          <a:p>
+            <a:r>
+              <a:rPr lang="en-AU" sz="1200" b="0" kern="1200" dirty="0">
+                <a:solidFill>
+                  <a:schemeClr val="tx1"/>
+                </a:solidFill>
+                <a:effectLst/>
+                <a:latin typeface="+mn-lt"/>
+                <a:ea typeface="+mn-ea"/>
+                <a:cs typeface="+mn-cs"/>
+              </a:rPr>
+              <a:t>The ordering is sensible. For all three assets a negative readout is materially worse than a positive one, by eleven to twenty-seven points of central estimate, and that survives every seed.</a:t>
+            </a:r>
+          </a:p>
+          <a:p>
+            <a:br>
+              <a:rPr lang="en-AU" sz="1200" b="0" kern="1200" dirty="0">
+                <a:solidFill>
+                  <a:schemeClr val="tx1"/>
+                </a:solidFill>
+                <a:effectLst/>
+                <a:latin typeface="+mn-lt"/>
+                <a:ea typeface="+mn-ea"/>
+                <a:cs typeface="+mn-cs"/>
+              </a:rPr>
+            </a:br>
+            <a:endParaRPr lang="en-AU" sz="1200" b="0" kern="1200" dirty="0">
+              <a:solidFill>
+                <a:schemeClr val="tx1"/>
+              </a:solidFill>
+              <a:effectLst/>
+              <a:latin typeface="+mn-lt"/>
+              <a:ea typeface="+mn-ea"/>
+              <a:cs typeface="+mn-cs"/>
+            </a:endParaRPr>
+          </a:p>
+          <a:p>
+            <a:r>
+              <a:rPr lang="en-AU" sz="1200" b="0" kern="1200" dirty="0">
+                <a:solidFill>
+                  <a:schemeClr val="tx1"/>
+                </a:solidFill>
+                <a:effectLst/>
+                <a:latin typeface="+mn-lt"/>
+                <a:ea typeface="+mn-ea"/>
+                <a:cs typeface="+mn-cs"/>
+              </a:rPr>
+              <a:t>The downside for ASC-204 can be relied on. It sits in a cluster of 266 cardiovascular and renal outcome trials, 246 in the same therapeutic area, with 34 negative readouts behind it. That's the estimate I'd let the funding decision rest on.</a:t>
+            </a:r>
+          </a:p>
+          <a:p>
+            <a:br>
+              <a:rPr lang="en-AU" sz="1200" b="0" kern="1200" dirty="0">
+                <a:solidFill>
+                  <a:schemeClr val="tx1"/>
+                </a:solidFill>
+                <a:effectLst/>
+                <a:latin typeface="+mn-lt"/>
+                <a:ea typeface="+mn-ea"/>
+                <a:cs typeface="+mn-cs"/>
+              </a:rPr>
+            </a:br>
+            <a:endParaRPr lang="en-AU" sz="1200" b="0" kern="1200" dirty="0">
+              <a:solidFill>
+                <a:schemeClr val="tx1"/>
+              </a:solidFill>
+              <a:effectLst/>
+              <a:latin typeface="+mn-lt"/>
+              <a:ea typeface="+mn-ea"/>
+              <a:cs typeface="+mn-cs"/>
+            </a:endParaRPr>
+          </a:p>
+          <a:p>
+            <a:r>
+              <a:rPr lang="en-AU" sz="1200" b="0" kern="1200" dirty="0">
+                <a:solidFill>
+                  <a:schemeClr val="tx1"/>
+                </a:solidFill>
+                <a:effectLst/>
+                <a:latin typeface="+mn-lt"/>
+                <a:ea typeface="+mn-ea"/>
+                <a:cs typeface="+mn-cs"/>
+              </a:rPr>
+              <a:t>And severity ranking can also be relied on. 61 per cent of the announcements in the model's worst decile fell more than ten per cent. It sorts readouts into "could be severe" and "probably won't be", not into a number.</a:t>
             </a:r>
           </a:p>
         </p:txBody>
@@ -561,39 +818,122 @@
           <a:lstStyle/>
           <a:p>
             <a:r>
-              <a:t>[1:02 — ~45s]</a:t>
-            </a:r>
-          </a:p>
-          <a:p>
-            <a:endParaRPr/>
-          </a:p>
-          <a:p>
-            <a:r>
-              <a:t>So, three things I'd stand behind.</a:t>
-            </a:r>
-          </a:p>
-          <a:p>
-            <a:endParaRPr/>
-          </a:p>
-          <a:p>
-            <a:r>
-              <a:t>The ordering. For all three assets a negative readout is materially worse than a positive one, by eleven to twenty-seven points of central estimate, and that survives every seed.</a:t>
-            </a:r>
-          </a:p>
-          <a:p>
-            <a:endParaRPr/>
-          </a:p>
-          <a:p>
-            <a:r>
-              <a:t>The downside for ASC-204. It sits in a cluster of 266 cardiovascular and renal outcome trials, 246 in the same therapeutic area, with 34 negative readouts behind it. That's the estimate I'd let the funding decision rest on.</a:t>
-            </a:r>
-          </a:p>
-          <a:p>
-            <a:endParaRPr/>
-          </a:p>
-          <a:p>
-            <a:r>
-              <a:t>[CUT IF LONG] And severity ranking: 61 per cent of the announcements in the model's worst decile fell more than ten per cent. It sorts readouts into 'could be severe' and 'probably won't be', not into a number.</a:t>
+              <a:rPr dirty="0"/>
+              <a:t>[1:47 — ~52s]</a:t>
+            </a:r>
+          </a:p>
+          <a:p>
+            <a:endParaRPr dirty="0"/>
+          </a:p>
+          <a:p>
+            <a:r>
+              <a:rPr lang="en-AU" sz="1200" b="0" kern="1200" dirty="0">
+                <a:solidFill>
+                  <a:schemeClr val="tx1"/>
+                </a:solidFill>
+                <a:effectLst/>
+                <a:latin typeface="+mn-lt"/>
+                <a:ea typeface="+mn-ea"/>
+                <a:cs typeface="+mn-cs"/>
+              </a:rPr>
+              <a:t>Now the limitations. </a:t>
+            </a:r>
+          </a:p>
+          <a:p>
+            <a:endParaRPr lang="en-AU" sz="1200" b="0" kern="1200" dirty="0">
+              <a:solidFill>
+                <a:schemeClr val="tx1"/>
+              </a:solidFill>
+              <a:effectLst/>
+              <a:latin typeface="+mn-lt"/>
+              <a:ea typeface="+mn-ea"/>
+              <a:cs typeface="+mn-cs"/>
+            </a:endParaRPr>
+          </a:p>
+          <a:p>
+            <a:r>
+              <a:rPr lang="en-AU" sz="1200" b="0" kern="1200" dirty="0">
+                <a:solidFill>
+                  <a:schemeClr val="tx1"/>
+                </a:solidFill>
+                <a:effectLst/>
+                <a:latin typeface="+mn-lt"/>
+                <a:ea typeface="+mn-ea"/>
+                <a:cs typeface="+mn-cs"/>
+              </a:rPr>
+              <a:t>ASC-101 has effectively no comparables. The dataset holds seven hereditary angioedema readouts in total, so my method matched it to vaccine trials on design, having nothing to match on disease. That number is a Phase 3 base rate wearing a comparable set's clothes.</a:t>
+            </a:r>
+          </a:p>
+          <a:p>
+            <a:br>
+              <a:rPr lang="en-AU" sz="1200" b="0" kern="1200" dirty="0">
+                <a:solidFill>
+                  <a:schemeClr val="tx1"/>
+                </a:solidFill>
+                <a:effectLst/>
+                <a:latin typeface="+mn-lt"/>
+                <a:ea typeface="+mn-ea"/>
+                <a:cs typeface="+mn-cs"/>
+              </a:rPr>
+            </a:br>
+            <a:endParaRPr lang="en-AU" sz="1200" b="0" kern="1200" dirty="0">
+              <a:solidFill>
+                <a:schemeClr val="tx1"/>
+              </a:solidFill>
+              <a:effectLst/>
+              <a:latin typeface="+mn-lt"/>
+              <a:ea typeface="+mn-ea"/>
+              <a:cs typeface="+mn-cs"/>
+            </a:endParaRPr>
+          </a:p>
+          <a:p>
+            <a:r>
+              <a:rPr lang="en-AU" sz="1200" b="0" kern="1200" dirty="0">
+                <a:solidFill>
+                  <a:schemeClr val="tx1"/>
+                </a:solidFill>
+                <a:effectLst/>
+                <a:latin typeface="+mn-lt"/>
+                <a:ea typeface="+mn-ea"/>
+                <a:cs typeface="+mn-cs"/>
+              </a:rPr>
+              <a:t>The upside is close to unmodelled as there is only three per cent of the spread within positive readouts, and effectively nothing with the features Asclepius can supply. For an upside case, quote the historical range.</a:t>
+            </a:r>
+          </a:p>
+          <a:p>
+            <a:br>
+              <a:rPr lang="en-AU" sz="1200" b="0" kern="1200" dirty="0">
+                <a:solidFill>
+                  <a:schemeClr val="tx1"/>
+                </a:solidFill>
+                <a:effectLst/>
+                <a:latin typeface="+mn-lt"/>
+                <a:ea typeface="+mn-ea"/>
+                <a:cs typeface="+mn-cs"/>
+              </a:rPr>
+            </a:br>
+            <a:endParaRPr lang="en-AU" sz="1200" b="0" kern="1200" dirty="0">
+              <a:solidFill>
+                <a:schemeClr val="tx1"/>
+              </a:solidFill>
+              <a:effectLst/>
+              <a:latin typeface="+mn-lt"/>
+              <a:ea typeface="+mn-ea"/>
+              <a:cs typeface="+mn-cs"/>
+            </a:endParaRPr>
+          </a:p>
+          <a:p>
+            <a:r>
+              <a:rPr lang="en-AU" sz="1200" b="0" kern="1200" dirty="0">
+                <a:solidFill>
+                  <a:schemeClr val="tx1"/>
+                </a:solidFill>
+                <a:effectLst/>
+                <a:latin typeface="+mn-lt"/>
+                <a:ea typeface="+mn-ea"/>
+                <a:cs typeface="+mn-cs"/>
+              </a:rPr>
+              <a:t>And the dataset supplies no price series for Asclepius which is a gap in the data, but normally is required for analysis. Volatility is most of what let the model size a bad outcome, so the bands are about 69 points wide, and correctly so.</a:t>
             </a:r>
           </a:p>
         </p:txBody>
@@ -663,39 +1003,145 @@
           <a:lstStyle/>
           <a:p>
             <a:r>
-              <a:t>[1:47 — ~52s]</a:t>
-            </a:r>
-          </a:p>
-          <a:p>
-            <a:endParaRPr/>
-          </a:p>
-          <a:p>
-            <a:r>
-              <a:t>Now the limits, and they're real.</a:t>
-            </a:r>
-          </a:p>
-          <a:p>
-            <a:endParaRPr/>
-          </a:p>
-          <a:p>
-            <a:r>
-              <a:t>ASC-101 has effectively no comparables. The dataset holds seven hereditary angioedema readouts in total, so my method matched it to vaccine trials on design, having nothing to match on disease. That number is a Phase 3 base rate wearing a comparable set's clothes.</a:t>
-            </a:r>
-          </a:p>
-          <a:p>
-            <a:endParaRPr/>
-          </a:p>
-          <a:p>
-            <a:r>
-              <a:t>The upside is close to unmodelled — three per cent of the spread within positive readouts, and effectively nothing with the features Asclepius can supply. For an upside case, quote the historical range.</a:t>
-            </a:r>
-          </a:p>
-          <a:p>
-            <a:endParaRPr/>
-          </a:p>
-          <a:p>
-            <a:r>
-              <a:t>And the dataset supplies no price series for Asclepius — a gap in the data, not a fact about the company. Volatility is most of what let the model size a bad outcome, so the bands are about 69 points wide, and correctly so.</a:t>
+              <a:rPr dirty="0"/>
+              <a:t>[2:39 — ~47s]</a:t>
+            </a:r>
+          </a:p>
+          <a:p>
+            <a:endParaRPr dirty="0"/>
+          </a:p>
+          <a:p>
+            <a:r>
+              <a:rPr lang="en-AU" sz="1200" b="0" kern="1200" dirty="0">
+                <a:solidFill>
+                  <a:schemeClr val="tx1"/>
+                </a:solidFill>
+                <a:effectLst/>
+                <a:latin typeface="+mn-lt"/>
+                <a:ea typeface="+mn-ea"/>
+                <a:cs typeface="+mn-cs"/>
+              </a:rPr>
+              <a:t>I used Claude, through Claude Code, heavily and throughout — to write and debug the code, to surface</a:t>
+            </a:r>
+          </a:p>
+          <a:p>
+            <a:r>
+              <a:rPr lang="en-AU" sz="1200" b="0" kern="1200" dirty="0">
+                <a:solidFill>
+                  <a:schemeClr val="tx1"/>
+                </a:solidFill>
+                <a:effectLst/>
+                <a:latin typeface="+mn-lt"/>
+                <a:ea typeface="+mn-ea"/>
+                <a:cs typeface="+mn-cs"/>
+              </a:rPr>
+              <a:t>result sentences from the filings for me to read, and to draft commentary I rewrote. The full</a:t>
+            </a:r>
+          </a:p>
+          <a:p>
+            <a:r>
+              <a:rPr lang="en-AU" sz="1200" b="0" kern="1200" dirty="0">
+                <a:solidFill>
+                  <a:schemeClr val="tx1"/>
+                </a:solidFill>
+                <a:effectLst/>
+                <a:latin typeface="+mn-lt"/>
+                <a:ea typeface="+mn-ea"/>
+                <a:cs typeface="+mn-cs"/>
+              </a:rPr>
+              <a:t>conversations are in the submitted log.</a:t>
+            </a:r>
+          </a:p>
+          <a:p>
+            <a:br>
+              <a:rPr lang="en-AU" sz="1200" b="0" kern="1200" dirty="0">
+                <a:solidFill>
+                  <a:schemeClr val="tx1"/>
+                </a:solidFill>
+                <a:effectLst/>
+                <a:latin typeface="+mn-lt"/>
+                <a:ea typeface="+mn-ea"/>
+                <a:cs typeface="+mn-cs"/>
+              </a:rPr>
+            </a:br>
+            <a:endParaRPr lang="en-AU" sz="1200" b="0" kern="1200" dirty="0">
+              <a:solidFill>
+                <a:schemeClr val="tx1"/>
+              </a:solidFill>
+              <a:effectLst/>
+              <a:latin typeface="+mn-lt"/>
+              <a:ea typeface="+mn-ea"/>
+              <a:cs typeface="+mn-cs"/>
+            </a:endParaRPr>
+          </a:p>
+          <a:p>
+            <a:r>
+              <a:rPr lang="en-AU" sz="1200" b="0" kern="1200" dirty="0">
+                <a:solidFill>
+                  <a:schemeClr val="tx1"/>
+                </a:solidFill>
+                <a:effectLst/>
+                <a:latin typeface="+mn-lt"/>
+                <a:ea typeface="+mn-ea"/>
+                <a:cs typeface="+mn-cs"/>
+              </a:rPr>
+              <a:t>What I didn't delegate was the judgement. I set the constraints: no feature unobservable before the</a:t>
+            </a:r>
+          </a:p>
+          <a:p>
+            <a:r>
+              <a:rPr lang="en-AU" sz="1200" b="0" kern="1200" dirty="0">
+                <a:solidFill>
+                  <a:schemeClr val="tx1"/>
+                </a:solidFill>
+                <a:effectLst/>
+                <a:latin typeface="+mn-lt"/>
+                <a:ea typeface="+mn-ea"/>
+                <a:cs typeface="+mn-cs"/>
+              </a:rPr>
+              <a:t>event, and the announcement drafts excluded entirely, because they were written to express the</a:t>
+            </a:r>
+          </a:p>
+          <a:p>
+            <a:r>
+              <a:rPr lang="en-AU" sz="1200" b="0" kern="1200" dirty="0">
+                <a:solidFill>
+                  <a:schemeClr val="tx1"/>
+                </a:solidFill>
+                <a:effectLst/>
+                <a:latin typeface="+mn-lt"/>
+                <a:ea typeface="+mn-ea"/>
+                <a:cs typeface="+mn-cs"/>
+              </a:rPr>
+              <a:t>assumed outcome. The thirty filings are my reading, not its summary. I made some calls on whether it </a:t>
+            </a:r>
+          </a:p>
+          <a:p>
+            <a:r>
+              <a:rPr lang="en-AU" sz="1200" b="0" kern="1200" dirty="0">
+                <a:solidFill>
+                  <a:schemeClr val="tx1"/>
+                </a:solidFill>
+                <a:effectLst/>
+                <a:latin typeface="+mn-lt"/>
+                <a:ea typeface="+mn-ea"/>
+                <a:cs typeface="+mn-cs"/>
+              </a:rPr>
+              <a:t>should be mixed positive or negative. Also there were models and parameters which I decided to run </a:t>
+            </a:r>
+          </a:p>
+          <a:p>
+            <a:r>
+              <a:rPr lang="en-AU" sz="1200" b="0" kern="1200" dirty="0">
+                <a:solidFill>
+                  <a:schemeClr val="tx1"/>
+                </a:solidFill>
+                <a:effectLst/>
+                <a:latin typeface="+mn-lt"/>
+                <a:ea typeface="+mn-ea"/>
+                <a:cs typeface="+mn-cs"/>
+              </a:rPr>
+              <a:t>extra analysis on check if it was tuned properly.</a:t>
             </a:r>
           </a:p>
         </p:txBody>
@@ -765,39 +1211,133 @@
           <a:lstStyle/>
           <a:p>
             <a:r>
-              <a:t>[2:39 — ~47s]</a:t>
-            </a:r>
-          </a:p>
-          <a:p>
-            <a:endParaRPr/>
-          </a:p>
-          <a:p>
-            <a:r>
-              <a:t>I used Claude, through Claude Code, heavily and throughout — to write and debug the code, to surface result sentences from the filings for me to read, and to draft commentary I rewrote. The full conversations are in the submitted log.</a:t>
-            </a:r>
-          </a:p>
-          <a:p>
-            <a:endParaRPr/>
-          </a:p>
-          <a:p>
-            <a:r>
-              <a:t>What I didn't delegate was the judgement. I set the constraints: no feature unobservable before the event, and the announcement drafts excluded entirely, because they were written to express the assumed outcome. The thirty filings are my reading, not its summary.</a:t>
-            </a:r>
-          </a:p>
-          <a:p>
-            <a:endParaRPr/>
-          </a:p>
-          <a:p>
-            <a:r>
-              <a:t>And I corrected it. It mapped all three mixed scenarios to mixed-positive; I read the ASC-204 draft, saw a missed primary endpoint rescued by a subgroup, and moved it to mixed-negative.</a:t>
-            </a:r>
-          </a:p>
-          <a:p>
-            <a:endParaRPr/>
-          </a:p>
-          <a:p>
-            <a:r>
-              <a:t>(If asked for more: it hard-coded a cluster by number, which breaks because k-means relabels on refit; and its first ablation conflated losing the text with losing the price history, so I had it split the comparison.)</a:t>
+              <a:rPr dirty="0"/>
+              <a:t>[3:26 — ~45s]</a:t>
+            </a:r>
+          </a:p>
+          <a:p>
+            <a:endParaRPr dirty="0"/>
+          </a:p>
+          <a:p>
+            <a:r>
+              <a:rPr lang="en-AU" sz="1200" b="0" kern="1200" dirty="0">
+                <a:solidFill>
+                  <a:schemeClr val="tx1"/>
+                </a:solidFill>
+                <a:effectLst/>
+                <a:latin typeface="+mn-lt"/>
+                <a:ea typeface="+mn-ea"/>
+                <a:cs typeface="+mn-cs"/>
+              </a:rPr>
+              <a:t>On checking. I ran a leakage audit before fitting anything: with the nine excluded columns put back, R-squared goes from 0.20 to 0.96. Also tested various hyper parameters rather than just taking AI outputs.</a:t>
+            </a:r>
+          </a:p>
+          <a:p>
+            <a:br>
+              <a:rPr lang="en-AU" sz="1200" b="0" kern="1200" dirty="0">
+                <a:solidFill>
+                  <a:schemeClr val="tx1"/>
+                </a:solidFill>
+                <a:effectLst/>
+                <a:latin typeface="+mn-lt"/>
+                <a:ea typeface="+mn-ea"/>
+                <a:cs typeface="+mn-cs"/>
+              </a:rPr>
+            </a:br>
+            <a:endParaRPr lang="en-AU" sz="1200" b="0" kern="1200" dirty="0">
+              <a:solidFill>
+                <a:schemeClr val="tx1"/>
+              </a:solidFill>
+              <a:effectLst/>
+              <a:latin typeface="+mn-lt"/>
+              <a:ea typeface="+mn-ea"/>
+              <a:cs typeface="+mn-cs"/>
+            </a:endParaRPr>
+          </a:p>
+          <a:p>
+            <a:r>
+              <a:rPr lang="en-AU" sz="1200" b="0" i="1" kern="1200" dirty="0">
+                <a:solidFill>
+                  <a:schemeClr val="tx1"/>
+                </a:solidFill>
+                <a:effectLst/>
+                <a:latin typeface="+mn-lt"/>
+                <a:ea typeface="+mn-ea"/>
+                <a:cs typeface="+mn-cs"/>
+              </a:rPr>
+              <a:t>*[cut if long]*</a:t>
+            </a:r>
+            <a:r>
+              <a:rPr lang="en-AU" sz="1200" b="0" kern="1200" dirty="0">
+                <a:solidFill>
+                  <a:schemeClr val="tx1"/>
+                </a:solidFill>
+                <a:effectLst/>
+                <a:latin typeface="+mn-lt"/>
+                <a:ea typeface="+mn-ea"/>
+                <a:cs typeface="+mn-cs"/>
+              </a:rPr>
+              <a:t> I validated against honest nulls — permuted features, bootstrap by filing rather than by row, and forward chaining, which drops R-squared to 0.17. That's what the pipeline can deliver.</a:t>
+            </a:r>
+          </a:p>
+          <a:p>
+            <a:br>
+              <a:rPr lang="en-AU" sz="1200" b="0" kern="1200" dirty="0">
+                <a:solidFill>
+                  <a:schemeClr val="tx1"/>
+                </a:solidFill>
+                <a:effectLst/>
+                <a:latin typeface="+mn-lt"/>
+                <a:ea typeface="+mn-ea"/>
+                <a:cs typeface="+mn-cs"/>
+              </a:rPr>
+            </a:br>
+            <a:endParaRPr lang="en-AU" sz="1200" b="0" kern="1200" dirty="0">
+              <a:solidFill>
+                <a:schemeClr val="tx1"/>
+              </a:solidFill>
+              <a:effectLst/>
+              <a:latin typeface="+mn-lt"/>
+              <a:ea typeface="+mn-ea"/>
+              <a:cs typeface="+mn-cs"/>
+            </a:endParaRPr>
+          </a:p>
+          <a:p>
+            <a:r>
+              <a:rPr lang="en-AU" sz="1200" b="0" kern="1200" dirty="0">
+                <a:solidFill>
+                  <a:schemeClr val="tx1"/>
+                </a:solidFill>
+                <a:effectLst/>
+                <a:latin typeface="+mn-lt"/>
+                <a:ea typeface="+mn-ea"/>
+                <a:cs typeface="+mn-cs"/>
+              </a:rPr>
+              <a:t>I validated each cell manually and read the code to ensure what was generated by </a:t>
+            </a:r>
+            <a:r>
+              <a:rPr lang="en-AU" sz="1200" b="0" kern="1200" dirty="0" err="1">
+                <a:solidFill>
+                  <a:schemeClr val="tx1"/>
+                </a:solidFill>
+                <a:effectLst/>
+                <a:latin typeface="+mn-lt"/>
+                <a:ea typeface="+mn-ea"/>
+                <a:cs typeface="+mn-cs"/>
+              </a:rPr>
+              <a:t>claude</a:t>
+            </a:r>
+            <a:r>
+              <a:rPr lang="en-AU" sz="1200" b="0" kern="1200" dirty="0">
+                <a:solidFill>
+                  <a:schemeClr val="tx1"/>
+                </a:solidFill>
+                <a:effectLst/>
+                <a:latin typeface="+mn-lt"/>
+                <a:ea typeface="+mn-ea"/>
+                <a:cs typeface="+mn-cs"/>
+              </a:rPr>
+              <a:t> made sense, the commentary had also been reviewed and validated before this handover with you.</a:t>
             </a:r>
           </a:p>
         </p:txBody>
@@ -867,125 +1407,86 @@
           <a:lstStyle/>
           <a:p>
             <a:r>
-              <a:t>[3:26 — ~45s]</a:t>
-            </a:r>
-          </a:p>
-          <a:p>
-            <a:endParaRPr/>
-          </a:p>
-          <a:p>
-            <a:r>
-              <a:t>On checking. I ran a leakage audit before fitting anything: with the nine excluded columns put back, R-squared goes from 0.20 to 0.96. The one that mattered was my own data-quality index — worth 0.14, until I traced it to one signal built from the realised return. That's the leakage that survives review; the name gives nothing away.</a:t>
-            </a:r>
-          </a:p>
-          <a:p>
-            <a:endParaRPr/>
-          </a:p>
-          <a:p>
-            <a:r>
-              <a:t>[CUT IF LONG] I validated against honest nulls — permuted features, bootstrap by filing rather than by row, and forward chaining, which drops R-squared to 0.17. That's what the pipeline can deliver.</a:t>
-            </a:r>
-          </a:p>
-          <a:p>
-            <a:endParaRPr/>
-          </a:p>
-          <a:p>
-            <a:r>
-              <a:t>And I corrected my own claims: I'd told the team the range width was mainly the unknown result. It's about a quarter.</a:t>
-            </a:r>
-          </a:p>
-        </p:txBody>
-      </p:sp>
-      <p:sp>
-        <p:nvSpPr>
-          <p:cNvPr id="4" name="Slide Number Placeholder 3"/>
-          <p:cNvSpPr>
-            <a:spLocks noGrp="1"/>
-          </p:cNvSpPr>
-          <p:nvPr>
-            <p:ph type="sldNum" sz="quarter" idx="5"/>
-          </p:nvPr>
-        </p:nvSpPr>
-        <p:spPr/>
-      </p:sp>
-    </p:spTree>
-  </p:cSld>
-  <p:clrMapOvr>
-    <a:masterClrMapping/>
-  </p:clrMapOvr>
-</p:notes>
-</file>
-
-<file path=ppt/notesSlides/notesSlide8.xml><?xml version="1.0" encoding="utf-8"?>
-<p:notes xmlns:a="http://schemas.openxmlformats.org/drawingml/2006/main" xmlns:r="http://schemas.openxmlformats.org/officeDocument/2006/relationships" xmlns:p="http://schemas.openxmlformats.org/presentationml/2006/main">
-  <p:cSld>
-    <p:spTree>
-      <p:nvGrpSpPr>
-        <p:cNvPr id="1" name=""/>
-        <p:cNvGrpSpPr/>
-        <p:nvPr/>
-      </p:nvGrpSpPr>
-      <p:grpSpPr>
-        <a:xfrm>
-          <a:off x="0" y="0"/>
-          <a:ext cx="0" cy="0"/>
-          <a:chOff x="0" y="0"/>
-          <a:chExt cx="0" cy="0"/>
-        </a:xfrm>
-      </p:grpSpPr>
-      <p:sp>
-        <p:nvSpPr>
-          <p:cNvPr id="2" name="Slide Image Placeholder 1"/>
-          <p:cNvSpPr>
-            <a:spLocks noGrp="1" noRot="1" noChangeAspect="1"/>
-          </p:cNvSpPr>
-          <p:nvPr>
-            <p:ph type="sldImg" idx="2"/>
-          </p:nvPr>
-        </p:nvSpPr>
-        <p:spPr/>
-      </p:sp>
-      <p:sp>
-        <p:nvSpPr>
-          <p:cNvPr id="3" name="Notes Placeholder 2"/>
-          <p:cNvSpPr>
-            <a:spLocks noGrp="1"/>
-          </p:cNvSpPr>
-          <p:nvPr>
-            <p:ph type="body" sz="quarter" idx="3"/>
-          </p:nvPr>
-        </p:nvSpPr>
-        <p:spPr/>
-        <p:txBody>
-          <a:bodyPr/>
-          <a:lstStyle/>
-          <a:p>
-            <a:r>
+              <a:rPr dirty="0"/>
               <a:t>[4:11 — ~29s]</a:t>
             </a:r>
           </a:p>
           <a:p>
-            <a:endParaRPr/>
-          </a:p>
-          <a:p>
-            <a:r>
-              <a:t>Under PG1 I'm responsible for the judgements here regardless of what produced the first draft of them — which means understanding the model before relying on it, and judging whether its assumptions suit the purpose.</a:t>
-            </a:r>
-          </a:p>
-          <a:p>
-            <a:endParaRPr/>
-          </a:p>
-          <a:p>
-            <a:r>
-              <a:t>If your time is limited, I'd put it on two things: my decision to exclude the announcement drafts, and whether the ASC-101 estimate should go in front of the board at all. Thank you.</a:t>
-            </a:r>
-          </a:p>
-          <a:p>
-            <a:endParaRPr/>
-          </a:p>
-          <a:p>
-            <a:r>
-              <a:t>END — target 4:40, limit 5:00.</a:t>
+            <a:endParaRPr dirty="0"/>
+          </a:p>
+          <a:p>
+            <a:r>
+              <a:rPr lang="en-AU" sz="1200" b="0" kern="1200" dirty="0">
+                <a:solidFill>
+                  <a:schemeClr val="tx1"/>
+                </a:solidFill>
+                <a:effectLst/>
+                <a:latin typeface="+mn-lt"/>
+                <a:ea typeface="+mn-ea"/>
+                <a:cs typeface="+mn-cs"/>
+              </a:rPr>
+              <a:t>Under PG1 I'm responsible for the judgements here regardless of what produced the first draft of them which means understanding the model before relying on it, and judging whether its assumptions suit the purpose. However, for your review purpose the code is stored in GitHub with commentary and methodology documents.</a:t>
+            </a:r>
+          </a:p>
+          <a:p>
+            <a:br>
+              <a:rPr lang="en-AU" sz="1200" b="0" kern="1200" dirty="0">
+                <a:solidFill>
+                  <a:schemeClr val="tx1"/>
+                </a:solidFill>
+                <a:effectLst/>
+                <a:latin typeface="+mn-lt"/>
+                <a:ea typeface="+mn-ea"/>
+                <a:cs typeface="+mn-cs"/>
+              </a:rPr>
+            </a:br>
+            <a:endParaRPr lang="en-AU" sz="1200" b="0" kern="1200" dirty="0">
+              <a:solidFill>
+                <a:schemeClr val="tx1"/>
+              </a:solidFill>
+              <a:effectLst/>
+              <a:latin typeface="+mn-lt"/>
+              <a:ea typeface="+mn-ea"/>
+              <a:cs typeface="+mn-cs"/>
+            </a:endParaRPr>
+          </a:p>
+          <a:p>
+            <a:r>
+              <a:rPr lang="en-AU" sz="1200" b="0" kern="1200" dirty="0">
+                <a:solidFill>
+                  <a:schemeClr val="tx1"/>
+                </a:solidFill>
+                <a:effectLst/>
+                <a:latin typeface="+mn-lt"/>
+                <a:ea typeface="+mn-ea"/>
+                <a:cs typeface="+mn-cs"/>
+              </a:rPr>
+              <a:t>If your time is limited, I'd put it on two things: my decision to exclude the announcement drafts, and whether the ASC-101 estimate should go in front of the board at all, as those are two key results that can change  if you think the method is meant to be different. Otherwise feel free to call me for any questions when you're reviewing.</a:t>
+            </a:r>
+          </a:p>
+          <a:p>
+            <a:endParaRPr lang="en-AU" sz="1200" b="0" kern="1200" dirty="0">
+              <a:solidFill>
+                <a:schemeClr val="tx1"/>
+              </a:solidFill>
+              <a:effectLst/>
+              <a:latin typeface="+mn-lt"/>
+              <a:ea typeface="+mn-ea"/>
+              <a:cs typeface="+mn-cs"/>
+            </a:endParaRPr>
+          </a:p>
+          <a:p>
+            <a:r>
+              <a:rPr lang="en-AU" sz="1200" b="0" kern="1200" dirty="0">
+                <a:solidFill>
+                  <a:schemeClr val="tx1"/>
+                </a:solidFill>
+                <a:effectLst/>
+                <a:latin typeface="+mn-lt"/>
+                <a:ea typeface="+mn-ea"/>
+                <a:cs typeface="+mn-cs"/>
+              </a:rPr>
+              <a:t>Thank you.</a:t>
             </a:r>
           </a:p>
         </p:txBody>
@@ -4190,6 +4691,51 @@
           </a:p>
         </p:txBody>
       </p:sp>
+      <p:pic>
+        <p:nvPicPr>
+          <p:cNvPr id="5" name="Camera 4">
+            <a:extLst>
+              <a:ext uri="{FF2B5EF4-FFF2-40B4-BE49-F238E27FC236}">
+                <a16:creationId xmlns:a16="http://schemas.microsoft.com/office/drawing/2014/main" id="{0E08658B-14E6-AEF9-126E-45487F34F632}"/>
+              </a:ext>
+            </a:extLst>
+          </p:cNvPr>
+          <p:cNvPicPr>
+            <a:picLocks noChangeAspect="1"/>
+            <a:extLst>
+              <a:ext uri="{51228E76-BA90-4043-B771-695A4F85340A}">
+                <alf:liveFeedProps xmlns:alf="http://schemas.microsoft.com/office/drawing/2021/livefeed"/>
+              </a:ext>
+            </a:extLst>
+          </p:cNvPicPr>
+          <p:nvPr/>
+        </p:nvPicPr>
+        <p:blipFill>
+          <a:blip>
+            <a:extLst>
+              <a:ext uri="{96DAC541-7B7A-43D3-8B79-37D633B846F1}">
+                <asvg:svgBlip xmlns:asvg="http://schemas.microsoft.com/office/drawing/2016/SVG/main" r:embed="rId3"/>
+              </a:ext>
+            </a:extLst>
+          </a:blip>
+          <a:stretch>
+            <a:fillRect/>
+          </a:stretch>
+        </p:blipFill>
+        <p:spPr>
+          <a:xfrm>
+            <a:off x="411480" y="685801"/>
+            <a:ext cx="4708780" cy="5486400"/>
+          </a:xfrm>
+          <a:prstGeom prst="rect">
+            <a:avLst/>
+          </a:prstGeom>
+          <a:ln>
+            <a:noFill/>
+          </a:ln>
+          <a:effectLst/>
+        </p:spPr>
+      </p:pic>
     </p:spTree>
   </p:cSld>
   <p:clrMapOvr>
@@ -4808,6 +5354,96 @@
           </a:p>
         </p:txBody>
       </p:sp>
+      <p:pic>
+        <p:nvPicPr>
+          <p:cNvPr id="8" name="Camera 7">
+            <a:extLst>
+              <a:ext uri="{FF2B5EF4-FFF2-40B4-BE49-F238E27FC236}">
+                <a16:creationId xmlns:a16="http://schemas.microsoft.com/office/drawing/2014/main" id="{484A5218-FAF2-7A18-CF5E-BAC02FDDF87D}"/>
+              </a:ext>
+            </a:extLst>
+          </p:cNvPr>
+          <p:cNvPicPr>
+            <a:picLocks noChangeAspect="1"/>
+            <a:extLst>
+              <a:ext uri="{51228E76-BA90-4043-B771-695A4F85340A}">
+                <alf:liveFeedProps xmlns:alf="http://schemas.microsoft.com/office/drawing/2021/livefeed"/>
+              </a:ext>
+            </a:extLst>
+          </p:cNvPicPr>
+          <p:nvPr/>
+        </p:nvPicPr>
+        <p:blipFill>
+          <a:blip>
+            <a:extLst>
+              <a:ext uri="{96DAC541-7B7A-43D3-8B79-37D633B846F1}">
+                <asvg:svgBlip xmlns:asvg="http://schemas.microsoft.com/office/drawing/2016/SVG/main" r:embed="rId3"/>
+              </a:ext>
+            </a:extLst>
+          </a:blip>
+          <a:stretch>
+            <a:fillRect/>
+          </a:stretch>
+        </p:blipFill>
+        <p:spPr>
+          <a:xfrm>
+            <a:off x="411480" y="708659"/>
+            <a:ext cx="4708780" cy="5463541"/>
+          </a:xfrm>
+          <a:prstGeom prst="rect">
+            <a:avLst/>
+          </a:prstGeom>
+          <a:ln>
+            <a:noFill/>
+          </a:ln>
+          <a:effectLst/>
+        </p:spPr>
+      </p:pic>
+      <p:pic>
+        <p:nvPicPr>
+          <p:cNvPr id="9" name="Camera 8">
+            <a:extLst>
+              <a:ext uri="{FF2B5EF4-FFF2-40B4-BE49-F238E27FC236}">
+                <a16:creationId xmlns:a16="http://schemas.microsoft.com/office/drawing/2014/main" id="{80A33DB6-4128-1BAF-6269-0BCA548B67E1}"/>
+              </a:ext>
+            </a:extLst>
+          </p:cNvPr>
+          <p:cNvPicPr>
+            <a:picLocks noChangeAspect="1"/>
+            <a:extLst>
+              <a:ext uri="{51228E76-BA90-4043-B771-695A4F85340A}">
+                <alf:liveFeedProps xmlns:alf="http://schemas.microsoft.com/office/drawing/2021/livefeed"/>
+              </a:ext>
+            </a:extLst>
+          </p:cNvPicPr>
+          <p:nvPr/>
+        </p:nvPicPr>
+        <p:blipFill>
+          <a:blip>
+            <a:extLst>
+              <a:ext uri="{96DAC541-7B7A-43D3-8B79-37D633B846F1}">
+                <asvg:svgBlip xmlns:asvg="http://schemas.microsoft.com/office/drawing/2016/SVG/main" r:embed="rId3"/>
+              </a:ext>
+            </a:extLst>
+          </a:blip>
+          <a:stretch>
+            <a:fillRect/>
+          </a:stretch>
+        </p:blipFill>
+        <p:spPr>
+          <a:xfrm>
+            <a:off x="411480" y="685801"/>
+            <a:ext cx="4708780" cy="5486400"/>
+          </a:xfrm>
+          <a:prstGeom prst="rect">
+            <a:avLst/>
+          </a:prstGeom>
+          <a:ln>
+            <a:noFill/>
+          </a:ln>
+          <a:effectLst/>
+        </p:spPr>
+      </p:pic>
     </p:spTree>
   </p:cSld>
   <p:clrMapOvr>
@@ -4959,8 +5595,8 @@
         </p:nvSpPr>
         <p:spPr>
           <a:xfrm>
-            <a:off x="5532120" y="685800"/>
-            <a:ext cx="6110935" cy="1371600"/>
+            <a:off x="5486400" y="1016732"/>
+            <a:ext cx="6110935" cy="830356"/>
           </a:xfrm>
           <a:prstGeom prst="rect">
             <a:avLst/>
@@ -4991,7 +5627,7 @@
                 </a:solidFill>
                 <a:latin typeface="Calibri"/>
               </a:rPr>
-              <a:t>MY OPINION</a:t>
+              <a:t>WHAT THE ANALYSIS SUPPORTS</a:t>
             </a:r>
           </a:p>
           <a:p>
@@ -5013,9 +5649,23 @@
                 </a:solidFill>
                 <a:latin typeface="Calibri"/>
               </a:rPr>
-              <a:t>Rely on it to inform —
-not to produce a number</a:t>
-            </a:r>
+              <a:t>Three </a:t>
+            </a:r>
+            <a:r>
+              <a:rPr lang="en-US" sz="3000" b="1" i="0" dirty="0">
+                <a:solidFill>
+                  <a:srgbClr val="1F4E79"/>
+                </a:solidFill>
+                <a:latin typeface="Calibri"/>
+              </a:rPr>
+              <a:t>Key Insights</a:t>
+            </a:r>
+            <a:endParaRPr sz="3000" b="1" i="0" dirty="0">
+              <a:solidFill>
+                <a:srgbClr val="1F4E79"/>
+              </a:solidFill>
+              <a:latin typeface="Calibri"/>
+            </a:endParaRPr>
           </a:p>
         </p:txBody>
       </p:sp>
@@ -5027,7 +5677,7 @@
         </p:nvSpPr>
         <p:spPr>
           <a:xfrm>
-            <a:off x="5532120" y="2121408"/>
+            <a:off x="5532120" y="1847088"/>
             <a:ext cx="1371600" cy="38100"/>
           </a:xfrm>
           <a:prstGeom prst="rect">
@@ -5072,8 +5722,8 @@
         </p:nvSpPr>
         <p:spPr>
           <a:xfrm>
-            <a:off x="5532120" y="2395728"/>
-            <a:ext cx="6110935" cy="3657600"/>
+            <a:off x="5532120" y="2121408"/>
+            <a:ext cx="6110935" cy="3051541"/>
           </a:xfrm>
           <a:prstGeom prst="rect">
             <a:avLst/>
@@ -5094,111 +5744,23 @@
                 <a:spcPts val="0"/>
               </a:spcBef>
               <a:spcAft>
-                <a:spcPts val="400"/>
+                <a:spcPts val="300"/>
               </a:spcAft>
             </a:pPr>
             <a:r>
-              <a:rPr sz="2100" b="1" i="0">
+              <a:rPr sz="1900" b="1" i="0" dirty="0">
                 <a:solidFill>
                   <a:srgbClr val="141B2D"/>
                 </a:solidFill>
                 <a:latin typeface="Calibri"/>
               </a:rPr>
-              <a:t>Strong on the downside.</a:t>
+              <a:t>The ordering is reliable.</a:t>
             </a:r>
           </a:p>
           <a:p>
             <a:pPr>
               <a:lnSpc>
-                <a:spcPct val="108000"/>
-              </a:lnSpc>
-              <a:spcBef>
-                <a:spcPts val="0"/>
-              </a:spcBef>
-              <a:spcAft>
-                <a:spcPts val="1600"/>
-              </a:spcAft>
-            </a:pPr>
-            <a:r>
-              <a:rPr sz="1500" b="0" i="0">
-                <a:solidFill>
-                  <a:srgbClr val="5A6478"/>
-                </a:solidFill>
-                <a:latin typeface="Calibri"/>
-              </a:rPr>
-              <a:t>R² = 0.31 within negative readouts</a:t>
-            </a:r>
-          </a:p>
-          <a:p>
-            <a:pPr>
-              <a:lnSpc>
-                <a:spcPct val="108000"/>
-              </a:lnSpc>
-              <a:spcBef>
-                <a:spcPts val="0"/>
-              </a:spcBef>
-              <a:spcAft>
-                <a:spcPts val="400"/>
-              </a:spcAft>
-            </a:pPr>
-            <a:r>
-              <a:rPr sz="2100" b="1" i="0">
-                <a:solidFill>
-                  <a:srgbClr val="A8322D"/>
-                </a:solidFill>
-                <a:latin typeface="Calibri"/>
-              </a:rPr>
-              <a:t>Weak on the upside.</a:t>
-            </a:r>
-          </a:p>
-          <a:p>
-            <a:pPr>
-              <a:lnSpc>
-                <a:spcPct val="108000"/>
-              </a:lnSpc>
-              <a:spcBef>
-                <a:spcPts val="0"/>
-              </a:spcBef>
-              <a:spcAft>
-                <a:spcPts val="1600"/>
-              </a:spcAft>
-            </a:pPr>
-            <a:r>
-              <a:rPr sz="1500" b="0" i="0">
-                <a:solidFill>
-                  <a:srgbClr val="5A6478"/>
-                </a:solidFill>
-                <a:latin typeface="Calibri"/>
-              </a:rPr>
-              <a:t>R² = 0.03 within positive readouts — use history, not the model</a:t>
-            </a:r>
-          </a:p>
-          <a:p>
-            <a:pPr>
-              <a:lnSpc>
-                <a:spcPct val="108000"/>
-              </a:lnSpc>
-              <a:spcBef>
-                <a:spcPts val="0"/>
-              </a:spcBef>
-              <a:spcAft>
-                <a:spcPts val="400"/>
-              </a:spcAft>
-            </a:pPr>
-            <a:r>
-              <a:rPr sz="2100" b="1" i="0">
-                <a:solidFill>
-                  <a:srgbClr val="141B2D"/>
-                </a:solidFill>
-                <a:latin typeface="Calibri"/>
-              </a:rPr>
-              <a:t>Not a forecast, a ranking.</a:t>
-            </a:r>
-          </a:p>
-          <a:p>
-            <a:pPr>
-              <a:lnSpc>
-                <a:spcPct val="108000"/>
+                <a:spcPct val="112000"/>
               </a:lnSpc>
               <a:spcBef>
                 <a:spcPts val="0"/>
@@ -5208,17 +5770,231 @@
               </a:spcAft>
             </a:pPr>
             <a:r>
-              <a:rPr sz="1500" b="0" i="0">
+              <a:rPr sz="1500" b="0" i="0" dirty="0">
                 <a:solidFill>
                   <a:srgbClr val="5A6478"/>
                 </a:solidFill>
                 <a:latin typeface="Calibri"/>
               </a:rPr>
-              <a:t>Typical error on a single event is about 21 percentage points</a:t>
-            </a:r>
-          </a:p>
-        </p:txBody>
-      </p:sp>
+              <a:t>Negative vs positive separated by 11–27 points of central estimate, for all three assets, and it survives every seed.</a:t>
+            </a:r>
+          </a:p>
+          <a:p>
+            <a:pPr>
+              <a:lnSpc>
+                <a:spcPct val="108000"/>
+              </a:lnSpc>
+              <a:spcBef>
+                <a:spcPts val="1400"/>
+              </a:spcBef>
+              <a:spcAft>
+                <a:spcPts val="300"/>
+              </a:spcAft>
+            </a:pPr>
+            <a:r>
+              <a:rPr sz="1900" b="1" i="0" dirty="0">
+                <a:solidFill>
+                  <a:srgbClr val="141B2D"/>
+                </a:solidFill>
+                <a:latin typeface="Calibri"/>
+              </a:rPr>
+              <a:t>ASC-204's downside is well evidenced.</a:t>
+            </a:r>
+          </a:p>
+          <a:p>
+            <a:pPr>
+              <a:lnSpc>
+                <a:spcPct val="112000"/>
+              </a:lnSpc>
+              <a:spcBef>
+                <a:spcPts val="0"/>
+              </a:spcBef>
+              <a:spcAft>
+                <a:spcPts val="0"/>
+              </a:spcAft>
+            </a:pPr>
+            <a:r>
+              <a:rPr sz="1500" b="0" i="0" dirty="0">
+                <a:solidFill>
+                  <a:srgbClr val="5A6478"/>
+                </a:solidFill>
+                <a:latin typeface="Calibri"/>
+              </a:rPr>
+              <a:t>266-trial cardiovascular and renal cluster · 246 in the same therapeutic area · 34 negative readouts behind the distribution.</a:t>
+            </a:r>
+          </a:p>
+          <a:p>
+            <a:pPr>
+              <a:lnSpc>
+                <a:spcPct val="108000"/>
+              </a:lnSpc>
+              <a:spcBef>
+                <a:spcPts val="1400"/>
+              </a:spcBef>
+              <a:spcAft>
+                <a:spcPts val="300"/>
+              </a:spcAft>
+            </a:pPr>
+            <a:r>
+              <a:rPr sz="1900" b="1" i="0" dirty="0">
+                <a:solidFill>
+                  <a:srgbClr val="141B2D"/>
+                </a:solidFill>
+                <a:latin typeface="Calibri"/>
+              </a:rPr>
+              <a:t>It ranks severity.</a:t>
+            </a:r>
+          </a:p>
+          <a:p>
+            <a:pPr>
+              <a:lnSpc>
+                <a:spcPct val="112000"/>
+              </a:lnSpc>
+              <a:spcBef>
+                <a:spcPts val="0"/>
+              </a:spcBef>
+              <a:spcAft>
+                <a:spcPts val="0"/>
+              </a:spcAft>
+            </a:pPr>
+            <a:r>
+              <a:rPr sz="1500" b="0" i="0" dirty="0">
+                <a:solidFill>
+                  <a:srgbClr val="5A6478"/>
+                </a:solidFill>
+                <a:latin typeface="Calibri"/>
+              </a:rPr>
+              <a:t>Worst-ranked decile: 61%</a:t>
+            </a:r>
+            <a:r>
+              <a:rPr lang="en-AU" sz="1500" b="0" i="0" dirty="0">
+                <a:solidFill>
+                  <a:srgbClr val="5A6478"/>
+                </a:solidFill>
+                <a:latin typeface="Calibri"/>
+              </a:rPr>
+              <a:t> of readouts</a:t>
+            </a:r>
+            <a:r>
+              <a:rPr sz="1500" b="0" i="0" dirty="0">
+                <a:solidFill>
+                  <a:srgbClr val="5A6478"/>
+                </a:solidFill>
+                <a:latin typeface="Calibri"/>
+              </a:rPr>
+              <a:t> fell more than 10%, 43%</a:t>
+            </a:r>
+            <a:r>
+              <a:rPr lang="en-AU" sz="1500" b="0" i="0" dirty="0">
+                <a:solidFill>
+                  <a:srgbClr val="5A6478"/>
+                </a:solidFill>
+                <a:latin typeface="Calibri"/>
+              </a:rPr>
+              <a:t> of readouts</a:t>
+            </a:r>
+            <a:r>
+              <a:rPr sz="1500" b="0" i="0" dirty="0">
+                <a:solidFill>
+                  <a:srgbClr val="5A6478"/>
+                </a:solidFill>
+                <a:latin typeface="Calibri"/>
+              </a:rPr>
+              <a:t> more than 25%. AUC 0.78 for a fall beyond 25%.</a:t>
+            </a:r>
+          </a:p>
+        </p:txBody>
+      </p:sp>
+      <p:pic>
+        <p:nvPicPr>
+          <p:cNvPr id="8" name="Camera 7">
+            <a:extLst>
+              <a:ext uri="{FF2B5EF4-FFF2-40B4-BE49-F238E27FC236}">
+                <a16:creationId xmlns:a16="http://schemas.microsoft.com/office/drawing/2014/main" id="{C0A60643-4FEF-5610-A27A-B358699F5C09}"/>
+              </a:ext>
+            </a:extLst>
+          </p:cNvPr>
+          <p:cNvPicPr>
+            <a:picLocks noChangeAspect="1"/>
+            <a:extLst>
+              <a:ext uri="{51228E76-BA90-4043-B771-695A4F85340A}">
+                <alf:liveFeedProps xmlns:alf="http://schemas.microsoft.com/office/drawing/2021/livefeed"/>
+              </a:ext>
+            </a:extLst>
+          </p:cNvPicPr>
+          <p:nvPr/>
+        </p:nvPicPr>
+        <p:blipFill>
+          <a:blip>
+            <a:extLst>
+              <a:ext uri="{96DAC541-7B7A-43D3-8B79-37D633B846F1}">
+                <asvg:svgBlip xmlns:asvg="http://schemas.microsoft.com/office/drawing/2016/SVG/main" r:embed="rId3"/>
+              </a:ext>
+            </a:extLst>
+          </a:blip>
+          <a:stretch>
+            <a:fillRect/>
+          </a:stretch>
+        </p:blipFill>
+        <p:spPr>
+          <a:xfrm>
+            <a:off x="411480" y="708659"/>
+            <a:ext cx="4708780" cy="5463541"/>
+          </a:xfrm>
+          <a:prstGeom prst="rect">
+            <a:avLst/>
+          </a:prstGeom>
+          <a:ln>
+            <a:noFill/>
+          </a:ln>
+          <a:effectLst/>
+        </p:spPr>
+      </p:pic>
+      <p:pic>
+        <p:nvPicPr>
+          <p:cNvPr id="9" name="Camera 8">
+            <a:extLst>
+              <a:ext uri="{FF2B5EF4-FFF2-40B4-BE49-F238E27FC236}">
+                <a16:creationId xmlns:a16="http://schemas.microsoft.com/office/drawing/2014/main" id="{314B0D04-DA6C-DF96-60F0-85940CC13502}"/>
+              </a:ext>
+            </a:extLst>
+          </p:cNvPr>
+          <p:cNvPicPr>
+            <a:picLocks noChangeAspect="1"/>
+            <a:extLst>
+              <a:ext uri="{51228E76-BA90-4043-B771-695A4F85340A}">
+                <alf:liveFeedProps xmlns:alf="http://schemas.microsoft.com/office/drawing/2021/livefeed"/>
+              </a:ext>
+            </a:extLst>
+          </p:cNvPicPr>
+          <p:nvPr/>
+        </p:nvPicPr>
+        <p:blipFill>
+          <a:blip>
+            <a:extLst>
+              <a:ext uri="{96DAC541-7B7A-43D3-8B79-37D633B846F1}">
+                <asvg:svgBlip xmlns:asvg="http://schemas.microsoft.com/office/drawing/2016/SVG/main" r:embed="rId3"/>
+              </a:ext>
+            </a:extLst>
+          </a:blip>
+          <a:stretch>
+            <a:fillRect/>
+          </a:stretch>
+        </p:blipFill>
+        <p:spPr>
+          <a:xfrm>
+            <a:off x="411480" y="685801"/>
+            <a:ext cx="4708780" cy="5486400"/>
+          </a:xfrm>
+          <a:prstGeom prst="rect">
+            <a:avLst/>
+          </a:prstGeom>
+          <a:ln>
+            <a:noFill/>
+          </a:ln>
+          <a:effectLst/>
+        </p:spPr>
+      </p:pic>
     </p:spTree>
   </p:cSld>
   <p:clrMapOvr>
@@ -5370,7 +6146,7 @@
         </p:nvSpPr>
         <p:spPr>
           <a:xfrm>
-            <a:off x="5486400" y="1016732"/>
+            <a:off x="5486400" y="1006092"/>
             <a:ext cx="6110935" cy="830356"/>
           </a:xfrm>
           <a:prstGeom prst="rect">
@@ -5402,7 +6178,7 @@
                 </a:solidFill>
                 <a:latin typeface="Calibri"/>
               </a:rPr>
-              <a:t>WHAT THE ANALYSIS SUPPORTS</a:t>
+              <a:t>WHERE IT SHOULD NOT BE RELIED UPON</a:t>
             </a:r>
           </a:p>
           <a:p>
@@ -5420,7 +6196,7 @@
             <a:r>
               <a:rPr sz="3000" b="1" i="0" dirty="0">
                 <a:solidFill>
-                  <a:srgbClr val="1F4E79"/>
+                  <a:srgbClr val="A8322D"/>
                 </a:solidFill>
                 <a:latin typeface="Calibri"/>
               </a:rPr>
@@ -5429,15 +6205,15 @@
             <a:r>
               <a:rPr lang="en-US" sz="3000" b="1" i="0" dirty="0">
                 <a:solidFill>
-                  <a:srgbClr val="1F4E79"/>
-                </a:solidFill>
-                <a:latin typeface="Calibri"/>
-              </a:rPr>
-              <a:t>Key Insights</a:t>
+                  <a:srgbClr val="A8322D"/>
+                </a:solidFill>
+                <a:latin typeface="Calibri"/>
+              </a:rPr>
+              <a:t>Key Limitations </a:t>
             </a:r>
             <a:endParaRPr sz="3000" b="1" i="0" dirty="0">
               <a:solidFill>
-                <a:srgbClr val="1F4E79"/>
+                <a:srgbClr val="A8322D"/>
               </a:solidFill>
               <a:latin typeface="Calibri"/>
             </a:endParaRPr>
@@ -5459,7 +6235,7 @@
             <a:avLst/>
           </a:prstGeom>
           <a:solidFill>
-            <a:srgbClr val="1F4E79"/>
+            <a:srgbClr val="A8322D"/>
           </a:solidFill>
           <a:ln>
             <a:noFill/>
@@ -5529,7 +6305,7 @@
                 </a:solidFill>
                 <a:latin typeface="Calibri"/>
               </a:rPr>
-              <a:t>The ordering is reliable.</a:t>
+              <a:t>ASC-101 has effectively no comparables.</a:t>
             </a:r>
           </a:p>
           <a:p>
@@ -5551,7 +6327,7 @@
                 </a:solidFill>
                 <a:latin typeface="Calibri"/>
               </a:rPr>
-              <a:t>Negative vs positive separated by 11–27 points of central estimate, for all three assets, and it survives every seed.</a:t>
+              <a:t>7 hereditary angioedema readouts in the whole dataset. Matched to vaccine trials on design because disease was unmatchable — a Phase 3 base rate, and it must be labelled as one.</a:t>
             </a:r>
           </a:p>
           <a:p>
@@ -5573,7 +6349,7 @@
                 </a:solidFill>
                 <a:latin typeface="Calibri"/>
               </a:rPr>
-              <a:t>ASC-204's downside is well evidenced.</a:t>
+              <a:t>The upside is close to unmodelled.</a:t>
             </a:r>
           </a:p>
           <a:p>
@@ -5595,7 +6371,7 @@
                 </a:solidFill>
                 <a:latin typeface="Calibri"/>
               </a:rPr>
-              <a:t>266-trial cardiovascular and renal cluster · 246 in the same therapeutic area · 34 negative readouts behind the distribution.</a:t>
+              <a:t>R² ≈ 0.03 within positives, ~0 with the features Asclepius can supply. Quote the comparable-set range instead.</a:t>
             </a:r>
           </a:p>
           <a:p>
@@ -5617,7 +6393,7 @@
                 </a:solidFill>
                 <a:latin typeface="Calibri"/>
               </a:rPr>
-              <a:t>It ranks severity.</a:t>
+              <a:t>The dataset supplies no price series for ASCL.</a:t>
             </a:r>
           </a:p>
           <a:p>
@@ -5639,11 +6415,101 @@
                 </a:solidFill>
                 <a:latin typeface="Calibri"/>
               </a:rPr>
-              <a:t>Worst-ranked decile: 61% fell more than 10%, 43% more than 25%. AUC 0.78 for a fall beyond 25%.</a:t>
-            </a:r>
-          </a:p>
-        </p:txBody>
-      </p:sp>
+              <a:t>A gap in the data, not a fact about the company. Volatility did most of the work in sizing a bad outcome, so bands are ~69 points wide — correctly wide.</a:t>
+            </a:r>
+          </a:p>
+        </p:txBody>
+      </p:sp>
+      <p:pic>
+        <p:nvPicPr>
+          <p:cNvPr id="8" name="Camera 7">
+            <a:extLst>
+              <a:ext uri="{FF2B5EF4-FFF2-40B4-BE49-F238E27FC236}">
+                <a16:creationId xmlns:a16="http://schemas.microsoft.com/office/drawing/2014/main" id="{8C57F0FD-3114-DB8F-DF7F-181AFCF9B0DD}"/>
+              </a:ext>
+            </a:extLst>
+          </p:cNvPr>
+          <p:cNvPicPr>
+            <a:picLocks noChangeAspect="1"/>
+            <a:extLst>
+              <a:ext uri="{51228E76-BA90-4043-B771-695A4F85340A}">
+                <alf:liveFeedProps xmlns:alf="http://schemas.microsoft.com/office/drawing/2021/livefeed"/>
+              </a:ext>
+            </a:extLst>
+          </p:cNvPicPr>
+          <p:nvPr/>
+        </p:nvPicPr>
+        <p:blipFill>
+          <a:blip>
+            <a:extLst>
+              <a:ext uri="{96DAC541-7B7A-43D3-8B79-37D633B846F1}">
+                <asvg:svgBlip xmlns:asvg="http://schemas.microsoft.com/office/drawing/2016/SVG/main" r:embed="rId3"/>
+              </a:ext>
+            </a:extLst>
+          </a:blip>
+          <a:stretch>
+            <a:fillRect/>
+          </a:stretch>
+        </p:blipFill>
+        <p:spPr>
+          <a:xfrm>
+            <a:off x="411480" y="708659"/>
+            <a:ext cx="4708780" cy="5463541"/>
+          </a:xfrm>
+          <a:prstGeom prst="rect">
+            <a:avLst/>
+          </a:prstGeom>
+          <a:ln>
+            <a:noFill/>
+          </a:ln>
+          <a:effectLst/>
+        </p:spPr>
+      </p:pic>
+      <p:pic>
+        <p:nvPicPr>
+          <p:cNvPr id="9" name="Camera 8">
+            <a:extLst>
+              <a:ext uri="{FF2B5EF4-FFF2-40B4-BE49-F238E27FC236}">
+                <a16:creationId xmlns:a16="http://schemas.microsoft.com/office/drawing/2014/main" id="{2FF33013-4749-C76C-F5DA-50B9E3F1BABB}"/>
+              </a:ext>
+            </a:extLst>
+          </p:cNvPr>
+          <p:cNvPicPr>
+            <a:picLocks noChangeAspect="1"/>
+            <a:extLst>
+              <a:ext uri="{51228E76-BA90-4043-B771-695A4F85340A}">
+                <alf:liveFeedProps xmlns:alf="http://schemas.microsoft.com/office/drawing/2021/livefeed"/>
+              </a:ext>
+            </a:extLst>
+          </p:cNvPicPr>
+          <p:nvPr/>
+        </p:nvPicPr>
+        <p:blipFill>
+          <a:blip>
+            <a:extLst>
+              <a:ext uri="{96DAC541-7B7A-43D3-8B79-37D633B846F1}">
+                <asvg:svgBlip xmlns:asvg="http://schemas.microsoft.com/office/drawing/2016/SVG/main" r:embed="rId3"/>
+              </a:ext>
+            </a:extLst>
+          </a:blip>
+          <a:stretch>
+            <a:fillRect/>
+          </a:stretch>
+        </p:blipFill>
+        <p:spPr>
+          <a:xfrm>
+            <a:off x="411480" y="685801"/>
+            <a:ext cx="4708780" cy="5486400"/>
+          </a:xfrm>
+          <a:prstGeom prst="rect">
+            <a:avLst/>
+          </a:prstGeom>
+          <a:ln>
+            <a:noFill/>
+          </a:ln>
+          <a:effectLst/>
+        </p:spPr>
+      </p:pic>
     </p:spTree>
   </p:cSld>
   <p:clrMapOvr>
@@ -5795,8 +6661,8 @@
         </p:nvSpPr>
         <p:spPr>
           <a:xfrm>
-            <a:off x="5486400" y="1006092"/>
-            <a:ext cx="6110935" cy="830356"/>
+            <a:off x="5532120" y="685800"/>
+            <a:ext cx="6110935" cy="1371600"/>
           </a:xfrm>
           <a:prstGeom prst="rect">
             <a:avLst/>
@@ -5827,7 +6693,7 @@
                 </a:solidFill>
                 <a:latin typeface="Calibri"/>
               </a:rPr>
-              <a:t>WHERE IT SHOULD NOT BE RELIED UPON</a:t>
+              <a:t>HOW THE WORK WAS PRODUCED</a:t>
             </a:r>
           </a:p>
           <a:p>
@@ -5845,27 +6711,13 @@
             <a:r>
               <a:rPr sz="3000" b="1" i="0" dirty="0">
                 <a:solidFill>
-                  <a:srgbClr val="A8322D"/>
-                </a:solidFill>
-                <a:latin typeface="Calibri"/>
-              </a:rPr>
-              <a:t>Three </a:t>
-            </a:r>
-            <a:r>
-              <a:rPr lang="en-US" sz="3000" b="1" i="0" dirty="0">
-                <a:solidFill>
-                  <a:srgbClr val="A8322D"/>
-                </a:solidFill>
-                <a:latin typeface="Calibri"/>
-              </a:rPr>
-              <a:t>Key Limitations </a:t>
-            </a:r>
-            <a:endParaRPr sz="3000" b="1" i="0" dirty="0">
-              <a:solidFill>
-                <a:srgbClr val="A8322D"/>
-              </a:solidFill>
-              <a:latin typeface="Calibri"/>
-            </a:endParaRPr>
+                  <a:srgbClr val="1F4E79"/>
+                </a:solidFill>
+                <a:latin typeface="Calibri"/>
+              </a:rPr>
+              <a:t>AI throughout —
+judgement not delegated</a:t>
+            </a:r>
           </a:p>
         </p:txBody>
       </p:sp>
@@ -5884,7 +6736,7 @@
             <a:avLst/>
           </a:prstGeom>
           <a:solidFill>
-            <a:srgbClr val="A8322D"/>
+            <a:srgbClr val="1F4E79"/>
           </a:solidFill>
           <a:ln>
             <a:noFill/>
@@ -5923,7 +6775,7 @@
         <p:spPr>
           <a:xfrm>
             <a:off x="5532120" y="2121408"/>
-            <a:ext cx="6110935" cy="4114800"/>
+            <a:ext cx="6110935" cy="3051541"/>
           </a:xfrm>
           <a:prstGeom prst="rect">
             <a:avLst/>
@@ -5948,13 +6800,49 @@
               </a:spcAft>
             </a:pPr>
             <a:r>
-              <a:rPr sz="1900" b="1" i="0">
+              <a:rPr sz="1900" b="1" i="0" dirty="0">
                 <a:solidFill>
                   <a:srgbClr val="141B2D"/>
                 </a:solidFill>
                 <a:latin typeface="Calibri"/>
               </a:rPr>
-              <a:t>ASC-101 has effectively no comparables.</a:t>
+              <a:t>Claude, via Claude Code</a:t>
+            </a:r>
+            <a:r>
+              <a:rPr lang="en-US" sz="1900" b="1" dirty="0">
+                <a:solidFill>
+                  <a:srgbClr val="141B2D"/>
+                </a:solidFill>
+                <a:latin typeface="Calibri"/>
+              </a:rPr>
+              <a:t> </a:t>
+            </a:r>
+            <a:r>
+              <a:rPr sz="1900" b="1" i="0" dirty="0">
+                <a:solidFill>
+                  <a:srgbClr val="141B2D"/>
+                </a:solidFill>
+                <a:latin typeface="Calibri"/>
+              </a:rPr>
+              <a:t>throughout</a:t>
+            </a:r>
+            <a:r>
+              <a:rPr lang="en-US" sz="1900" b="1" i="0" dirty="0">
+                <a:solidFill>
+                  <a:srgbClr val="141B2D"/>
+                </a:solidFill>
+                <a:latin typeface="Calibri"/>
+              </a:rPr>
+              <a:t> the whole project</a:t>
+            </a:r>
+            <a:r>
+              <a:rPr sz="1900" b="1" i="0" dirty="0">
+                <a:solidFill>
+                  <a:srgbClr val="141B2D"/>
+                </a:solidFill>
+                <a:latin typeface="Calibri"/>
+              </a:rPr>
+              <a:t>.</a:t>
             </a:r>
           </a:p>
           <a:p>
@@ -5970,14 +6858,20 @@
               </a:spcAft>
             </a:pPr>
             <a:r>
-              <a:rPr sz="1500" b="0" i="0">
+              <a:rPr sz="1500" b="0" i="0" dirty="0">
                 <a:solidFill>
                   <a:srgbClr val="5A6478"/>
                 </a:solidFill>
                 <a:latin typeface="Calibri"/>
               </a:rPr>
-              <a:t>7 hereditary angioedema readouts in the whole dataset. Matched to vaccine trials on design because disease was unmatchable — a Phase 3 base rate, and it must be labelled as one.</a:t>
-            </a:r>
+              <a:t>Code written and debugged, result sentences pulled from the filings for me to read, commentary drafted and then rewritten. Full logs submitted.</a:t>
+            </a:r>
+            <a:endParaRPr lang="en-US" sz="1500" b="0" i="0" dirty="0">
+              <a:solidFill>
+                <a:srgbClr val="5A6478"/>
+              </a:solidFill>
+              <a:latin typeface="Calibri"/>
+            </a:endParaRPr>
           </a:p>
           <a:p>
             <a:pPr>
@@ -5992,13 +6886,13 @@
               </a:spcAft>
             </a:pPr>
             <a:r>
-              <a:rPr sz="1900" b="1" i="0">
+              <a:rPr lang="en-US" sz="1900" b="1" i="0" dirty="0">
                 <a:solidFill>
                   <a:srgbClr val="141B2D"/>
                 </a:solidFill>
                 <a:latin typeface="Calibri"/>
               </a:rPr>
-              <a:t>The upside is close to unmodelled.</a:t>
+              <a:t>The constraints were mine.</a:t>
             </a:r>
           </a:p>
           <a:p>
@@ -6014,13 +6908,13 @@
               </a:spcAft>
             </a:pPr>
             <a:r>
-              <a:rPr sz="1500" b="0" i="0">
+              <a:rPr lang="en-US" sz="1500" b="0" i="0" dirty="0">
                 <a:solidFill>
                   <a:srgbClr val="5A6478"/>
                 </a:solidFill>
                 <a:latin typeface="Calibri"/>
               </a:rPr>
-              <a:t>R² ≈ 0.03 within positives, ~0 with the features Asclepius can supply. Quote the comparable-set range instead.</a:t>
+              <a:t>No feature unobservable before the event. Announcement drafts excluded as circular. The 30 filings read against the 8-Ks are my reading.</a:t>
             </a:r>
           </a:p>
           <a:p>
@@ -6036,13 +6930,13 @@
               </a:spcAft>
             </a:pPr>
             <a:r>
-              <a:rPr sz="1900" b="1" i="0">
+              <a:rPr lang="en-US" sz="1900" b="1" i="0" dirty="0">
                 <a:solidFill>
                   <a:srgbClr val="141B2D"/>
                 </a:solidFill>
                 <a:latin typeface="Calibri"/>
               </a:rPr>
-              <a:t>The dataset supplies no price series for ASCL.</a:t>
+              <a:t>I made judgment calls. </a:t>
             </a:r>
           </a:p>
           <a:p>
@@ -6058,17 +6952,125 @@
               </a:spcAft>
             </a:pPr>
             <a:r>
-              <a:rPr sz="1500" b="0" i="0">
+              <a:rPr lang="en-US" sz="1500" b="0" i="0" dirty="0">
                 <a:solidFill>
                   <a:srgbClr val="5A6478"/>
                 </a:solidFill>
                 <a:latin typeface="Calibri"/>
               </a:rPr>
-              <a:t>A gap in the data, not a fact about the company. Volatility did most of the work in sizing a bad outcome, so bands are ~69 points wide — correctly wide.</a:t>
-            </a:r>
-          </a:p>
-        </p:txBody>
-      </p:sp>
+              <a:t>It called some mixed scenarios mixed-positive. Cases like ASC-204's misses its primary endpoint and is rescued by a subgroup </a:t>
+            </a:r>
+            <a:r>
+              <a:rPr lang="en-US" sz="1500" dirty="0">
+                <a:solidFill>
+                  <a:srgbClr val="5A6478"/>
+                </a:solidFill>
+                <a:latin typeface="Calibri"/>
+              </a:rPr>
+              <a:t>which is</a:t>
+            </a:r>
+            <a:r>
+              <a:rPr lang="en-US" sz="1500" b="0" i="0" dirty="0">
+                <a:solidFill>
+                  <a:srgbClr val="5A6478"/>
+                </a:solidFill>
+                <a:latin typeface="Calibri"/>
+              </a:rPr>
+              <a:t> mixed-negative.</a:t>
+            </a:r>
+          </a:p>
+        </p:txBody>
+      </p:sp>
+      <p:pic>
+        <p:nvPicPr>
+          <p:cNvPr id="8" name="Camera 7">
+            <a:extLst>
+              <a:ext uri="{FF2B5EF4-FFF2-40B4-BE49-F238E27FC236}">
+                <a16:creationId xmlns:a16="http://schemas.microsoft.com/office/drawing/2014/main" id="{EC163F42-2C9D-45A8-0846-719D5AFD88C0}"/>
+              </a:ext>
+            </a:extLst>
+          </p:cNvPr>
+          <p:cNvPicPr>
+            <a:picLocks noChangeAspect="1"/>
+            <a:extLst>
+              <a:ext uri="{51228E76-BA90-4043-B771-695A4F85340A}">
+                <alf:liveFeedProps xmlns:alf="http://schemas.microsoft.com/office/drawing/2021/livefeed"/>
+              </a:ext>
+            </a:extLst>
+          </p:cNvPicPr>
+          <p:nvPr/>
+        </p:nvPicPr>
+        <p:blipFill>
+          <a:blip>
+            <a:extLst>
+              <a:ext uri="{96DAC541-7B7A-43D3-8B79-37D633B846F1}">
+                <asvg:svgBlip xmlns:asvg="http://schemas.microsoft.com/office/drawing/2016/SVG/main" r:embed="rId3"/>
+              </a:ext>
+            </a:extLst>
+          </a:blip>
+          <a:stretch>
+            <a:fillRect/>
+          </a:stretch>
+        </p:blipFill>
+        <p:spPr>
+          <a:xfrm>
+            <a:off x="411480" y="708659"/>
+            <a:ext cx="4708780" cy="5463541"/>
+          </a:xfrm>
+          <a:prstGeom prst="rect">
+            <a:avLst/>
+          </a:prstGeom>
+          <a:ln>
+            <a:noFill/>
+          </a:ln>
+          <a:effectLst/>
+        </p:spPr>
+      </p:pic>
+      <p:pic>
+        <p:nvPicPr>
+          <p:cNvPr id="9" name="Camera 8">
+            <a:extLst>
+              <a:ext uri="{FF2B5EF4-FFF2-40B4-BE49-F238E27FC236}">
+                <a16:creationId xmlns:a16="http://schemas.microsoft.com/office/drawing/2014/main" id="{7B1B5B5B-C431-96CD-D57F-A84BC7FB5917}"/>
+              </a:ext>
+            </a:extLst>
+          </p:cNvPr>
+          <p:cNvPicPr>
+            <a:picLocks noChangeAspect="1"/>
+            <a:extLst>
+              <a:ext uri="{51228E76-BA90-4043-B771-695A4F85340A}">
+                <alf:liveFeedProps xmlns:alf="http://schemas.microsoft.com/office/drawing/2021/livefeed"/>
+              </a:ext>
+            </a:extLst>
+          </p:cNvPicPr>
+          <p:nvPr/>
+        </p:nvPicPr>
+        <p:blipFill>
+          <a:blip>
+            <a:extLst>
+              <a:ext uri="{96DAC541-7B7A-43D3-8B79-37D633B846F1}">
+                <asvg:svgBlip xmlns:asvg="http://schemas.microsoft.com/office/drawing/2016/SVG/main" r:embed="rId3"/>
+              </a:ext>
+            </a:extLst>
+          </a:blip>
+          <a:stretch>
+            <a:fillRect/>
+          </a:stretch>
+        </p:blipFill>
+        <p:spPr>
+          <a:xfrm>
+            <a:off x="411480" y="685801"/>
+            <a:ext cx="4708780" cy="5486400"/>
+          </a:xfrm>
+          <a:prstGeom prst="rect">
+            <a:avLst/>
+          </a:prstGeom>
+          <a:ln>
+            <a:noFill/>
+          </a:ln>
+          <a:effectLst/>
+        </p:spPr>
+      </p:pic>
     </p:spTree>
   </p:cSld>
   <p:clrMapOvr>
@@ -6221,7 +7223,7 @@
         <p:spPr>
           <a:xfrm>
             <a:off x="5532120" y="685800"/>
-            <a:ext cx="6110935" cy="1371600"/>
+            <a:ext cx="6110935" cy="1292020"/>
           </a:xfrm>
           <a:prstGeom prst="rect">
             <a:avLst/>
@@ -6252,7 +7254,7 @@
                 </a:solidFill>
                 <a:latin typeface="Calibri"/>
               </a:rPr>
-              <a:t>HOW THE WORK WAS PRODUCED</a:t>
+              <a:t>HOW I SATISFIED MYSELF IT IS SOUND</a:t>
             </a:r>
           </a:p>
           <a:p>
@@ -6268,15 +7270,39 @@
               </a:spcAft>
             </a:pPr>
             <a:r>
+              <a:rPr lang="en-US" sz="3000" b="1" i="0" dirty="0">
+                <a:solidFill>
+                  <a:srgbClr val="1F4E79"/>
+                </a:solidFill>
+                <a:latin typeface="Calibri"/>
+              </a:rPr>
+              <a:t>How the work was created</a:t>
+            </a:r>
+            <a:r>
               <a:rPr sz="3000" b="1" i="0" dirty="0">
                 <a:solidFill>
                   <a:srgbClr val="1F4E79"/>
                 </a:solidFill>
                 <a:latin typeface="Calibri"/>
               </a:rPr>
-              <a:t>AI throughout —
-judgement not delegated</a:t>
-            </a:r>
+              <a:t>,
+and </a:t>
+            </a:r>
+            <a:r>
+              <a:rPr lang="en-US" sz="3000" b="1" i="0" dirty="0">
+                <a:solidFill>
+                  <a:srgbClr val="1F4E79"/>
+                </a:solidFill>
+                <a:latin typeface="Calibri"/>
+              </a:rPr>
+              <a:t>what was examined</a:t>
+            </a:r>
+            <a:endParaRPr sz="3000" b="1" i="0" dirty="0">
+              <a:solidFill>
+                <a:srgbClr val="1F4E79"/>
+              </a:solidFill>
+              <a:latin typeface="Calibri"/>
+            </a:endParaRPr>
           </a:p>
         </p:txBody>
       </p:sp>
@@ -6334,7 +7360,7 @@
         <p:spPr>
           <a:xfrm>
             <a:off x="5532120" y="2121408"/>
-            <a:ext cx="6110935" cy="3051541"/>
+            <a:ext cx="6110935" cy="3954480"/>
           </a:xfrm>
           <a:prstGeom prst="rect">
             <a:avLst/>
@@ -6359,49 +7385,12 @@
               </a:spcAft>
             </a:pPr>
             <a:r>
-              <a:rPr sz="1900" b="1" i="0" dirty="0">
+              <a:rPr lang="en-US" sz="1200" b="1" dirty="0">
                 <a:solidFill>
                   <a:srgbClr val="141B2D"/>
                 </a:solidFill>
-                <a:latin typeface="Calibri"/>
-              </a:rPr>
-              <a:t>Claude, via Claude Code</a:t>
-            </a:r>
-            <a:r>
-              <a:rPr lang="en-US" sz="1900" b="1" dirty="0">
-                <a:solidFill>
-                  <a:srgbClr val="141B2D"/>
-                </a:solidFill>
-                <a:latin typeface="Calibri"/>
-              </a:rPr>
-              <a:t> </a:t>
-            </a:r>
-            <a:r>
-              <a:rPr sz="1900" b="1" i="0" dirty="0">
-                <a:solidFill>
-                  <a:srgbClr val="141B2D"/>
-                </a:solidFill>
-                <a:latin typeface="Calibri"/>
-              </a:rPr>
-              <a:t>throughout</a:t>
-            </a:r>
-            <a:r>
-              <a:rPr lang="en-US" sz="1900" b="1" i="0" dirty="0">
-                <a:solidFill>
-                  <a:srgbClr val="141B2D"/>
-                </a:solidFill>
-                <a:latin typeface="Calibri"/>
-              </a:rPr>
-              <a:t> the whole project</a:t>
-            </a:r>
-            <a:r>
-              <a:rPr sz="1900" b="1" i="0" dirty="0">
-                <a:solidFill>
-                  <a:srgbClr val="141B2D"/>
-                </a:solidFill>
-                <a:latin typeface="Calibri"/>
-              </a:rPr>
-              <a:t>.</a:t>
+              </a:rPr>
+              <a:t>Claude, via Claude Code throughout the whole project.</a:t>
             </a:r>
           </a:p>
           <a:p>
@@ -6417,20 +7406,13 @@
               </a:spcAft>
             </a:pPr>
             <a:r>
-              <a:rPr sz="1500" b="0" i="0" dirty="0">
+              <a:rPr lang="en-US" sz="1100" dirty="0">
                 <a:solidFill>
                   <a:srgbClr val="5A6478"/>
                 </a:solidFill>
-                <a:latin typeface="Calibri"/>
               </a:rPr>
               <a:t>Code written and debugged, result sentences pulled from the filings for me to read, commentary drafted and then rewritten. Full logs submitted.</a:t>
             </a:r>
-            <a:endParaRPr lang="en-US" sz="1500" b="0" i="0" dirty="0">
-              <a:solidFill>
-                <a:srgbClr val="5A6478"/>
-              </a:solidFill>
-              <a:latin typeface="Calibri"/>
-            </a:endParaRPr>
           </a:p>
           <a:p>
             <a:pPr>
@@ -6445,11 +7427,10 @@
               </a:spcAft>
             </a:pPr>
             <a:r>
-              <a:rPr lang="en-US" sz="1900" b="1" i="0" dirty="0">
+              <a:rPr lang="en-US" sz="1200" b="1" dirty="0">
                 <a:solidFill>
                   <a:srgbClr val="141B2D"/>
                 </a:solidFill>
-                <a:latin typeface="Calibri"/>
               </a:rPr>
               <a:t>The constraints were mine.</a:t>
             </a:r>
@@ -6467,35 +7448,12 @@
               </a:spcAft>
             </a:pPr>
             <a:r>
-              <a:rPr lang="en-US" sz="1500" b="0" i="0" dirty="0">
+              <a:rPr lang="en-US" sz="1100" dirty="0">
                 <a:solidFill>
                   <a:srgbClr val="5A6478"/>
                 </a:solidFill>
-                <a:latin typeface="Calibri"/>
               </a:rPr>
               <a:t>No feature unobservable before the event. Announcement drafts excluded as circular. The 30 filings read against the 8-Ks are my reading.</a:t>
-            </a:r>
-          </a:p>
-          <a:p>
-            <a:pPr>
-              <a:lnSpc>
-                <a:spcPct val="108000"/>
-              </a:lnSpc>
-              <a:spcBef>
-                <a:spcPts val="1400"/>
-              </a:spcBef>
-              <a:spcAft>
-                <a:spcPts val="300"/>
-              </a:spcAft>
-            </a:pPr>
-            <a:r>
-              <a:rPr lang="en-US" sz="1900" b="1" i="0" dirty="0">
-                <a:solidFill>
-                  <a:srgbClr val="141B2D"/>
-                </a:solidFill>
-                <a:latin typeface="Calibri"/>
-              </a:rPr>
-              <a:t>I made judgment calls. </a:t>
             </a:r>
           </a:p>
           <a:p>
@@ -6510,36 +7468,293 @@
                 <a:spcPts val="0"/>
               </a:spcAft>
             </a:pPr>
-            <a:r>
-              <a:rPr lang="en-US" sz="1500" b="0" i="0" dirty="0">
+            <a:endParaRPr lang="en-US" sz="1000" b="1" i="0" dirty="0">
+              <a:solidFill>
+                <a:srgbClr val="141B2D"/>
+              </a:solidFill>
+              <a:latin typeface="Calibri"/>
+            </a:endParaRPr>
+          </a:p>
+          <a:p>
+            <a:pPr>
+              <a:lnSpc>
+                <a:spcPct val="108000"/>
+              </a:lnSpc>
+              <a:spcBef>
+                <a:spcPts val="0"/>
+              </a:spcBef>
+              <a:spcAft>
+                <a:spcPts val="300"/>
+              </a:spcAft>
+            </a:pPr>
+            <a:r>
+              <a:rPr sz="1200" b="1" i="0" dirty="0">
+                <a:solidFill>
+                  <a:srgbClr val="141B2D"/>
+                </a:solidFill>
+                <a:latin typeface="Calibri"/>
+              </a:rPr>
+              <a:t>Leakage audit before anything was fitted.</a:t>
+            </a:r>
+          </a:p>
+          <a:p>
+            <a:pPr>
+              <a:lnSpc>
+                <a:spcPct val="112000"/>
+              </a:lnSpc>
+              <a:spcBef>
+                <a:spcPts val="0"/>
+              </a:spcBef>
+              <a:spcAft>
+                <a:spcPts val="0"/>
+              </a:spcAft>
+            </a:pPr>
+            <a:r>
+              <a:rPr sz="1100" b="0" i="0" dirty="0">
                 <a:solidFill>
                   <a:srgbClr val="5A6478"/>
                 </a:solidFill>
                 <a:latin typeface="Calibri"/>
               </a:rPr>
-              <a:t>It called some mixed scenarios mixed-positive. Cases like ASC-204's misses its primary endpoint and is rescued by a subgroup </a:t>
-            </a:r>
-            <a:r>
-              <a:rPr lang="en-US" sz="1500" dirty="0">
+              <a:t>R² 0.20 → 0.96 with the nine excluded columns put back.</a:t>
+            </a:r>
+          </a:p>
+          <a:p>
+            <a:pPr>
+              <a:lnSpc>
+                <a:spcPct val="112000"/>
+              </a:lnSpc>
+              <a:spcBef>
+                <a:spcPts val="0"/>
+              </a:spcBef>
+              <a:spcAft>
+                <a:spcPts val="0"/>
+              </a:spcAft>
+            </a:pPr>
+            <a:endParaRPr lang="en-US" sz="1400" dirty="0">
+              <a:solidFill>
+                <a:srgbClr val="5A6478"/>
+              </a:solidFill>
+              <a:latin typeface="Calibri"/>
+            </a:endParaRPr>
+          </a:p>
+          <a:p>
+            <a:pPr>
+              <a:lnSpc>
+                <a:spcPct val="112000"/>
+              </a:lnSpc>
+              <a:spcBef>
+                <a:spcPts val="0"/>
+              </a:spcBef>
+              <a:spcAft>
+                <a:spcPts val="0"/>
+              </a:spcAft>
+            </a:pPr>
+            <a:r>
+              <a:rPr sz="1200" b="1" i="0" dirty="0">
+                <a:solidFill>
+                  <a:srgbClr val="141B2D"/>
+                </a:solidFill>
+                <a:latin typeface="Calibri"/>
+              </a:rPr>
+              <a:t>Validated against honest nulls.</a:t>
+            </a:r>
+          </a:p>
+          <a:p>
+            <a:pPr>
+              <a:lnSpc>
+                <a:spcPct val="112000"/>
+              </a:lnSpc>
+              <a:spcBef>
+                <a:spcPts val="0"/>
+              </a:spcBef>
+              <a:spcAft>
+                <a:spcPts val="0"/>
+              </a:spcAft>
+            </a:pPr>
+            <a:r>
+              <a:rPr sz="1100" b="0" i="0" dirty="0">
                 <a:solidFill>
                   <a:srgbClr val="5A6478"/>
                 </a:solidFill>
                 <a:latin typeface="Calibri"/>
               </a:rPr>
-              <a:t>which is</a:t>
-            </a:r>
-            <a:r>
-              <a:rPr lang="en-US" sz="1500" b="0" i="0" dirty="0">
+              <a:t>Permuted features · bootstrap by filing, not by row · forward chaining takes R² from 0.20 to 0.17 — what the pipeline can deliver.</a:t>
+            </a:r>
+            <a:endParaRPr lang="en-US" sz="1100" b="0" i="0" dirty="0">
+              <a:solidFill>
+                <a:srgbClr val="5A6478"/>
+              </a:solidFill>
+              <a:latin typeface="Calibri"/>
+            </a:endParaRPr>
+          </a:p>
+          <a:p>
+            <a:pPr>
+              <a:lnSpc>
+                <a:spcPct val="112000"/>
+              </a:lnSpc>
+              <a:spcBef>
+                <a:spcPts val="0"/>
+              </a:spcBef>
+              <a:spcAft>
+                <a:spcPts val="0"/>
+              </a:spcAft>
+            </a:pPr>
+            <a:endParaRPr lang="en-AU" sz="1400" dirty="0">
+              <a:solidFill>
+                <a:srgbClr val="5A6478"/>
+              </a:solidFill>
+              <a:latin typeface="Calibri"/>
+            </a:endParaRPr>
+          </a:p>
+          <a:p>
+            <a:pPr>
+              <a:lnSpc>
+                <a:spcPct val="112000"/>
+              </a:lnSpc>
+            </a:pPr>
+            <a:r>
+              <a:rPr lang="en-US" sz="1200" b="1" dirty="0">
+                <a:solidFill>
+                  <a:srgbClr val="141B2D"/>
+                </a:solidFill>
+              </a:rPr>
+              <a:t>Manual Validation Methods </a:t>
+            </a:r>
+          </a:p>
+          <a:p>
+            <a:pPr>
+              <a:lnSpc>
+                <a:spcPct val="112000"/>
+              </a:lnSpc>
+              <a:spcBef>
+                <a:spcPts val="0"/>
+              </a:spcBef>
+              <a:spcAft>
+                <a:spcPts val="0"/>
+              </a:spcAft>
+            </a:pPr>
+            <a:r>
+              <a:rPr lang="en-AU" sz="1100" dirty="0">
                 <a:solidFill>
                   <a:srgbClr val="5A6478"/>
                 </a:solidFill>
                 <a:latin typeface="Calibri"/>
               </a:rPr>
-              <a:t> mixed-negative.</a:t>
-            </a:r>
-          </a:p>
-        </p:txBody>
-      </p:sp>
+              <a:t>Validated the code cell by cell to ensure it met the requirements of the task even though it was produced by AI. Rewrote the commentary across various areas of the project. </a:t>
+            </a:r>
+          </a:p>
+          <a:p>
+            <a:pPr>
+              <a:lnSpc>
+                <a:spcPct val="112000"/>
+              </a:lnSpc>
+              <a:spcBef>
+                <a:spcPts val="0"/>
+              </a:spcBef>
+              <a:spcAft>
+                <a:spcPts val="0"/>
+              </a:spcAft>
+            </a:pPr>
+            <a:endParaRPr lang="en-AU" sz="1400" dirty="0">
+              <a:solidFill>
+                <a:srgbClr val="5A6478"/>
+              </a:solidFill>
+              <a:latin typeface="Calibri"/>
+            </a:endParaRPr>
+          </a:p>
+        </p:txBody>
+      </p:sp>
+      <p:pic>
+        <p:nvPicPr>
+          <p:cNvPr id="8" name="Camera 7">
+            <a:extLst>
+              <a:ext uri="{FF2B5EF4-FFF2-40B4-BE49-F238E27FC236}">
+                <a16:creationId xmlns:a16="http://schemas.microsoft.com/office/drawing/2014/main" id="{142A8A96-156C-8D11-9714-4BA54BF6AB09}"/>
+              </a:ext>
+            </a:extLst>
+          </p:cNvPr>
+          <p:cNvPicPr>
+            <a:picLocks noChangeAspect="1"/>
+            <a:extLst>
+              <a:ext uri="{51228E76-BA90-4043-B771-695A4F85340A}">
+                <alf:liveFeedProps xmlns:alf="http://schemas.microsoft.com/office/drawing/2021/livefeed"/>
+              </a:ext>
+            </a:extLst>
+          </p:cNvPicPr>
+          <p:nvPr/>
+        </p:nvPicPr>
+        <p:blipFill>
+          <a:blip>
+            <a:extLst>
+              <a:ext uri="{96DAC541-7B7A-43D3-8B79-37D633B846F1}">
+                <asvg:svgBlip xmlns:asvg="http://schemas.microsoft.com/office/drawing/2016/SVG/main" r:embed="rId3"/>
+              </a:ext>
+            </a:extLst>
+          </a:blip>
+          <a:stretch>
+            <a:fillRect/>
+          </a:stretch>
+        </p:blipFill>
+        <p:spPr>
+          <a:xfrm>
+            <a:off x="411480" y="708659"/>
+            <a:ext cx="4708780" cy="5463541"/>
+          </a:xfrm>
+          <a:prstGeom prst="rect">
+            <a:avLst/>
+          </a:prstGeom>
+          <a:ln>
+            <a:noFill/>
+          </a:ln>
+          <a:effectLst/>
+        </p:spPr>
+      </p:pic>
+      <p:pic>
+        <p:nvPicPr>
+          <p:cNvPr id="9" name="Camera 8">
+            <a:extLst>
+              <a:ext uri="{FF2B5EF4-FFF2-40B4-BE49-F238E27FC236}">
+                <a16:creationId xmlns:a16="http://schemas.microsoft.com/office/drawing/2014/main" id="{AF7EBAB1-3553-1492-32A1-711CAAA38672}"/>
+              </a:ext>
+            </a:extLst>
+          </p:cNvPr>
+          <p:cNvPicPr>
+            <a:picLocks noChangeAspect="1"/>
+            <a:extLst>
+              <a:ext uri="{51228E76-BA90-4043-B771-695A4F85340A}">
+                <alf:liveFeedProps xmlns:alf="http://schemas.microsoft.com/office/drawing/2021/livefeed"/>
+              </a:ext>
+            </a:extLst>
+          </p:cNvPicPr>
+          <p:nvPr/>
+        </p:nvPicPr>
+        <p:blipFill>
+          <a:blip>
+            <a:extLst>
+              <a:ext uri="{96DAC541-7B7A-43D3-8B79-37D633B846F1}">
+                <asvg:svgBlip xmlns:asvg="http://schemas.microsoft.com/office/drawing/2016/SVG/main" r:embed="rId3"/>
+              </a:ext>
+            </a:extLst>
+          </a:blip>
+          <a:stretch>
+            <a:fillRect/>
+          </a:stretch>
+        </p:blipFill>
+        <p:spPr>
+          <a:xfrm>
+            <a:off x="411480" y="685801"/>
+            <a:ext cx="4708780" cy="5486400"/>
+          </a:xfrm>
+          <a:prstGeom prst="rect">
+            <a:avLst/>
+          </a:prstGeom>
+          <a:ln>
+            <a:noFill/>
+          </a:ln>
+          <a:effectLst/>
+        </p:spPr>
+      </p:pic>
     </p:spTree>
   </p:cSld>
   <p:clrMapOvr>
@@ -6691,600 +7906,6 @@
         </p:nvSpPr>
         <p:spPr>
           <a:xfrm>
-            <a:off x="5532120" y="685800"/>
-            <a:ext cx="6110935" cy="1292020"/>
-          </a:xfrm>
-          <a:prstGeom prst="rect">
-            <a:avLst/>
-          </a:prstGeom>
-          <a:noFill/>
-        </p:spPr>
-        <p:txBody>
-          <a:bodyPr wrap="square">
-            <a:spAutoFit/>
-          </a:bodyPr>
-          <a:lstStyle/>
-          <a:p>
-            <a:pPr>
-              <a:lnSpc>
-                <a:spcPct val="108000"/>
-              </a:lnSpc>
-              <a:spcBef>
-                <a:spcPts val="0"/>
-              </a:spcBef>
-              <a:spcAft>
-                <a:spcPts val="600"/>
-              </a:spcAft>
-            </a:pPr>
-            <a:r>
-              <a:rPr sz="1200" b="1" i="0" dirty="0">
-                <a:solidFill>
-                  <a:srgbClr val="5A6478"/>
-                </a:solidFill>
-                <a:latin typeface="Calibri"/>
-              </a:rPr>
-              <a:t>HOW I SATISFIED MYSELF IT IS SOUND</a:t>
-            </a:r>
-          </a:p>
-          <a:p>
-            <a:pPr>
-              <a:lnSpc>
-                <a:spcPct val="100000"/>
-              </a:lnSpc>
-              <a:spcBef>
-                <a:spcPts val="0"/>
-              </a:spcBef>
-              <a:spcAft>
-                <a:spcPts val="0"/>
-              </a:spcAft>
-            </a:pPr>
-            <a:r>
-              <a:rPr lang="en-US" sz="3000" b="1" i="0" dirty="0">
-                <a:solidFill>
-                  <a:srgbClr val="1F4E79"/>
-                </a:solidFill>
-                <a:latin typeface="Calibri"/>
-              </a:rPr>
-              <a:t>How the work was created</a:t>
-            </a:r>
-            <a:r>
-              <a:rPr sz="3000" b="1" i="0" dirty="0">
-                <a:solidFill>
-                  <a:srgbClr val="1F4E79"/>
-                </a:solidFill>
-                <a:latin typeface="Calibri"/>
-              </a:rPr>
-              <a:t>,
-and </a:t>
-            </a:r>
-            <a:r>
-              <a:rPr lang="en-US" sz="3000" b="1" i="0" dirty="0">
-                <a:solidFill>
-                  <a:srgbClr val="1F4E79"/>
-                </a:solidFill>
-                <a:latin typeface="Calibri"/>
-              </a:rPr>
-              <a:t>what was examined</a:t>
-            </a:r>
-            <a:endParaRPr sz="3000" b="1" i="0" dirty="0">
-              <a:solidFill>
-                <a:srgbClr val="1F4E79"/>
-              </a:solidFill>
-              <a:latin typeface="Calibri"/>
-            </a:endParaRPr>
-          </a:p>
-        </p:txBody>
-      </p:sp>
-      <p:sp>
-        <p:nvSpPr>
-          <p:cNvPr id="5" name="Rectangle 4"/>
-          <p:cNvSpPr/>
-          <p:nvPr/>
-        </p:nvSpPr>
-        <p:spPr>
-          <a:xfrm>
-            <a:off x="5532120" y="1847088"/>
-            <a:ext cx="1371600" cy="38100"/>
-          </a:xfrm>
-          <a:prstGeom prst="rect">
-            <a:avLst/>
-          </a:prstGeom>
-          <a:solidFill>
-            <a:srgbClr val="1F4E79"/>
-          </a:solidFill>
-          <a:ln>
-            <a:noFill/>
-          </a:ln>
-          <a:effectLst/>
-        </p:spPr>
-        <p:style>
-          <a:lnRef idx="1">
-            <a:schemeClr val="accent1"/>
-          </a:lnRef>
-          <a:fillRef idx="3">
-            <a:schemeClr val="accent1"/>
-          </a:fillRef>
-          <a:effectRef idx="2">
-            <a:schemeClr val="accent1"/>
-          </a:effectRef>
-          <a:fontRef idx="minor">
-            <a:schemeClr val="lt1"/>
-          </a:fontRef>
-        </p:style>
-        <p:txBody>
-          <a:bodyPr rtlCol="0" anchor="ctr"/>
-          <a:lstStyle/>
-          <a:p>
-            <a:pPr algn="ctr"/>
-            <a:endParaRPr/>
-          </a:p>
-        </p:txBody>
-      </p:sp>
-      <p:sp>
-        <p:nvSpPr>
-          <p:cNvPr id="6" name="TextBox 5"/>
-          <p:cNvSpPr txBox="1"/>
-          <p:nvPr/>
-        </p:nvSpPr>
-        <p:spPr>
-          <a:xfrm>
-            <a:off x="5532120" y="2121408"/>
-            <a:ext cx="6110935" cy="3954480"/>
-          </a:xfrm>
-          <a:prstGeom prst="rect">
-            <a:avLst/>
-          </a:prstGeom>
-          <a:noFill/>
-        </p:spPr>
-        <p:txBody>
-          <a:bodyPr wrap="square">
-            <a:spAutoFit/>
-          </a:bodyPr>
-          <a:lstStyle/>
-          <a:p>
-            <a:pPr>
-              <a:lnSpc>
-                <a:spcPct val="108000"/>
-              </a:lnSpc>
-              <a:spcBef>
-                <a:spcPts val="0"/>
-              </a:spcBef>
-              <a:spcAft>
-                <a:spcPts val="300"/>
-              </a:spcAft>
-            </a:pPr>
-            <a:r>
-              <a:rPr lang="en-US" sz="1200" b="1" dirty="0">
-                <a:solidFill>
-                  <a:srgbClr val="141B2D"/>
-                </a:solidFill>
-              </a:rPr>
-              <a:t>Claude, via Claude Code throughout the whole project.</a:t>
-            </a:r>
-          </a:p>
-          <a:p>
-            <a:pPr>
-              <a:lnSpc>
-                <a:spcPct val="112000"/>
-              </a:lnSpc>
-              <a:spcBef>
-                <a:spcPts val="0"/>
-              </a:spcBef>
-              <a:spcAft>
-                <a:spcPts val="0"/>
-              </a:spcAft>
-            </a:pPr>
-            <a:r>
-              <a:rPr lang="en-US" sz="1100" dirty="0">
-                <a:solidFill>
-                  <a:srgbClr val="5A6478"/>
-                </a:solidFill>
-              </a:rPr>
-              <a:t>Code written and debugged, result sentences pulled from the filings for me to read, commentary drafted and then rewritten. Full logs submitted.</a:t>
-            </a:r>
-          </a:p>
-          <a:p>
-            <a:pPr>
-              <a:lnSpc>
-                <a:spcPct val="108000"/>
-              </a:lnSpc>
-              <a:spcBef>
-                <a:spcPts val="1400"/>
-              </a:spcBef>
-              <a:spcAft>
-                <a:spcPts val="300"/>
-              </a:spcAft>
-            </a:pPr>
-            <a:r>
-              <a:rPr lang="en-US" sz="1200" b="1" dirty="0">
-                <a:solidFill>
-                  <a:srgbClr val="141B2D"/>
-                </a:solidFill>
-              </a:rPr>
-              <a:t>The constraints were mine.</a:t>
-            </a:r>
-          </a:p>
-          <a:p>
-            <a:pPr>
-              <a:lnSpc>
-                <a:spcPct val="112000"/>
-              </a:lnSpc>
-              <a:spcBef>
-                <a:spcPts val="0"/>
-              </a:spcBef>
-              <a:spcAft>
-                <a:spcPts val="0"/>
-              </a:spcAft>
-            </a:pPr>
-            <a:r>
-              <a:rPr lang="en-US" sz="1100" dirty="0">
-                <a:solidFill>
-                  <a:srgbClr val="5A6478"/>
-                </a:solidFill>
-              </a:rPr>
-              <a:t>No feature unobservable before the event. Announcement drafts excluded as circular. The 30 filings read against the 8-Ks are my reading.</a:t>
-            </a:r>
-          </a:p>
-          <a:p>
-            <a:pPr>
-              <a:lnSpc>
-                <a:spcPct val="112000"/>
-              </a:lnSpc>
-              <a:spcBef>
-                <a:spcPts val="0"/>
-              </a:spcBef>
-              <a:spcAft>
-                <a:spcPts val="0"/>
-              </a:spcAft>
-            </a:pPr>
-            <a:endParaRPr lang="en-US" sz="1000" b="1" i="0" dirty="0">
-              <a:solidFill>
-                <a:srgbClr val="141B2D"/>
-              </a:solidFill>
-              <a:latin typeface="Calibri"/>
-            </a:endParaRPr>
-          </a:p>
-          <a:p>
-            <a:pPr>
-              <a:lnSpc>
-                <a:spcPct val="108000"/>
-              </a:lnSpc>
-              <a:spcBef>
-                <a:spcPts val="0"/>
-              </a:spcBef>
-              <a:spcAft>
-                <a:spcPts val="300"/>
-              </a:spcAft>
-            </a:pPr>
-            <a:r>
-              <a:rPr sz="1200" b="1" i="0" dirty="0">
-                <a:solidFill>
-                  <a:srgbClr val="141B2D"/>
-                </a:solidFill>
-                <a:latin typeface="Calibri"/>
-              </a:rPr>
-              <a:t>Leakage audit before anything was fitted.</a:t>
-            </a:r>
-          </a:p>
-          <a:p>
-            <a:pPr>
-              <a:lnSpc>
-                <a:spcPct val="112000"/>
-              </a:lnSpc>
-              <a:spcBef>
-                <a:spcPts val="0"/>
-              </a:spcBef>
-              <a:spcAft>
-                <a:spcPts val="0"/>
-              </a:spcAft>
-            </a:pPr>
-            <a:r>
-              <a:rPr sz="1100" b="0" i="0" dirty="0">
-                <a:solidFill>
-                  <a:srgbClr val="5A6478"/>
-                </a:solidFill>
-                <a:latin typeface="Calibri"/>
-              </a:rPr>
-              <a:t>R² 0.20 → 0.96 with the nine excluded columns put back.</a:t>
-            </a:r>
-          </a:p>
-          <a:p>
-            <a:pPr>
-              <a:lnSpc>
-                <a:spcPct val="112000"/>
-              </a:lnSpc>
-              <a:spcBef>
-                <a:spcPts val="0"/>
-              </a:spcBef>
-              <a:spcAft>
-                <a:spcPts val="0"/>
-              </a:spcAft>
-            </a:pPr>
-            <a:endParaRPr lang="en-US" sz="1400" dirty="0">
-              <a:solidFill>
-                <a:srgbClr val="5A6478"/>
-              </a:solidFill>
-              <a:latin typeface="Calibri"/>
-            </a:endParaRPr>
-          </a:p>
-          <a:p>
-            <a:pPr>
-              <a:lnSpc>
-                <a:spcPct val="112000"/>
-              </a:lnSpc>
-              <a:spcBef>
-                <a:spcPts val="0"/>
-              </a:spcBef>
-              <a:spcAft>
-                <a:spcPts val="0"/>
-              </a:spcAft>
-            </a:pPr>
-            <a:r>
-              <a:rPr sz="1200" b="1" i="0" dirty="0">
-                <a:solidFill>
-                  <a:srgbClr val="141B2D"/>
-                </a:solidFill>
-                <a:latin typeface="Calibri"/>
-              </a:rPr>
-              <a:t>Validated against honest nulls.</a:t>
-            </a:r>
-          </a:p>
-          <a:p>
-            <a:pPr>
-              <a:lnSpc>
-                <a:spcPct val="112000"/>
-              </a:lnSpc>
-              <a:spcBef>
-                <a:spcPts val="0"/>
-              </a:spcBef>
-              <a:spcAft>
-                <a:spcPts val="0"/>
-              </a:spcAft>
-            </a:pPr>
-            <a:r>
-              <a:rPr sz="1100" b="0" i="0" dirty="0">
-                <a:solidFill>
-                  <a:srgbClr val="5A6478"/>
-                </a:solidFill>
-                <a:latin typeface="Calibri"/>
-              </a:rPr>
-              <a:t>Permuted features · bootstrap by filing, not by row · forward chaining takes R² from 0.20 to 0.17 — what the pipeline can deliver.</a:t>
-            </a:r>
-            <a:endParaRPr lang="en-US" sz="1100" b="0" i="0" dirty="0">
-              <a:solidFill>
-                <a:srgbClr val="5A6478"/>
-              </a:solidFill>
-              <a:latin typeface="Calibri"/>
-            </a:endParaRPr>
-          </a:p>
-          <a:p>
-            <a:pPr>
-              <a:lnSpc>
-                <a:spcPct val="112000"/>
-              </a:lnSpc>
-              <a:spcBef>
-                <a:spcPts val="0"/>
-              </a:spcBef>
-              <a:spcAft>
-                <a:spcPts val="0"/>
-              </a:spcAft>
-            </a:pPr>
-            <a:endParaRPr lang="en-AU" sz="1400" dirty="0">
-              <a:solidFill>
-                <a:srgbClr val="5A6478"/>
-              </a:solidFill>
-              <a:latin typeface="Calibri"/>
-            </a:endParaRPr>
-          </a:p>
-          <a:p>
-            <a:pPr>
-              <a:lnSpc>
-                <a:spcPct val="112000"/>
-              </a:lnSpc>
-            </a:pPr>
-            <a:r>
-              <a:rPr lang="en-US" sz="1200" b="1" dirty="0">
-                <a:solidFill>
-                  <a:srgbClr val="141B2D"/>
-                </a:solidFill>
-              </a:rPr>
-              <a:t>Manual Validation Methods </a:t>
-            </a:r>
-          </a:p>
-          <a:p>
-            <a:pPr>
-              <a:lnSpc>
-                <a:spcPct val="112000"/>
-              </a:lnSpc>
-              <a:spcBef>
-                <a:spcPts val="0"/>
-              </a:spcBef>
-              <a:spcAft>
-                <a:spcPts val="0"/>
-              </a:spcAft>
-            </a:pPr>
-            <a:r>
-              <a:rPr lang="en-AU" sz="1100" dirty="0">
-                <a:solidFill>
-                  <a:srgbClr val="5A6478"/>
-                </a:solidFill>
-                <a:latin typeface="Calibri"/>
-              </a:rPr>
-              <a:t>Validated the code cell by cell to ensure it met the requirements of the task even though it was produced by AI. Rewrote the commentary across various areas of the project. </a:t>
-            </a:r>
-          </a:p>
-          <a:p>
-            <a:pPr>
-              <a:lnSpc>
-                <a:spcPct val="112000"/>
-              </a:lnSpc>
-              <a:spcBef>
-                <a:spcPts val="0"/>
-              </a:spcBef>
-              <a:spcAft>
-                <a:spcPts val="0"/>
-              </a:spcAft>
-            </a:pPr>
-            <a:endParaRPr lang="en-AU" sz="1400" dirty="0">
-              <a:solidFill>
-                <a:srgbClr val="5A6478"/>
-              </a:solidFill>
-              <a:latin typeface="Calibri"/>
-            </a:endParaRPr>
-          </a:p>
-        </p:txBody>
-      </p:sp>
-    </p:spTree>
-  </p:cSld>
-  <p:clrMapOvr>
-    <a:masterClrMapping/>
-  </p:clrMapOvr>
-</p:sld>
-</file>
-
-<file path=ppt/slides/slide8.xml><?xml version="1.0" encoding="utf-8"?>
-<p:sld xmlns:a="http://schemas.openxmlformats.org/drawingml/2006/main" xmlns:r="http://schemas.openxmlformats.org/officeDocument/2006/relationships" xmlns:p="http://schemas.openxmlformats.org/presentationml/2006/main">
-  <p:cSld>
-    <p:spTree>
-      <p:nvGrpSpPr>
-        <p:cNvPr id="1" name=""/>
-        <p:cNvGrpSpPr/>
-        <p:nvPr/>
-      </p:nvGrpSpPr>
-      <p:grpSpPr>
-        <a:xfrm>
-          <a:off x="0" y="0"/>
-          <a:ext cx="0" cy="0"/>
-          <a:chOff x="0" y="0"/>
-          <a:chExt cx="0" cy="0"/>
-        </a:xfrm>
-      </p:grpSpPr>
-      <p:sp>
-        <p:nvSpPr>
-          <p:cNvPr id="2" name="Rectangle 1"/>
-          <p:cNvSpPr/>
-          <p:nvPr/>
-        </p:nvSpPr>
-        <p:spPr>
-          <a:xfrm>
-            <a:off x="0" y="0"/>
-            <a:ext cx="12191695" cy="6858000"/>
-          </a:xfrm>
-          <a:prstGeom prst="rect">
-            <a:avLst/>
-          </a:prstGeom>
-          <a:solidFill>
-            <a:srgbClr val="FFFFFF"/>
-          </a:solidFill>
-          <a:ln>
-            <a:noFill/>
-          </a:ln>
-          <a:effectLst/>
-        </p:spPr>
-        <p:style>
-          <a:lnRef idx="1">
-            <a:schemeClr val="accent1"/>
-          </a:lnRef>
-          <a:fillRef idx="3">
-            <a:schemeClr val="accent1"/>
-          </a:fillRef>
-          <a:effectRef idx="2">
-            <a:schemeClr val="accent1"/>
-          </a:effectRef>
-          <a:fontRef idx="minor">
-            <a:schemeClr val="lt1"/>
-          </a:fontRef>
-        </p:style>
-        <p:txBody>
-          <a:bodyPr rtlCol="0" anchor="ctr"/>
-          <a:lstStyle/>
-          <a:p>
-            <a:pPr algn="ctr"/>
-            <a:endParaRPr/>
-          </a:p>
-        </p:txBody>
-      </p:sp>
-      <p:sp>
-        <p:nvSpPr>
-          <p:cNvPr id="3" name="Rounded Rectangle 2"/>
-          <p:cNvSpPr/>
-          <p:nvPr/>
-        </p:nvSpPr>
-        <p:spPr>
-          <a:xfrm>
-            <a:off x="411480" y="685800"/>
-            <a:ext cx="4663440" cy="5486400"/>
-          </a:xfrm>
-          <a:prstGeom prst="roundRect">
-            <a:avLst>
-              <a:gd name="adj" fmla="val 2000"/>
-            </a:avLst>
-          </a:prstGeom>
-          <a:solidFill>
-            <a:srgbClr val="EDF0F5"/>
-          </a:solidFill>
-          <a:ln w="12700">
-            <a:solidFill>
-              <a:srgbClr val="C2CBD8"/>
-            </a:solidFill>
-          </a:ln>
-          <a:effectLst/>
-        </p:spPr>
-        <p:style>
-          <a:lnRef idx="1">
-            <a:schemeClr val="accent1"/>
-          </a:lnRef>
-          <a:fillRef idx="3">
-            <a:schemeClr val="accent1"/>
-          </a:fillRef>
-          <a:effectRef idx="2">
-            <a:schemeClr val="accent1"/>
-          </a:effectRef>
-          <a:fontRef idx="minor">
-            <a:schemeClr val="lt1"/>
-          </a:fontRef>
-        </p:style>
-        <p:txBody>
-          <a:bodyPr wrap="square" rtlCol="0" anchor="ctr"/>
-          <a:lstStyle/>
-          <a:p>
-            <a:pPr algn="ctr"/>
-            <a:r>
-              <a:rPr sz="1300" b="1">
-                <a:solidFill>
-                  <a:srgbClr val="9AA4B2"/>
-                </a:solidFill>
-                <a:latin typeface="Calibri"/>
-              </a:rPr>
-              <a:t>VIDEO</a:t>
-            </a:r>
-          </a:p>
-          <a:p>
-            <a:pPr algn="ctr">
-              <a:spcBef>
-                <a:spcPts val="400"/>
-              </a:spcBef>
-            </a:pPr>
-            <a:r>
-              <a:rPr sz="900">
-                <a:solidFill>
-                  <a:srgbClr val="9AA4B2"/>
-                </a:solidFill>
-                <a:latin typeface="Calibri"/>
-              </a:rPr>
-              <a:t>place your camera here · delete this shape before recording</a:t>
-            </a:r>
-          </a:p>
-        </p:txBody>
-      </p:sp>
-      <p:sp>
-        <p:nvSpPr>
-          <p:cNvPr id="4" name="TextBox 3"/>
-          <p:cNvSpPr txBox="1"/>
-          <p:nvPr/>
-        </p:nvSpPr>
-        <p:spPr>
-          <a:xfrm>
             <a:off x="5532119" y="1247862"/>
             <a:ext cx="6110935" cy="830356"/>
           </a:xfrm>
@@ -7545,6 +8166,96 @@
           </a:p>
         </p:txBody>
       </p:sp>
+      <p:pic>
+        <p:nvPicPr>
+          <p:cNvPr id="8" name="Camera 7">
+            <a:extLst>
+              <a:ext uri="{FF2B5EF4-FFF2-40B4-BE49-F238E27FC236}">
+                <a16:creationId xmlns:a16="http://schemas.microsoft.com/office/drawing/2014/main" id="{33410830-612F-7D1D-7FB9-556950B61CBA}"/>
+              </a:ext>
+            </a:extLst>
+          </p:cNvPr>
+          <p:cNvPicPr>
+            <a:picLocks noChangeAspect="1"/>
+            <a:extLst>
+              <a:ext uri="{51228E76-BA90-4043-B771-695A4F85340A}">
+                <alf:liveFeedProps xmlns:alf="http://schemas.microsoft.com/office/drawing/2021/livefeed"/>
+              </a:ext>
+            </a:extLst>
+          </p:cNvPicPr>
+          <p:nvPr/>
+        </p:nvPicPr>
+        <p:blipFill>
+          <a:blip>
+            <a:extLst>
+              <a:ext uri="{96DAC541-7B7A-43D3-8B79-37D633B846F1}">
+                <asvg:svgBlip xmlns:asvg="http://schemas.microsoft.com/office/drawing/2016/SVG/main" r:embed="rId3"/>
+              </a:ext>
+            </a:extLst>
+          </a:blip>
+          <a:stretch>
+            <a:fillRect/>
+          </a:stretch>
+        </p:blipFill>
+        <p:spPr>
+          <a:xfrm>
+            <a:off x="411480" y="708659"/>
+            <a:ext cx="4708780" cy="5463541"/>
+          </a:xfrm>
+          <a:prstGeom prst="rect">
+            <a:avLst/>
+          </a:prstGeom>
+          <a:ln>
+            <a:noFill/>
+          </a:ln>
+          <a:effectLst/>
+        </p:spPr>
+      </p:pic>
+      <p:pic>
+        <p:nvPicPr>
+          <p:cNvPr id="9" name="Camera 8">
+            <a:extLst>
+              <a:ext uri="{FF2B5EF4-FFF2-40B4-BE49-F238E27FC236}">
+                <a16:creationId xmlns:a16="http://schemas.microsoft.com/office/drawing/2014/main" id="{68519D37-9EE9-6B1B-A815-D27D96660D43}"/>
+              </a:ext>
+            </a:extLst>
+          </p:cNvPr>
+          <p:cNvPicPr>
+            <a:picLocks noChangeAspect="1"/>
+            <a:extLst>
+              <a:ext uri="{51228E76-BA90-4043-B771-695A4F85340A}">
+                <alf:liveFeedProps xmlns:alf="http://schemas.microsoft.com/office/drawing/2021/livefeed"/>
+              </a:ext>
+            </a:extLst>
+          </p:cNvPicPr>
+          <p:nvPr/>
+        </p:nvPicPr>
+        <p:blipFill>
+          <a:blip>
+            <a:extLst>
+              <a:ext uri="{96DAC541-7B7A-43D3-8B79-37D633B846F1}">
+                <asvg:svgBlip xmlns:asvg="http://schemas.microsoft.com/office/drawing/2016/SVG/main" r:embed="rId3"/>
+              </a:ext>
+            </a:extLst>
+          </a:blip>
+          <a:stretch>
+            <a:fillRect/>
+          </a:stretch>
+        </p:blipFill>
+        <p:spPr>
+          <a:xfrm>
+            <a:off x="411480" y="685801"/>
+            <a:ext cx="4708780" cy="5486400"/>
+          </a:xfrm>
+          <a:prstGeom prst="rect">
+            <a:avLst/>
+          </a:prstGeom>
+          <a:ln>
+            <a:noFill/>
+          </a:ln>
+          <a:effectLst/>
+        </p:spPr>
+      </p:pic>
     </p:spTree>
   </p:cSld>
   <p:clrMapOvr>
